--- a/talks/2026-10-16-secd-fukuoka/SecurityDays2026Fukuoka_FB-05_小出.pptx
+++ b/talks/2026-10-16-secd-fukuoka/SecurityDays2026Fukuoka_FB-05_小出.pptx
@@ -613,7 +613,7 @@
           <a:p>
             <a:r>
               <a:rPr lang="en-US" dirty="0"/>
-              <a:t>FIT2026 の人材像の要約。ここは復習なので短く。0:10–0:11</a:t>
+              <a:t>今日の新しい提案その1。5月の講演では「作業はAI、判断は人」と線を引いた。今日はその線を保ったまま、判断の場にAIを座らせる。少人数の組織では、反対意見を言ってくれる同僚がいないことが多い。その役をAIに持たせる。0:09–0:11</a:t>
             </a:r>
             <a:endParaRPr lang="en-US" dirty="0"/>
           </a:p>
@@ -701,7 +701,7 @@
           <a:p>
             <a:r>
               <a:rPr lang="en-US" dirty="0"/>
-              <a:t>今日の新しい提案その1。「使う・使わない」の二択にしない（FIT 考察の二分法からの解放）。どこに、どの権限で、どの記録のもとに置くかを決める。0:11–0:13</a:t>
+              <a:t>FIT2026 の人材像の要約。復習なので短く。0:11–0:12</a:t>
             </a:r>
             <a:endParaRPr lang="en-US" dirty="0"/>
           </a:p>
@@ -789,7 +789,7 @@
           <a:p>
             <a:r>
               <a:rPr lang="en-US" dirty="0"/>
-              <a:t>今日の新しい提案その2。FIT の評価観点「過信と過剰な拒否の両方を観察」を、現場の運用に落としたもの。0:13–0:16</a:t>
+              <a:t>5月の鹿児島の講演で使ったミニ演習の続編。前半は同じ前提で、今回は「AIの調査結果」が途中で届く。挙手で A/B/C を聞く（30秒）。B が多ければ「静的解析はどこまで見ているか」「間違っていたら誰が困るか」を問う。0:12–0:14</a:t>
             </a:r>
             <a:endParaRPr lang="en-US" dirty="0"/>
           </a:p>
@@ -877,7 +877,7 @@
           <a:p>
             <a:r>
               <a:rPr lang="en-US" dirty="0"/>
-              <a:t>沈まないための備えの「自社でAIを使うと守る面が増える」の再掲。AIセキュリティのタグに対応。0:16–0:18</a:t>
+              <a:t>今日の新しい提案その2。5月の講演の選択肢 C「保留して調査と暫定連絡」を、保留で終わらせず「見直し時刻と覆す条件つきの暫定判断」にしたもの。FIT の評価観点「過信と過剰な拒否の両方を観察」を現場の判断に落とした。正解を配るのではなく型を示す、と言う。0:14–0:18</a:t>
             </a:r>
             <a:endParaRPr lang="en-US" dirty="0"/>
           </a:p>
@@ -1141,7 +1141,7 @@
           <a:p>
             <a:r>
               <a:rPr lang="en-US" dirty="0"/>
-              <a:t>今日の新しい提案その3。5つの判断×1枚＝A4で5枚から始められる。沈まないための備えの「最初に決める3つ（重要業務・RTO/RPO・代替運用）」が埋まっていることが前提。雛形は付録1。0:19–0:22</a:t>
+              <a:t>5月の講演の「境界設計（AIに何を見せ、何を任せ、どこで人が承認するか）」を、判断の物差しにしたもの。指示の混入（プロンプトインジェクション）や権限の渡しすぎへの備えも、この表の右側で受ける。0:19–0:21</a:t>
             </a:r>
             <a:endParaRPr lang="en-US" dirty="0"/>
           </a:p>
@@ -1229,7 +1229,7 @@
           <a:p>
             <a:r>
               <a:rPr lang="en-US" dirty="0"/>
-              <a:t>FIT の五要素のうち「越境協働」。外の組織（委託先・地域の協議会・警察）との連絡も判断カードに書く。0:22–0:24</a:t>
+              <a:t>5月の講演で挙げた判断設計（招集条件・停止条件・公表条件・優先順位・判断責任）と「確認する順番」を、そのまま書き込める形にした。雛形は付録1。地域の協議会・警察など外の頼り先も1枚に入れる（5月の「地域全体で支える」）。0:21–0:23</a:t>
             </a:r>
             <a:endParaRPr lang="en-US" dirty="0"/>
           </a:p>
@@ -1405,7 +1405,7 @@
           <a:p>
             <a:r>
               <a:rPr lang="en-US" dirty="0"/>
-              <a:t>今日の新しい提案その4。演習の準備と記録が重いことが、小さな組織で机上演習が続かない理由の一つ。AIで準備と記録の手間を下げる。FIT の「不確実性を意図的に設計する」（原則3）の実務版。進行雛形は付録2。0:24–0:27</a:t>
+              <a:t>今日の新しい提案その4。演習の準備と記録が重いことが、小さな組織で机上演習が続かない理由の一つ。AIで準備と記録の手間を下げる。FIT の「不確実性を意図的に設計する」（原則3）の実務版。進行雛形は付録2。0:23–0:26</a:t>
             </a:r>
             <a:endParaRPr lang="en-US" dirty="0"/>
           </a:p>
@@ -1581,7 +1581,7 @@
           <a:p>
             <a:r>
               <a:rPr lang="en-US" dirty="0"/>
-              <a:t>押していたらこの1枚は飛ばす。「人を評価しない」は必ず口頭で言う（評価されると誰も本当のことを言わなくなる）。0:27–0:28</a:t>
+              <a:t>押していたらこの1枚は飛ばす。「人を評価しない」は必ず口頭で言う（評価されると誰も本当のことを言わなくなる）。0:26–0:28</a:t>
             </a:r>
             <a:endParaRPr lang="en-US" dirty="0"/>
           </a:p>
@@ -2021,7 +2021,7 @@
           <a:p>
             <a:r>
               <a:rPr lang="en-US" dirty="0"/>
-              <a:t>過去2つの講演の結論を1枚で回収する。初めて聞く人にも通じるよう、左2つは1文ずつで済ませる。0:02–0:03</a:t>
+              <a:t>過去3つの講演の結論を1枚で回収する。初めて聞く人にも通じるよう、左3つは一言ずつで済ませる。0:02–0:03</a:t>
             </a:r>
             <a:endParaRPr lang="en-US" dirty="0"/>
           </a:p>
@@ -2285,7 +2285,7 @@
           <a:p>
             <a:r>
               <a:rPr lang="en-US" dirty="0"/>
-              <a:t>FIT の律速点の図を事業側の言葉に直したもの。Project Glasswing 等の公開事例に触れる場合は出典を口頭で（FIT資料 [3]–[6]）。同日のNTTデータ・クラウドストライクの講演と重なるので、脅威の数字は深追いしない。0:04–0:06</a:t>
+              <a:t>5月の講演の「AIが短くする3つの時間（見つかるまで・PoCから悪用まで・判断に使える時間）」と FIT の律速点の図をまとめたもの。Copy Fail（CVE-2026-31431）や Project Glasswing に触れる場合は出典を口頭で。同日のNTTデータ・クラウドストライクの講演と重なるので、脅威の数字は深追いしない。0:04–0:06</a:t>
             </a:r>
             <a:endParaRPr lang="en-US" dirty="0"/>
           </a:p>
@@ -2373,7 +2373,7 @@
           <a:p>
             <a:r>
               <a:rPr lang="en-US" dirty="0"/>
-              <a:t>講演概要に書いた5つの判断。以降はこの5つを軸に話す。0:06–0:08</a:t>
+              <a:t>講演概要に書いた5つの判断。以降はこの5つを軸に話す。0:06–0:07</a:t>
             </a:r>
             <a:endParaRPr lang="en-US" dirty="0"/>
           </a:p>
@@ -2461,7 +2461,7 @@
           <a:p>
             <a:r>
               <a:rPr lang="en-US" dirty="0"/>
-              <a:t>会場の情シス担当に「インシデントの夜、一番時間を取られたのは何か」と問いかけてもよい。0:08–0:10</a:t>
+              <a:t>5月の講演の「作業はAI、判断は人」の具体化。会場の情シス担当に「インシデントの夜、一番時間を取られたのは何か」と問いかけてもよい。0:07–0:09</a:t>
             </a:r>
             <a:endParaRPr lang="en-US" dirty="0"/>
           </a:p>
@@ -3206,7 +3206,7 @@
                 <a:ea typeface="Yu Gothic" pitchFamily="34" charset="-122"/>
                 <a:cs typeface="Yu Gothic" pitchFamily="34" charset="-120"/>
               </a:rPr>
-              <a:t>第2部　AIとともに判断する</a:t>
+              <a:t>第2部　一歩①　AIを判断の相手にする</a:t>
             </a:r>
             <a:endParaRPr lang="en-US" sz="1200" dirty="0"/>
           </a:p>
@@ -3245,7 +3245,7 @@
                 <a:ea typeface="Yu Gothic" pitchFamily="34" charset="-122"/>
                 <a:cs typeface="Yu Gothic" pitchFamily="34" charset="-120"/>
               </a:rPr>
-              <a:t>8分</a:t>
+              <a:t>9分</a:t>
             </a:r>
             <a:endParaRPr lang="en-US" sz="1100" dirty="0"/>
           </a:p>
@@ -3284,7 +3284,7 @@
                 <a:ea typeface="Yu Gothic" pitchFamily="34" charset="-122"/>
                 <a:cs typeface="Yu Gothic" pitchFamily="34" charset="-120"/>
               </a:rPr>
-              <a:t>AIの出力を受け取ったら、4つを問い直します</a:t>
+              <a:t>AIに作業だけでなく、判断の「相手」をさせます</a:t>
             </a:r>
             <a:endParaRPr lang="en-US" sz="2600" dirty="0"/>
           </a:p>
@@ -3370,57 +3370,18 @@
       </p:sp>
       <p:sp>
         <p:nvSpPr>
-          <p:cNvPr id="8" name="Text 6"/>
-          <p:cNvSpPr/>
-          <p:nvPr/>
-        </p:nvSpPr>
-        <p:spPr>
-          <a:xfrm>
-            <a:off x="640080" y="1417320"/>
-            <a:ext cx="6766560" cy="274320"/>
-          </a:xfrm>
-          <a:prstGeom prst="rect">
-            <a:avLst/>
-          </a:prstGeom>
-          <a:noFill/>
-          <a:ln/>
-        </p:spPr>
-        <p:txBody>
-          <a:bodyPr wrap="square" lIns="0" tIns="0" rIns="0" bIns="0" rtlCol="0" anchor="ctr"/>
-          <a:lstStyle/>
-          <a:p>
-            <a:pPr indent="0" marL="0">
-              <a:buNone/>
-            </a:pPr>
-            <a:r>
-              <a:rPr lang="en-US" sz="1300" b="1" dirty="0">
-                <a:solidFill>
-                  <a:srgbClr val="5E6E6A"/>
-                </a:solidFill>
-                <a:latin typeface="Yu Gothic" pitchFamily="34" charset="0"/>
-                <a:ea typeface="Yu Gothic" pitchFamily="34" charset="-122"/>
-                <a:cs typeface="Yu Gothic" pitchFamily="34" charset="-120"/>
-              </a:rPr>
-              <a:t>AIが示した候補を、自社のシステムの構造へ戻して問い直す</a:t>
-            </a:r>
-            <a:endParaRPr lang="en-US" sz="1300" dirty="0"/>
-          </a:p>
-        </p:txBody>
-      </p:sp>
-      <p:sp>
-        <p:nvSpPr>
-          <p:cNvPr id="9" name="Shape 7"/>
-          <p:cNvSpPr/>
-          <p:nvPr/>
-        </p:nvSpPr>
-        <p:spPr>
-          <a:xfrm>
-            <a:off x="640080" y="1783080"/>
-            <a:ext cx="3291840" cy="1234440"/>
+          <p:cNvPr id="8" name="Shape 6"/>
+          <p:cNvSpPr/>
+          <p:nvPr/>
+        </p:nvSpPr>
+        <p:spPr>
+          <a:xfrm>
+            <a:off x="640080" y="1554480"/>
+            <a:ext cx="3503066" cy="3063240"/>
           </a:xfrm>
           <a:prstGeom prst="roundRect">
             <a:avLst>
-              <a:gd name="adj" fmla="val 3704"/>
+              <a:gd name="adj" fmla="val 1493"/>
             </a:avLst>
           </a:prstGeom>
           <a:solidFill>
@@ -3436,14 +3397,53 @@
       </p:sp>
       <p:sp>
         <p:nvSpPr>
+          <p:cNvPr id="9" name="Text 7"/>
+          <p:cNvSpPr/>
+          <p:nvPr/>
+        </p:nvSpPr>
+        <p:spPr>
+          <a:xfrm>
+            <a:off x="822960" y="1700784"/>
+            <a:ext cx="3137306" cy="411480"/>
+          </a:xfrm>
+          <a:prstGeom prst="rect">
+            <a:avLst/>
+          </a:prstGeom>
+          <a:noFill/>
+          <a:ln/>
+        </p:spPr>
+        <p:txBody>
+          <a:bodyPr wrap="square" lIns="0" tIns="0" rIns="0" bIns="0" rtlCol="0" anchor="t"/>
+          <a:lstStyle/>
+          <a:p>
+            <a:pPr indent="0" marL="0">
+              <a:buNone/>
+            </a:pPr>
+            <a:r>
+              <a:rPr lang="en-US" sz="1600" b="1" dirty="0">
+                <a:solidFill>
+                  <a:srgbClr val="2E7D6B"/>
+                </a:solidFill>
+                <a:latin typeface="Yu Gothic" pitchFamily="34" charset="0"/>
+                <a:ea typeface="Yu Gothic" pitchFamily="34" charset="-122"/>
+                <a:cs typeface="Yu Gothic" pitchFamily="34" charset="-120"/>
+              </a:rPr>
+              <a:t>選択肢を並べさせる</a:t>
+            </a:r>
+            <a:endParaRPr lang="en-US" sz="1600" dirty="0"/>
+          </a:p>
+        </p:txBody>
+      </p:sp>
+      <p:sp>
+        <p:nvSpPr>
           <p:cNvPr id="10" name="Text 8"/>
           <p:cNvSpPr/>
           <p:nvPr/>
         </p:nvSpPr>
         <p:spPr>
           <a:xfrm>
-            <a:off x="777240" y="1783080"/>
-            <a:ext cx="3017520" cy="1234440"/>
+            <a:off x="822960" y="2203704"/>
+            <a:ext cx="3137306" cy="2304288"/>
           </a:xfrm>
           <a:prstGeom prst="rect">
             <a:avLst/>
@@ -3452,24 +3452,27 @@
           <a:ln/>
         </p:spPr>
         <p:txBody>
-          <a:bodyPr wrap="square" lIns="0" tIns="0" rIns="0" bIns="0" rtlCol="0" anchor="ctr"/>
-          <a:lstStyle/>
-          <a:p>
-            <a:pPr algn="ctr" indent="0" marL="0">
-              <a:buNone/>
-            </a:pPr>
-            <a:r>
-              <a:rPr lang="en-US" sz="1700" b="1" dirty="0">
-                <a:solidFill>
-                  <a:srgbClr val="2E7D6B"/>
-                </a:solidFill>
-                <a:latin typeface="Yu Gothic" pitchFamily="34" charset="0"/>
-                <a:ea typeface="Yu Gothic" pitchFamily="34" charset="-122"/>
-                <a:cs typeface="Yu Gothic" pitchFamily="34" charset="-120"/>
-              </a:rPr>
-              <a:t>どの仮定が成り立っているか？</a:t>
-            </a:r>
-            <a:endParaRPr lang="en-US" sz="1700" dirty="0"/>
+          <a:bodyPr wrap="square" lIns="0" tIns="0" rIns="0" bIns="0" rtlCol="0" anchor="t"/>
+          <a:lstStyle/>
+          <a:p>
+            <a:pPr indent="0" marL="0">
+              <a:lnSpc>
+                <a:spcPct val="115000"/>
+              </a:lnSpc>
+              <a:buNone/>
+            </a:pPr>
+            <a:r>
+              <a:rPr lang="en-US" sz="1300" dirty="0">
+                <a:solidFill>
+                  <a:srgbClr val="16211F"/>
+                </a:solidFill>
+                <a:latin typeface="Yu Gothic" pitchFamily="34" charset="0"/>
+                <a:ea typeface="Yu Gothic" pitchFamily="34" charset="-122"/>
+                <a:cs typeface="Yu Gothic" pitchFamily="34" charset="-120"/>
+              </a:rPr>
+              <a:t>「止める／続ける／部分的に止める」を、それぞれの根拠・影響・取り消しやすさとともに並べさせます</a:t>
+            </a:r>
+            <a:endParaRPr lang="en-US" sz="1300" dirty="0"/>
           </a:p>
         </p:txBody>
       </p:sp>
@@ -3481,12 +3484,12 @@
         </p:nvSpPr>
         <p:spPr>
           <a:xfrm>
-            <a:off x="4114800" y="1783080"/>
-            <a:ext cx="3291840" cy="1234440"/>
+            <a:off x="4344314" y="1554480"/>
+            <a:ext cx="3503066" cy="3063240"/>
           </a:xfrm>
           <a:prstGeom prst="roundRect">
             <a:avLst>
-              <a:gd name="adj" fmla="val 3704"/>
+              <a:gd name="adj" fmla="val 1493"/>
             </a:avLst>
           </a:prstGeom>
           <a:solidFill>
@@ -3508,8 +3511,8 @@
         </p:nvSpPr>
         <p:spPr>
           <a:xfrm>
-            <a:off x="4251960" y="1783080"/>
-            <a:ext cx="3017520" cy="1234440"/>
+            <a:off x="4527194" y="1700784"/>
+            <a:ext cx="3137306" cy="411480"/>
           </a:xfrm>
           <a:prstGeom prst="rect">
             <a:avLst/>
@@ -3518,14 +3521,14 @@
           <a:ln/>
         </p:spPr>
         <p:txBody>
-          <a:bodyPr wrap="square" lIns="0" tIns="0" rIns="0" bIns="0" rtlCol="0" anchor="ctr"/>
-          <a:lstStyle/>
-          <a:p>
-            <a:pPr algn="ctr" indent="0" marL="0">
-              <a:buNone/>
-            </a:pPr>
-            <a:r>
-              <a:rPr lang="en-US" sz="1700" b="1" dirty="0">
+          <a:bodyPr wrap="square" lIns="0" tIns="0" rIns="0" bIns="0" rtlCol="0" anchor="t"/>
+          <a:lstStyle/>
+          <a:p>
+            <a:pPr indent="0" marL="0">
+              <a:buNone/>
+            </a:pPr>
+            <a:r>
+              <a:rPr lang="en-US" sz="1600" b="1" dirty="0">
                 <a:solidFill>
                   <a:srgbClr val="2E7D6B"/>
                 </a:solidFill>
@@ -3533,26 +3536,68 @@
                 <a:ea typeface="Yu Gothic" pitchFamily="34" charset="-122"/>
                 <a:cs typeface="Yu Gothic" pitchFamily="34" charset="-120"/>
               </a:rPr>
-              <a:t>どの証拠が足りないか？</a:t>
-            </a:r>
-            <a:endParaRPr lang="en-US" sz="1700" dirty="0"/>
-          </a:p>
-        </p:txBody>
-      </p:sp>
-      <p:sp>
-        <p:nvSpPr>
-          <p:cNvPr id="13" name="Shape 11"/>
-          <p:cNvSpPr/>
-          <p:nvPr/>
-        </p:nvSpPr>
-        <p:spPr>
-          <a:xfrm>
-            <a:off x="640080" y="3200400"/>
-            <a:ext cx="3291840" cy="1234440"/>
+              <a:t>反対の立場から問わせる</a:t>
+            </a:r>
+            <a:endParaRPr lang="en-US" sz="1600" dirty="0"/>
+          </a:p>
+        </p:txBody>
+      </p:sp>
+      <p:sp>
+        <p:nvSpPr>
+          <p:cNvPr id="13" name="Text 11"/>
+          <p:cNvSpPr/>
+          <p:nvPr/>
+        </p:nvSpPr>
+        <p:spPr>
+          <a:xfrm>
+            <a:off x="4527194" y="2203704"/>
+            <a:ext cx="3137306" cy="2304288"/>
+          </a:xfrm>
+          <a:prstGeom prst="rect">
+            <a:avLst/>
+          </a:prstGeom>
+          <a:noFill/>
+          <a:ln/>
+        </p:spPr>
+        <p:txBody>
+          <a:bodyPr wrap="square" lIns="0" tIns="0" rIns="0" bIns="0" rtlCol="0" anchor="t"/>
+          <a:lstStyle/>
+          <a:p>
+            <a:pPr indent="0" marL="0">
+              <a:lnSpc>
+                <a:spcPct val="115000"/>
+              </a:lnSpc>
+              <a:buNone/>
+            </a:pPr>
+            <a:r>
+              <a:rPr lang="en-US" sz="1300" dirty="0">
+                <a:solidFill>
+                  <a:srgbClr val="16211F"/>
+                </a:solidFill>
+                <a:latin typeface="Yu Gothic" pitchFamily="34" charset="0"/>
+                <a:ea typeface="Yu Gothic" pitchFamily="34" charset="-122"/>
+                <a:cs typeface="Yu Gothic" pitchFamily="34" charset="-120"/>
+              </a:rPr>
+              <a:t>決めかけた案に対して、あえて反論させます。「止めない場合に一番困るのは誰か」</a:t>
+            </a:r>
+            <a:endParaRPr lang="en-US" sz="1300" dirty="0"/>
+          </a:p>
+        </p:txBody>
+      </p:sp>
+      <p:sp>
+        <p:nvSpPr>
+          <p:cNvPr id="14" name="Shape 12"/>
+          <p:cNvSpPr/>
+          <p:nvPr/>
+        </p:nvSpPr>
+        <p:spPr>
+          <a:xfrm>
+            <a:off x="8048549" y="1554480"/>
+            <a:ext cx="3503066" cy="3063240"/>
           </a:xfrm>
           <a:prstGeom prst="roundRect">
             <a:avLst>
-              <a:gd name="adj" fmla="val 3704"/>
+              <a:gd name="adj" fmla="val 1493"/>
             </a:avLst>
           </a:prstGeom>
           <a:solidFill>
@@ -3568,14 +3613,14 @@
       </p:sp>
       <p:sp>
         <p:nvSpPr>
-          <p:cNvPr id="14" name="Text 12"/>
-          <p:cNvSpPr/>
-          <p:nvPr/>
-        </p:nvSpPr>
-        <p:spPr>
-          <a:xfrm>
-            <a:off x="777240" y="3200400"/>
-            <a:ext cx="3017520" cy="1234440"/>
+          <p:cNvPr id="15" name="Text 13"/>
+          <p:cNvSpPr/>
+          <p:nvPr/>
+        </p:nvSpPr>
+        <p:spPr>
+          <a:xfrm>
+            <a:off x="8231429" y="1700784"/>
+            <a:ext cx="3137306" cy="411480"/>
           </a:xfrm>
           <a:prstGeom prst="rect">
             <a:avLst/>
@@ -3584,14 +3629,14 @@
           <a:ln/>
         </p:spPr>
         <p:txBody>
-          <a:bodyPr wrap="square" lIns="0" tIns="0" rIns="0" bIns="0" rtlCol="0" anchor="ctr"/>
-          <a:lstStyle/>
-          <a:p>
-            <a:pPr algn="ctr" indent="0" marL="0">
-              <a:buNone/>
-            </a:pPr>
-            <a:r>
-              <a:rPr lang="en-US" sz="1700" b="1" dirty="0">
+          <a:bodyPr wrap="square" lIns="0" tIns="0" rIns="0" bIns="0" rtlCol="0" anchor="t"/>
+          <a:lstStyle/>
+          <a:p>
+            <a:pPr indent="0" marL="0">
+              <a:buNone/>
+            </a:pPr>
+            <a:r>
+              <a:rPr lang="en-US" sz="1600" b="1" dirty="0">
                 <a:solidFill>
                   <a:srgbClr val="2E7D6B"/>
                 </a:solidFill>
@@ -3599,38 +3644,11 @@
                 <a:ea typeface="Yu Gothic" pitchFamily="34" charset="-122"/>
                 <a:cs typeface="Yu Gothic" pitchFamily="34" charset="-120"/>
               </a:rPr>
-              <a:t>間違っていたら何が起きるか？</a:t>
-            </a:r>
-            <a:endParaRPr lang="en-US" sz="1700" dirty="0"/>
-          </a:p>
-        </p:txBody>
-      </p:sp>
-      <p:sp>
-        <p:nvSpPr>
-          <p:cNvPr id="15" name="Shape 13"/>
-          <p:cNvSpPr/>
-          <p:nvPr/>
-        </p:nvSpPr>
-        <p:spPr>
-          <a:xfrm>
-            <a:off x="4114800" y="3200400"/>
-            <a:ext cx="3291840" cy="1234440"/>
-          </a:xfrm>
-          <a:prstGeom prst="roundRect">
-            <a:avLst>
-              <a:gd name="adj" fmla="val 3704"/>
-            </a:avLst>
-          </a:prstGeom>
-          <a:solidFill>
-            <a:srgbClr val="EDF3F1"/>
-          </a:solidFill>
-          <a:ln w="9525">
-            <a:solidFill>
-              <a:srgbClr val="C9D5D1"/>
-            </a:solidFill>
-            <a:prstDash val="solid"/>
-          </a:ln>
-        </p:spPr>
+              <a:t>見落とした前提を挙げさせる</a:t>
+            </a:r>
+            <a:endParaRPr lang="en-US" sz="1600" dirty="0"/>
+          </a:p>
+        </p:txBody>
       </p:sp>
       <p:sp>
         <p:nvSpPr>
@@ -3640,113 +3658,8 @@
         </p:nvSpPr>
         <p:spPr>
           <a:xfrm>
-            <a:off x="4251960" y="3200400"/>
-            <a:ext cx="3017520" cy="1234440"/>
-          </a:xfrm>
-          <a:prstGeom prst="rect">
-            <a:avLst/>
-          </a:prstGeom>
-          <a:noFill/>
-          <a:ln/>
-        </p:spPr>
-        <p:txBody>
-          <a:bodyPr wrap="square" lIns="0" tIns="0" rIns="0" bIns="0" rtlCol="0" anchor="ctr"/>
-          <a:lstStyle/>
-          <a:p>
-            <a:pPr algn="ctr" indent="0" marL="0">
-              <a:buNone/>
-            </a:pPr>
-            <a:r>
-              <a:rPr lang="en-US" sz="1700" b="1" dirty="0">
-                <a:solidFill>
-                  <a:srgbClr val="2E7D6B"/>
-                </a:solidFill>
-                <a:latin typeface="Yu Gothic" pitchFamily="34" charset="0"/>
-                <a:ea typeface="Yu Gothic" pitchFamily="34" charset="-122"/>
-                <a:cs typeface="Yu Gothic" pitchFamily="34" charset="-120"/>
-              </a:rPr>
-              <a:t>組織の誰が決めるべきか？</a:t>
-            </a:r>
-            <a:endParaRPr lang="en-US" sz="1700" dirty="0"/>
-          </a:p>
-        </p:txBody>
-      </p:sp>
-      <p:sp>
-        <p:nvSpPr>
-          <p:cNvPr id="17" name="Shape 15"/>
-          <p:cNvSpPr/>
-          <p:nvPr/>
-        </p:nvSpPr>
-        <p:spPr>
-          <a:xfrm>
-            <a:off x="7680960" y="1783080"/>
-            <a:ext cx="3870655" cy="2651760"/>
-          </a:xfrm>
-          <a:prstGeom prst="roundRect">
-            <a:avLst>
-              <a:gd name="adj" fmla="val 1724"/>
-            </a:avLst>
-          </a:prstGeom>
-          <a:solidFill>
-            <a:srgbClr val="F4F7F6"/>
-          </a:solidFill>
-          <a:ln w="9525">
-            <a:solidFill>
-              <a:srgbClr val="C9D5D1"/>
-            </a:solidFill>
-            <a:prstDash val="solid"/>
-          </a:ln>
-        </p:spPr>
-      </p:sp>
-      <p:sp>
-        <p:nvSpPr>
-          <p:cNvPr id="18" name="Text 16"/>
-          <p:cNvSpPr/>
-          <p:nvPr/>
-        </p:nvSpPr>
-        <p:spPr>
-          <a:xfrm>
-            <a:off x="7863840" y="1929384"/>
-            <a:ext cx="3504895" cy="411480"/>
-          </a:xfrm>
-          <a:prstGeom prst="rect">
-            <a:avLst/>
-          </a:prstGeom>
-          <a:noFill/>
-          <a:ln/>
-        </p:spPr>
-        <p:txBody>
-          <a:bodyPr wrap="square" lIns="0" tIns="0" rIns="0" bIns="0" rtlCol="0" anchor="t"/>
-          <a:lstStyle/>
-          <a:p>
-            <a:pPr indent="0" marL="0">
-              <a:buNone/>
-            </a:pPr>
-            <a:r>
-              <a:rPr lang="en-US" sz="1600" b="1" dirty="0">
-                <a:solidFill>
-                  <a:srgbClr val="2E7D6B"/>
-                </a:solidFill>
-                <a:latin typeface="Yu Gothic" pitchFamily="34" charset="0"/>
-                <a:ea typeface="Yu Gothic" pitchFamily="34" charset="-122"/>
-                <a:cs typeface="Yu Gothic" pitchFamily="34" charset="-120"/>
-              </a:rPr>
-              <a:t>誰に必要か</a:t>
-            </a:r>
-            <a:endParaRPr lang="en-US" sz="1600" dirty="0"/>
-          </a:p>
-        </p:txBody>
-      </p:sp>
-      <p:sp>
-        <p:nvSpPr>
-          <p:cNvPr id="19" name="Text 17"/>
-          <p:cNvSpPr/>
-          <p:nvPr/>
-        </p:nvSpPr>
-        <p:spPr>
-          <a:xfrm>
-            <a:off x="7863840" y="2432304"/>
-            <a:ext cx="3504895" cy="1892808"/>
+            <a:off x="8231429" y="2203704"/>
+            <a:ext cx="3137306" cy="2304288"/>
           </a:xfrm>
           <a:prstGeom prst="rect">
             <a:avLst/>
@@ -3765,7 +3678,7 @@
               <a:buNone/>
             </a:pPr>
             <a:r>
-              <a:rPr lang="en-US" sz="1350" dirty="0">
+              <a:rPr lang="en-US" sz="1300" dirty="0">
                 <a:solidFill>
                   <a:srgbClr val="16211F"/>
                 </a:solidFill>
@@ -3773,55 +3686,15 @@
                 <a:ea typeface="Yu Gothic" pitchFamily="34" charset="-122"/>
                 <a:cs typeface="Yu Gothic" pitchFamily="34" charset="-120"/>
               </a:rPr>
-              <a:t>・AIを業務システムに組み込む技術者</a:t>
-            </a:r>
-            <a:endParaRPr lang="en-US" sz="1350" dirty="0"/>
-          </a:p>
-          <a:p>
-            <a:pPr indent="0" marL="0">
-              <a:lnSpc>
-                <a:spcPct val="115000"/>
-              </a:lnSpc>
-              <a:buNone/>
-            </a:pPr>
-            <a:r>
-              <a:rPr lang="en-US" sz="1350" dirty="0">
-                <a:solidFill>
-                  <a:srgbClr val="16211F"/>
-                </a:solidFill>
-                <a:latin typeface="Yu Gothic" pitchFamily="34" charset="0"/>
-                <a:ea typeface="Yu Gothic" pitchFamily="34" charset="-122"/>
-                <a:cs typeface="Yu Gothic" pitchFamily="34" charset="-120"/>
-              </a:rPr>
-              <a:t>・AIの出力を根拠にリスクを判断するセキュリティ担当者</a:t>
-            </a:r>
-            <a:endParaRPr lang="en-US" sz="1350" dirty="0"/>
-          </a:p>
-          <a:p>
-            <a:pPr indent="0" marL="0">
-              <a:lnSpc>
-                <a:spcPct val="115000"/>
-              </a:lnSpc>
-              <a:buNone/>
-            </a:pPr>
-            <a:r>
-              <a:rPr lang="en-US" sz="1350" dirty="0">
-                <a:solidFill>
-                  <a:srgbClr val="16211F"/>
-                </a:solidFill>
-                <a:latin typeface="Yu Gothic" pitchFamily="34" charset="0"/>
-                <a:ea typeface="Yu Gothic" pitchFamily="34" charset="-122"/>
-                <a:cs typeface="Yu Gothic" pitchFamily="34" charset="-120"/>
-              </a:rPr>
-              <a:t>・関係者に説明する管理職・経営層</a:t>
-            </a:r>
-            <a:endParaRPr lang="en-US" sz="1350" dirty="0"/>
-          </a:p>
-        </p:txBody>
-      </p:sp>
-      <p:sp>
-        <p:nvSpPr>
-          <p:cNvPr id="20" name="Shape 18"/>
+              <a:t>「この判断が間違っているとしたら、どの前提が崩れたときか」を挙げさせます</a:t>
+            </a:r>
+            <a:endParaRPr lang="en-US" sz="1300" dirty="0"/>
+          </a:p>
+        </p:txBody>
+      </p:sp>
+      <p:sp>
+        <p:nvSpPr>
+          <p:cNvPr id="17" name="Shape 15"/>
           <p:cNvSpPr/>
           <p:nvPr/>
         </p:nvSpPr>
@@ -3841,7 +3714,7 @@
       </p:sp>
       <p:sp>
         <p:nvSpPr>
-          <p:cNvPr id="21" name="Shape 19"/>
+          <p:cNvPr id="18" name="Shape 16"/>
           <p:cNvSpPr/>
           <p:nvPr/>
         </p:nvSpPr>
@@ -3861,7 +3734,7 @@
       </p:sp>
       <p:sp>
         <p:nvSpPr>
-          <p:cNvPr id="22" name="Text 20"/>
+          <p:cNvPr id="19" name="Text 17"/>
           <p:cNvSpPr/>
           <p:nvPr/>
         </p:nvSpPr>
@@ -3892,7 +3765,7 @@
                 <a:ea typeface="Yu Gothic" pitchFamily="34" charset="-122"/>
                 <a:cs typeface="Yu Gothic" pitchFamily="34" charset="-120"/>
               </a:rPr>
-              <a:t>「AIを使いこなす」ことより、AIの出力を自社のシステムと組織の文脈に置き直すことが要です。</a:t>
+              <a:t>決めるのは人、責任を負うのも人です。AIは参謀であって、決裁者ではありません。</a:t>
             </a:r>
             <a:endParaRPr lang="en-US" sz="1400" dirty="0"/>
           </a:p>
@@ -3983,7 +3856,7 @@
                 <a:ea typeface="Yu Gothic" pitchFamily="34" charset="-122"/>
                 <a:cs typeface="Yu Gothic" pitchFamily="34" charset="-120"/>
               </a:rPr>
-              <a:t>第2部　一歩①　任せ方を決める</a:t>
+              <a:t>第2部　AIとともに判断する</a:t>
             </a:r>
             <a:endParaRPr lang="en-US" sz="1200" dirty="0"/>
           </a:p>
@@ -4022,7 +3895,7 @@
                 <a:ea typeface="Yu Gothic" pitchFamily="34" charset="-122"/>
                 <a:cs typeface="Yu Gothic" pitchFamily="34" charset="-120"/>
               </a:rPr>
-              <a:t>8分</a:t>
+              <a:t>9分</a:t>
             </a:r>
             <a:endParaRPr lang="en-US" sz="1100" dirty="0"/>
           </a:p>
@@ -4061,7 +3934,7 @@
                 <a:ea typeface="Yu Gothic" pitchFamily="34" charset="-122"/>
                 <a:cs typeface="Yu Gothic" pitchFamily="34" charset="-120"/>
               </a:rPr>
-              <a:t>任せ方は、3つの問いで3段階に分けておきます</a:t>
+              <a:t>AIの出力を受け取ったら、4つを問い直します</a:t>
             </a:r>
             <a:endParaRPr lang="en-US" sz="2600" dirty="0"/>
           </a:p>
@@ -4145,9 +4018,3192 @@
           </a:p>
         </p:txBody>
       </p:sp>
+      <p:sp>
+        <p:nvSpPr>
+          <p:cNvPr id="8" name="Text 6"/>
+          <p:cNvSpPr/>
+          <p:nvPr/>
+        </p:nvSpPr>
+        <p:spPr>
+          <a:xfrm>
+            <a:off x="640080" y="1417320"/>
+            <a:ext cx="6766560" cy="274320"/>
+          </a:xfrm>
+          <a:prstGeom prst="rect">
+            <a:avLst/>
+          </a:prstGeom>
+          <a:noFill/>
+          <a:ln/>
+        </p:spPr>
+        <p:txBody>
+          <a:bodyPr wrap="square" lIns="0" tIns="0" rIns="0" bIns="0" rtlCol="0" anchor="ctr"/>
+          <a:lstStyle/>
+          <a:p>
+            <a:pPr indent="0" marL="0">
+              <a:buNone/>
+            </a:pPr>
+            <a:r>
+              <a:rPr lang="en-US" sz="1300" b="1" dirty="0">
+                <a:solidFill>
+                  <a:srgbClr val="5E6E6A"/>
+                </a:solidFill>
+                <a:latin typeface="Yu Gothic" pitchFamily="34" charset="0"/>
+                <a:ea typeface="Yu Gothic" pitchFamily="34" charset="-122"/>
+                <a:cs typeface="Yu Gothic" pitchFamily="34" charset="-120"/>
+              </a:rPr>
+              <a:t>AIが示した候補を、自社のシステムの構造へ戻して問い直す</a:t>
+            </a:r>
+            <a:endParaRPr lang="en-US" sz="1300" dirty="0"/>
+          </a:p>
+        </p:txBody>
+      </p:sp>
+      <p:sp>
+        <p:nvSpPr>
+          <p:cNvPr id="9" name="Shape 7"/>
+          <p:cNvSpPr/>
+          <p:nvPr/>
+        </p:nvSpPr>
+        <p:spPr>
+          <a:xfrm>
+            <a:off x="640080" y="1783080"/>
+            <a:ext cx="3291840" cy="1234440"/>
+          </a:xfrm>
+          <a:prstGeom prst="roundRect">
+            <a:avLst>
+              <a:gd name="adj" fmla="val 3704"/>
+            </a:avLst>
+          </a:prstGeom>
+          <a:solidFill>
+            <a:srgbClr val="EDF3F1"/>
+          </a:solidFill>
+          <a:ln w="9525">
+            <a:solidFill>
+              <a:srgbClr val="C9D5D1"/>
+            </a:solidFill>
+            <a:prstDash val="solid"/>
+          </a:ln>
+        </p:spPr>
+      </p:sp>
+      <p:sp>
+        <p:nvSpPr>
+          <p:cNvPr id="10" name="Text 8"/>
+          <p:cNvSpPr/>
+          <p:nvPr/>
+        </p:nvSpPr>
+        <p:spPr>
+          <a:xfrm>
+            <a:off x="777240" y="1783080"/>
+            <a:ext cx="3017520" cy="1234440"/>
+          </a:xfrm>
+          <a:prstGeom prst="rect">
+            <a:avLst/>
+          </a:prstGeom>
+          <a:noFill/>
+          <a:ln/>
+        </p:spPr>
+        <p:txBody>
+          <a:bodyPr wrap="square" lIns="0" tIns="0" rIns="0" bIns="0" rtlCol="0" anchor="ctr"/>
+          <a:lstStyle/>
+          <a:p>
+            <a:pPr algn="ctr" indent="0" marL="0">
+              <a:buNone/>
+            </a:pPr>
+            <a:r>
+              <a:rPr lang="en-US" sz="1700" b="1" dirty="0">
+                <a:solidFill>
+                  <a:srgbClr val="2E7D6B"/>
+                </a:solidFill>
+                <a:latin typeface="Yu Gothic" pitchFamily="34" charset="0"/>
+                <a:ea typeface="Yu Gothic" pitchFamily="34" charset="-122"/>
+                <a:cs typeface="Yu Gothic" pitchFamily="34" charset="-120"/>
+              </a:rPr>
+              <a:t>どの仮定が成り立っているか？</a:t>
+            </a:r>
+            <a:endParaRPr lang="en-US" sz="1700" dirty="0"/>
+          </a:p>
+        </p:txBody>
+      </p:sp>
+      <p:sp>
+        <p:nvSpPr>
+          <p:cNvPr id="11" name="Shape 9"/>
+          <p:cNvSpPr/>
+          <p:nvPr/>
+        </p:nvSpPr>
+        <p:spPr>
+          <a:xfrm>
+            <a:off x="4114800" y="1783080"/>
+            <a:ext cx="3291840" cy="1234440"/>
+          </a:xfrm>
+          <a:prstGeom prst="roundRect">
+            <a:avLst>
+              <a:gd name="adj" fmla="val 3704"/>
+            </a:avLst>
+          </a:prstGeom>
+          <a:solidFill>
+            <a:srgbClr val="EDF3F1"/>
+          </a:solidFill>
+          <a:ln w="9525">
+            <a:solidFill>
+              <a:srgbClr val="C9D5D1"/>
+            </a:solidFill>
+            <a:prstDash val="solid"/>
+          </a:ln>
+        </p:spPr>
+      </p:sp>
+      <p:sp>
+        <p:nvSpPr>
+          <p:cNvPr id="12" name="Text 10"/>
+          <p:cNvSpPr/>
+          <p:nvPr/>
+        </p:nvSpPr>
+        <p:spPr>
+          <a:xfrm>
+            <a:off x="4251960" y="1783080"/>
+            <a:ext cx="3017520" cy="1234440"/>
+          </a:xfrm>
+          <a:prstGeom prst="rect">
+            <a:avLst/>
+          </a:prstGeom>
+          <a:noFill/>
+          <a:ln/>
+        </p:spPr>
+        <p:txBody>
+          <a:bodyPr wrap="square" lIns="0" tIns="0" rIns="0" bIns="0" rtlCol="0" anchor="ctr"/>
+          <a:lstStyle/>
+          <a:p>
+            <a:pPr algn="ctr" indent="0" marL="0">
+              <a:buNone/>
+            </a:pPr>
+            <a:r>
+              <a:rPr lang="en-US" sz="1700" b="1" dirty="0">
+                <a:solidFill>
+                  <a:srgbClr val="2E7D6B"/>
+                </a:solidFill>
+                <a:latin typeface="Yu Gothic" pitchFamily="34" charset="0"/>
+                <a:ea typeface="Yu Gothic" pitchFamily="34" charset="-122"/>
+                <a:cs typeface="Yu Gothic" pitchFamily="34" charset="-120"/>
+              </a:rPr>
+              <a:t>どの証拠が足りないか？</a:t>
+            </a:r>
+            <a:endParaRPr lang="en-US" sz="1700" dirty="0"/>
+          </a:p>
+        </p:txBody>
+      </p:sp>
+      <p:sp>
+        <p:nvSpPr>
+          <p:cNvPr id="13" name="Shape 11"/>
+          <p:cNvSpPr/>
+          <p:nvPr/>
+        </p:nvSpPr>
+        <p:spPr>
+          <a:xfrm>
+            <a:off x="640080" y="3200400"/>
+            <a:ext cx="3291840" cy="1234440"/>
+          </a:xfrm>
+          <a:prstGeom prst="roundRect">
+            <a:avLst>
+              <a:gd name="adj" fmla="val 3704"/>
+            </a:avLst>
+          </a:prstGeom>
+          <a:solidFill>
+            <a:srgbClr val="EDF3F1"/>
+          </a:solidFill>
+          <a:ln w="9525">
+            <a:solidFill>
+              <a:srgbClr val="C9D5D1"/>
+            </a:solidFill>
+            <a:prstDash val="solid"/>
+          </a:ln>
+        </p:spPr>
+      </p:sp>
+      <p:sp>
+        <p:nvSpPr>
+          <p:cNvPr id="14" name="Text 12"/>
+          <p:cNvSpPr/>
+          <p:nvPr/>
+        </p:nvSpPr>
+        <p:spPr>
+          <a:xfrm>
+            <a:off x="777240" y="3200400"/>
+            <a:ext cx="3017520" cy="1234440"/>
+          </a:xfrm>
+          <a:prstGeom prst="rect">
+            <a:avLst/>
+          </a:prstGeom>
+          <a:noFill/>
+          <a:ln/>
+        </p:spPr>
+        <p:txBody>
+          <a:bodyPr wrap="square" lIns="0" tIns="0" rIns="0" bIns="0" rtlCol="0" anchor="ctr"/>
+          <a:lstStyle/>
+          <a:p>
+            <a:pPr algn="ctr" indent="0" marL="0">
+              <a:buNone/>
+            </a:pPr>
+            <a:r>
+              <a:rPr lang="en-US" sz="1700" b="1" dirty="0">
+                <a:solidFill>
+                  <a:srgbClr val="2E7D6B"/>
+                </a:solidFill>
+                <a:latin typeface="Yu Gothic" pitchFamily="34" charset="0"/>
+                <a:ea typeface="Yu Gothic" pitchFamily="34" charset="-122"/>
+                <a:cs typeface="Yu Gothic" pitchFamily="34" charset="-120"/>
+              </a:rPr>
+              <a:t>間違っていたら何が起きるか？</a:t>
+            </a:r>
+            <a:endParaRPr lang="en-US" sz="1700" dirty="0"/>
+          </a:p>
+        </p:txBody>
+      </p:sp>
+      <p:sp>
+        <p:nvSpPr>
+          <p:cNvPr id="15" name="Shape 13"/>
+          <p:cNvSpPr/>
+          <p:nvPr/>
+        </p:nvSpPr>
+        <p:spPr>
+          <a:xfrm>
+            <a:off x="4114800" y="3200400"/>
+            <a:ext cx="3291840" cy="1234440"/>
+          </a:xfrm>
+          <a:prstGeom prst="roundRect">
+            <a:avLst>
+              <a:gd name="adj" fmla="val 3704"/>
+            </a:avLst>
+          </a:prstGeom>
+          <a:solidFill>
+            <a:srgbClr val="EDF3F1"/>
+          </a:solidFill>
+          <a:ln w="9525">
+            <a:solidFill>
+              <a:srgbClr val="C9D5D1"/>
+            </a:solidFill>
+            <a:prstDash val="solid"/>
+          </a:ln>
+        </p:spPr>
+      </p:sp>
+      <p:sp>
+        <p:nvSpPr>
+          <p:cNvPr id="16" name="Text 14"/>
+          <p:cNvSpPr/>
+          <p:nvPr/>
+        </p:nvSpPr>
+        <p:spPr>
+          <a:xfrm>
+            <a:off x="4251960" y="3200400"/>
+            <a:ext cx="3017520" cy="1234440"/>
+          </a:xfrm>
+          <a:prstGeom prst="rect">
+            <a:avLst/>
+          </a:prstGeom>
+          <a:noFill/>
+          <a:ln/>
+        </p:spPr>
+        <p:txBody>
+          <a:bodyPr wrap="square" lIns="0" tIns="0" rIns="0" bIns="0" rtlCol="0" anchor="ctr"/>
+          <a:lstStyle/>
+          <a:p>
+            <a:pPr algn="ctr" indent="0" marL="0">
+              <a:buNone/>
+            </a:pPr>
+            <a:r>
+              <a:rPr lang="en-US" sz="1700" b="1" dirty="0">
+                <a:solidFill>
+                  <a:srgbClr val="2E7D6B"/>
+                </a:solidFill>
+                <a:latin typeface="Yu Gothic" pitchFamily="34" charset="0"/>
+                <a:ea typeface="Yu Gothic" pitchFamily="34" charset="-122"/>
+                <a:cs typeface="Yu Gothic" pitchFamily="34" charset="-120"/>
+              </a:rPr>
+              <a:t>組織の誰が決めるべきか？</a:t>
+            </a:r>
+            <a:endParaRPr lang="en-US" sz="1700" dirty="0"/>
+          </a:p>
+        </p:txBody>
+      </p:sp>
+      <p:sp>
+        <p:nvSpPr>
+          <p:cNvPr id="17" name="Shape 15"/>
+          <p:cNvSpPr/>
+          <p:nvPr/>
+        </p:nvSpPr>
+        <p:spPr>
+          <a:xfrm>
+            <a:off x="7680960" y="1783080"/>
+            <a:ext cx="3870655" cy="2651760"/>
+          </a:xfrm>
+          <a:prstGeom prst="roundRect">
+            <a:avLst>
+              <a:gd name="adj" fmla="val 1724"/>
+            </a:avLst>
+          </a:prstGeom>
+          <a:solidFill>
+            <a:srgbClr val="F4F7F6"/>
+          </a:solidFill>
+          <a:ln w="9525">
+            <a:solidFill>
+              <a:srgbClr val="C9D5D1"/>
+            </a:solidFill>
+            <a:prstDash val="solid"/>
+          </a:ln>
+        </p:spPr>
+      </p:sp>
+      <p:sp>
+        <p:nvSpPr>
+          <p:cNvPr id="18" name="Text 16"/>
+          <p:cNvSpPr/>
+          <p:nvPr/>
+        </p:nvSpPr>
+        <p:spPr>
+          <a:xfrm>
+            <a:off x="7863840" y="1929384"/>
+            <a:ext cx="3504895" cy="411480"/>
+          </a:xfrm>
+          <a:prstGeom prst="rect">
+            <a:avLst/>
+          </a:prstGeom>
+          <a:noFill/>
+          <a:ln/>
+        </p:spPr>
+        <p:txBody>
+          <a:bodyPr wrap="square" lIns="0" tIns="0" rIns="0" bIns="0" rtlCol="0" anchor="t"/>
+          <a:lstStyle/>
+          <a:p>
+            <a:pPr indent="0" marL="0">
+              <a:buNone/>
+            </a:pPr>
+            <a:r>
+              <a:rPr lang="en-US" sz="1600" b="1" dirty="0">
+                <a:solidFill>
+                  <a:srgbClr val="2E7D6B"/>
+                </a:solidFill>
+                <a:latin typeface="Yu Gothic" pitchFamily="34" charset="0"/>
+                <a:ea typeface="Yu Gothic" pitchFamily="34" charset="-122"/>
+                <a:cs typeface="Yu Gothic" pitchFamily="34" charset="-120"/>
+              </a:rPr>
+              <a:t>共通する姿勢</a:t>
+            </a:r>
+            <a:endParaRPr lang="en-US" sz="1600" dirty="0"/>
+          </a:p>
+        </p:txBody>
+      </p:sp>
+      <p:sp>
+        <p:nvSpPr>
+          <p:cNvPr id="19" name="Text 17"/>
+          <p:cNvSpPr/>
+          <p:nvPr/>
+        </p:nvSpPr>
+        <p:spPr>
+          <a:xfrm>
+            <a:off x="7863840" y="2432304"/>
+            <a:ext cx="3504895" cy="1892808"/>
+          </a:xfrm>
+          <a:prstGeom prst="rect">
+            <a:avLst/>
+          </a:prstGeom>
+          <a:noFill/>
+          <a:ln/>
+        </p:spPr>
+        <p:txBody>
+          <a:bodyPr wrap="square" lIns="0" tIns="0" rIns="0" bIns="0" rtlCol="0" anchor="t"/>
+          <a:lstStyle/>
+          <a:p>
+            <a:pPr indent="0" marL="0">
+              <a:lnSpc>
+                <a:spcPct val="115000"/>
+              </a:lnSpc>
+              <a:buNone/>
+            </a:pPr>
+            <a:r>
+              <a:rPr lang="en-US" sz="1350" dirty="0">
+                <a:solidFill>
+                  <a:srgbClr val="16211F"/>
+                </a:solidFill>
+                <a:latin typeface="Yu Gothic" pitchFamily="34" charset="0"/>
+                <a:ea typeface="Yu Gothic" pitchFamily="34" charset="-122"/>
+                <a:cs typeface="Yu Gothic" pitchFamily="34" charset="-120"/>
+              </a:rPr>
+              <a:t>確実な情報が少ない中で、判断を遅らせすぎず、かつAIを過信しない。</a:t>
+            </a:r>
+            <a:endParaRPr lang="en-US" sz="1350" dirty="0"/>
+          </a:p>
+          <a:p>
+            <a:pPr indent="0" marL="0">
+              <a:lnSpc>
+                <a:spcPct val="115000"/>
+              </a:lnSpc>
+              <a:buNone/>
+            </a:pPr>
+            <a:endParaRPr lang="en-US" sz="1350" dirty="0"/>
+          </a:p>
+          <a:p>
+            <a:pPr indent="0" marL="0">
+              <a:lnSpc>
+                <a:spcPct val="115000"/>
+              </a:lnSpc>
+              <a:buNone/>
+            </a:pPr>
+            <a:r>
+              <a:rPr lang="en-US" sz="1350" dirty="0">
+                <a:solidFill>
+                  <a:srgbClr val="16211F"/>
+                </a:solidFill>
+                <a:latin typeface="Yu Gothic" pitchFamily="34" charset="0"/>
+                <a:ea typeface="Yu Gothic" pitchFamily="34" charset="-122"/>
+                <a:cs typeface="Yu Gothic" pitchFamily="34" charset="-120"/>
+              </a:rPr>
+              <a:t>AIの出力は「答え」ではなく「検証すべき仮説」です。</a:t>
+            </a:r>
+            <a:endParaRPr lang="en-US" sz="1350" dirty="0"/>
+          </a:p>
+        </p:txBody>
+      </p:sp>
+      <p:sp>
+        <p:nvSpPr>
+          <p:cNvPr id="20" name="Shape 18"/>
+          <p:cNvSpPr/>
+          <p:nvPr/>
+        </p:nvSpPr>
+        <p:spPr>
+          <a:xfrm>
+            <a:off x="640080" y="4892040"/>
+            <a:ext cx="10911535" cy="658368"/>
+          </a:xfrm>
+          <a:prstGeom prst="rect">
+            <a:avLst/>
+          </a:prstGeom>
+          <a:solidFill>
+            <a:srgbClr val="F6EBD8"/>
+          </a:solidFill>
+          <a:ln/>
+        </p:spPr>
+      </p:sp>
+      <p:sp>
+        <p:nvSpPr>
+          <p:cNvPr id="21" name="Shape 19"/>
+          <p:cNvSpPr/>
+          <p:nvPr/>
+        </p:nvSpPr>
+        <p:spPr>
+          <a:xfrm>
+            <a:off x="640080" y="4892040"/>
+            <a:ext cx="73152" cy="658368"/>
+          </a:xfrm>
+          <a:prstGeom prst="rect">
+            <a:avLst/>
+          </a:prstGeom>
+          <a:solidFill>
+            <a:srgbClr val="C9821A"/>
+          </a:solidFill>
+          <a:ln/>
+        </p:spPr>
+      </p:sp>
+      <p:sp>
+        <p:nvSpPr>
+          <p:cNvPr id="22" name="Text 20"/>
+          <p:cNvSpPr/>
+          <p:nvPr/>
+        </p:nvSpPr>
+        <p:spPr>
+          <a:xfrm>
+            <a:off x="914400" y="4965192"/>
+            <a:ext cx="10454335" cy="512064"/>
+          </a:xfrm>
+          <a:prstGeom prst="rect">
+            <a:avLst/>
+          </a:prstGeom>
+          <a:noFill/>
+          <a:ln/>
+        </p:spPr>
+        <p:txBody>
+          <a:bodyPr wrap="square" lIns="0" tIns="0" rIns="0" bIns="0" rtlCol="0" anchor="ctr"/>
+          <a:lstStyle/>
+          <a:p>
+            <a:pPr indent="0" marL="0">
+              <a:buNone/>
+            </a:pPr>
+            <a:r>
+              <a:rPr lang="en-US" sz="1400" b="1" dirty="0">
+                <a:solidFill>
+                  <a:srgbClr val="16211F"/>
+                </a:solidFill>
+                <a:latin typeface="Yu Gothic" pitchFamily="34" charset="0"/>
+                <a:ea typeface="Yu Gothic" pitchFamily="34" charset="-122"/>
+                <a:cs typeface="Yu Gothic" pitchFamily="34" charset="-120"/>
+              </a:rPr>
+              <a:t>「AIを使いこなす」ことより、AIの出力を自社のシステムと組織の文脈に置き直すことが要です。</a:t>
+            </a:r>
+            <a:endParaRPr lang="en-US" sz="1400" dirty="0"/>
+          </a:p>
+        </p:txBody>
+      </p:sp>
+    </p:spTree>
+  </p:cSld>
+  <p:clrMapOvr>
+    <a:masterClrMapping/>
+  </p:clrMapOvr>
+</p:sld>
+</file>
+
+<file path=ppt/slides/slide12.xml><?xml version="1.0" encoding="utf-8"?>
+<p:sld xmlns:a="http://schemas.openxmlformats.org/drawingml/2006/main" xmlns:r="http://schemas.openxmlformats.org/officeDocument/2006/relationships" xmlns:p="http://schemas.openxmlformats.org/presentationml/2006/main">
+  <p:cSld name="Slide 12">
+    <p:bg>
+      <p:bgPr>
+        <a:solidFill>
+          <a:srgbClr val="FFFFFF"/>
+        </a:solidFill>
+      </p:bgPr>
+    </p:bg>
+    <p:spTree>
+      <p:nvGrpSpPr>
+        <p:cNvPr id="1" name=""/>
+        <p:cNvGrpSpPr/>
+        <p:nvPr/>
+      </p:nvGrpSpPr>
+      <p:grpSpPr>
+        <a:xfrm>
+          <a:off x="0" y="0"/>
+          <a:ext cx="0" cy="0"/>
+          <a:chOff x="0" y="0"/>
+          <a:chExt cx="0" cy="0"/>
+        </a:xfrm>
+      </p:grpSpPr>
+      <p:sp>
+        <p:nvSpPr>
+          <p:cNvPr id="2" name="Shape 0"/>
+          <p:cNvSpPr/>
+          <p:nvPr/>
+        </p:nvSpPr>
+        <p:spPr>
+          <a:xfrm>
+            <a:off x="0" y="0"/>
+            <a:ext cx="128016" cy="6858000"/>
+          </a:xfrm>
+          <a:prstGeom prst="rect">
+            <a:avLst/>
+          </a:prstGeom>
+          <a:solidFill>
+            <a:srgbClr val="2E7D6B"/>
+          </a:solidFill>
+          <a:ln/>
+        </p:spPr>
+      </p:sp>
+      <p:sp>
+        <p:nvSpPr>
+          <p:cNvPr id="3" name="Text 1"/>
+          <p:cNvSpPr/>
+          <p:nvPr/>
+        </p:nvSpPr>
+        <p:spPr>
+          <a:xfrm>
+            <a:off x="640080" y="292608"/>
+            <a:ext cx="7772400" cy="274320"/>
+          </a:xfrm>
+          <a:prstGeom prst="rect">
+            <a:avLst/>
+          </a:prstGeom>
+          <a:noFill/>
+          <a:ln/>
+        </p:spPr>
+        <p:txBody>
+          <a:bodyPr wrap="square" lIns="0" tIns="0" rIns="0" bIns="0" rtlCol="0" anchor="ctr"/>
+          <a:lstStyle/>
+          <a:p>
+            <a:pPr indent="0" marL="0">
+              <a:buNone/>
+            </a:pPr>
+            <a:r>
+              <a:rPr lang="en-US" sz="1200" b="1" dirty="0">
+                <a:solidFill>
+                  <a:srgbClr val="2E7D6B"/>
+                </a:solidFill>
+                <a:latin typeface="Yu Gothic" pitchFamily="34" charset="0"/>
+                <a:ea typeface="Yu Gothic" pitchFamily="34" charset="-122"/>
+                <a:cs typeface="Yu Gothic" pitchFamily="34" charset="-120"/>
+              </a:rPr>
+              <a:t>第2部　ミニ演習（会場参加）</a:t>
+            </a:r>
+            <a:endParaRPr lang="en-US" sz="1200" dirty="0"/>
+          </a:p>
+        </p:txBody>
+      </p:sp>
+      <p:sp>
+        <p:nvSpPr>
+          <p:cNvPr id="4" name="Text 2"/>
+          <p:cNvSpPr/>
+          <p:nvPr/>
+        </p:nvSpPr>
+        <p:spPr>
+          <a:xfrm>
+            <a:off x="9722815" y="292608"/>
+            <a:ext cx="1828800" cy="274320"/>
+          </a:xfrm>
+          <a:prstGeom prst="rect">
+            <a:avLst/>
+          </a:prstGeom>
+          <a:noFill/>
+          <a:ln/>
+        </p:spPr>
+        <p:txBody>
+          <a:bodyPr wrap="square" lIns="0" tIns="0" rIns="0" bIns="0" rtlCol="0" anchor="ctr"/>
+          <a:lstStyle/>
+          <a:p>
+            <a:pPr algn="r" indent="0" marL="0">
+              <a:buNone/>
+            </a:pPr>
+            <a:r>
+              <a:rPr lang="en-US" sz="1100" dirty="0">
+                <a:solidFill>
+                  <a:srgbClr val="5E6E6A"/>
+                </a:solidFill>
+                <a:latin typeface="Yu Gothic" pitchFamily="34" charset="0"/>
+                <a:ea typeface="Yu Gothic" pitchFamily="34" charset="-122"/>
+                <a:cs typeface="Yu Gothic" pitchFamily="34" charset="-120"/>
+              </a:rPr>
+              <a:t>9分</a:t>
+            </a:r>
+            <a:endParaRPr lang="en-US" sz="1100" dirty="0"/>
+          </a:p>
+        </p:txBody>
+      </p:sp>
+      <p:sp>
+        <p:nvSpPr>
+          <p:cNvPr id="5" name="Text 3"/>
+          <p:cNvSpPr/>
+          <p:nvPr/>
+        </p:nvSpPr>
+        <p:spPr>
+          <a:xfrm>
+            <a:off x="640080" y="621792"/>
+            <a:ext cx="10911535" cy="685800"/>
+          </a:xfrm>
+          <a:prstGeom prst="rect">
+            <a:avLst/>
+          </a:prstGeom>
+          <a:noFill/>
+          <a:ln/>
+        </p:spPr>
+        <p:txBody>
+          <a:bodyPr wrap="square" lIns="0" tIns="0" rIns="0" bIns="0" rtlCol="0" anchor="t"/>
+          <a:lstStyle/>
+          <a:p>
+            <a:pPr indent="0" marL="0">
+              <a:buNone/>
+            </a:pPr>
+            <a:r>
+              <a:rPr lang="en-US" sz="2600" b="1" dirty="0">
+                <a:solidFill>
+                  <a:srgbClr val="16211F"/>
+                </a:solidFill>
+                <a:latin typeface="Yu Gothic" pitchFamily="34" charset="0"/>
+                <a:ea typeface="Yu Gothic" pitchFamily="34" charset="-122"/>
+                <a:cs typeface="Yu Gothic" pitchFamily="34" charset="-120"/>
+              </a:rPr>
+              <a:t>ミニ演習：金曜17時、重大な脆弱性が公表されました</a:t>
+            </a:r>
+            <a:endParaRPr lang="en-US" sz="2600" dirty="0"/>
+          </a:p>
+        </p:txBody>
+      </p:sp>
+      <p:sp>
+        <p:nvSpPr>
+          <p:cNvPr id="6" name="Text 4"/>
+          <p:cNvSpPr/>
+          <p:nvPr/>
+        </p:nvSpPr>
+        <p:spPr>
+          <a:xfrm>
+            <a:off x="10180015" y="6446520"/>
+            <a:ext cx="1371600" cy="228600"/>
+          </a:xfrm>
+          <a:prstGeom prst="rect">
+            <a:avLst/>
+          </a:prstGeom>
+          <a:noFill/>
+          <a:ln/>
+        </p:spPr>
+        <p:txBody>
+          <a:bodyPr wrap="square" lIns="0" tIns="0" rIns="0" bIns="0" rtlCol="0" anchor="ctr"/>
+          <a:lstStyle/>
+          <a:p>
+            <a:pPr algn="r" indent="0" marL="0">
+              <a:buNone/>
+            </a:pPr>
+            <a:r>
+              <a:rPr lang="en-US" sz="900" dirty="0">
+                <a:solidFill>
+                  <a:srgbClr val="5E6E6A"/>
+                </a:solidFill>
+                <a:latin typeface="Yu Gothic" pitchFamily="34" charset="0"/>
+                <a:ea typeface="Yu Gothic" pitchFamily="34" charset="-122"/>
+                <a:cs typeface="Yu Gothic" pitchFamily="34" charset="-120"/>
+              </a:rPr>
+              <a:t>12 / 24</a:t>
+            </a:r>
+            <a:endParaRPr lang="en-US" sz="900" dirty="0"/>
+          </a:p>
+        </p:txBody>
+      </p:sp>
+      <p:sp>
+        <p:nvSpPr>
+          <p:cNvPr id="7" name="Text 5"/>
+          <p:cNvSpPr/>
+          <p:nvPr/>
+        </p:nvSpPr>
+        <p:spPr>
+          <a:xfrm>
+            <a:off x="640080" y="6446520"/>
+            <a:ext cx="6400800" cy="228600"/>
+          </a:xfrm>
+          <a:prstGeom prst="rect">
+            <a:avLst/>
+          </a:prstGeom>
+          <a:noFill/>
+          <a:ln/>
+        </p:spPr>
+        <p:txBody>
+          <a:bodyPr wrap="square" lIns="0" tIns="0" rIns="0" bIns="0" rtlCol="0" anchor="ctr"/>
+          <a:lstStyle/>
+          <a:p>
+            <a:pPr indent="0" marL="0">
+              <a:buNone/>
+            </a:pPr>
+            <a:r>
+              <a:rPr lang="en-US" sz="900" dirty="0">
+                <a:solidFill>
+                  <a:srgbClr val="9FB2AD"/>
+                </a:solidFill>
+                <a:latin typeface="Yu Gothic" pitchFamily="34" charset="0"/>
+                <a:ea typeface="Yu Gothic" pitchFamily="34" charset="-122"/>
+                <a:cs typeface="Yu Gothic" pitchFamily="34" charset="-120"/>
+              </a:rPr>
+              <a:t>Security Days Fall 2026 Fukuoka　FB-05　小出 洋（九州大学）</a:t>
+            </a:r>
+            <a:endParaRPr lang="en-US" sz="900" dirty="0"/>
+          </a:p>
+        </p:txBody>
+      </p:sp>
+      <p:sp>
+        <p:nvSpPr>
+          <p:cNvPr id="8" name="Text 6"/>
+          <p:cNvSpPr/>
+          <p:nvPr/>
+        </p:nvSpPr>
+        <p:spPr>
+          <a:xfrm>
+            <a:off x="640080" y="1417320"/>
+            <a:ext cx="5760720" cy="274320"/>
+          </a:xfrm>
+          <a:prstGeom prst="rect">
+            <a:avLst/>
+          </a:prstGeom>
+          <a:noFill/>
+          <a:ln/>
+        </p:spPr>
+        <p:txBody>
+          <a:bodyPr wrap="square" lIns="0" tIns="0" rIns="0" bIns="0" rtlCol="0" anchor="ctr"/>
+          <a:lstStyle/>
+          <a:p>
+            <a:pPr indent="0" marL="0">
+              <a:buNone/>
+            </a:pPr>
+            <a:r>
+              <a:rPr lang="en-US" sz="1300" b="1" dirty="0">
+                <a:solidFill>
+                  <a:srgbClr val="2E7D6B"/>
+                </a:solidFill>
+                <a:latin typeface="Yu Gothic" pitchFamily="34" charset="0"/>
+                <a:ea typeface="Yu Gothic" pitchFamily="34" charset="-122"/>
+                <a:cs typeface="Yu Gothic" pitchFamily="34" charset="-120"/>
+              </a:rPr>
+              <a:t>前提</a:t>
+            </a:r>
+            <a:endParaRPr lang="en-US" sz="1300" dirty="0"/>
+          </a:p>
+        </p:txBody>
+      </p:sp>
+      <p:sp>
+        <p:nvSpPr>
+          <p:cNvPr id="9" name="Text 7"/>
+          <p:cNvSpPr/>
+          <p:nvPr/>
+        </p:nvSpPr>
+        <p:spPr>
+          <a:xfrm>
+            <a:off x="640080" y="1737360"/>
+            <a:ext cx="5760720" cy="2011680"/>
+          </a:xfrm>
+          <a:prstGeom prst="rect">
+            <a:avLst/>
+          </a:prstGeom>
+          <a:noFill/>
+          <a:ln/>
+        </p:spPr>
+        <p:txBody>
+          <a:bodyPr wrap="square" lIns="0" tIns="0" rIns="0" bIns="0" rtlCol="0" anchor="t"/>
+          <a:lstStyle/>
+          <a:p>
+            <a:pPr indent="0" marL="0">
+              <a:lnSpc>
+                <a:spcPct val="125000"/>
+              </a:lnSpc>
+              <a:buNone/>
+            </a:pPr>
+            <a:r>
+              <a:rPr lang="en-US" sz="1400" dirty="0">
+                <a:solidFill>
+                  <a:srgbClr val="16211F"/>
+                </a:solidFill>
+                <a:latin typeface="Yu Gothic" pitchFamily="34" charset="0"/>
+                <a:ea typeface="Yu Gothic" pitchFamily="34" charset="-122"/>
+                <a:cs typeface="Yu Gothic" pitchFamily="34" charset="-120"/>
+              </a:rPr>
+              <a:t>・自社の Web システムを複数の顧客企業が使っている</a:t>
+            </a:r>
+            <a:endParaRPr lang="en-US" sz="1400" dirty="0"/>
+          </a:p>
+          <a:p>
+            <a:pPr indent="0" marL="0">
+              <a:lnSpc>
+                <a:spcPct val="125000"/>
+              </a:lnSpc>
+              <a:buNone/>
+            </a:pPr>
+            <a:r>
+              <a:rPr lang="en-US" sz="1400" dirty="0">
+                <a:solidFill>
+                  <a:srgbClr val="16211F"/>
+                </a:solidFill>
+                <a:latin typeface="Yu Gothic" pitchFamily="34" charset="0"/>
+                <a:ea typeface="Yu Gothic" pitchFamily="34" charset="-122"/>
+                <a:cs typeface="Yu Gothic" pitchFamily="34" charset="-120"/>
+              </a:rPr>
+              <a:t>・利用しているフレームワークに重大な脆弱性。PoC は公開済み</a:t>
+            </a:r>
+            <a:endParaRPr lang="en-US" sz="1400" dirty="0"/>
+          </a:p>
+          <a:p>
+            <a:pPr indent="0" marL="0">
+              <a:lnSpc>
+                <a:spcPct val="125000"/>
+              </a:lnSpc>
+              <a:buNone/>
+            </a:pPr>
+            <a:r>
+              <a:rPr lang="en-US" sz="1400" dirty="0">
+                <a:solidFill>
+                  <a:srgbClr val="16211F"/>
+                </a:solidFill>
+                <a:latin typeface="Yu Gothic" pitchFamily="34" charset="0"/>
+                <a:ea typeface="Yu Gothic" pitchFamily="34" charset="-122"/>
+                <a:cs typeface="Yu Gothic" pitchFamily="34" charset="-120"/>
+              </a:rPr>
+              <a:t>・脆弱な機能を実際に使っているかは未確認。攻撃の痕跡はまだない</a:t>
+            </a:r>
+            <a:endParaRPr lang="en-US" sz="1400" dirty="0"/>
+          </a:p>
+          <a:p>
+            <a:pPr indent="0" marL="0">
+              <a:lnSpc>
+                <a:spcPct val="125000"/>
+              </a:lnSpc>
+              <a:buNone/>
+            </a:pPr>
+            <a:r>
+              <a:rPr lang="en-US" sz="1400" dirty="0">
+                <a:solidFill>
+                  <a:srgbClr val="16211F"/>
+                </a:solidFill>
+                <a:latin typeface="Yu Gothic" pitchFamily="34" charset="0"/>
+                <a:ea typeface="Yu Gothic" pitchFamily="34" charset="-122"/>
+                <a:cs typeface="Yu Gothic" pitchFamily="34" charset="-120"/>
+              </a:rPr>
+              <a:t>・月曜午前に、大口顧客向けの機能リリースを予定している</a:t>
+            </a:r>
+            <a:endParaRPr lang="en-US" sz="1400" dirty="0"/>
+          </a:p>
+        </p:txBody>
+      </p:sp>
+      <p:sp>
+        <p:nvSpPr>
+          <p:cNvPr id="10" name="Shape 8"/>
+          <p:cNvSpPr/>
+          <p:nvPr/>
+        </p:nvSpPr>
+        <p:spPr>
+          <a:xfrm>
+            <a:off x="640080" y="3840480"/>
+            <a:ext cx="5760720" cy="1325880"/>
+          </a:xfrm>
+          <a:prstGeom prst="roundRect">
+            <a:avLst>
+              <a:gd name="adj" fmla="val 3448"/>
+            </a:avLst>
+          </a:prstGeom>
+          <a:solidFill>
+            <a:srgbClr val="F6EBD8"/>
+          </a:solidFill>
+          <a:ln w="12700">
+            <a:solidFill>
+              <a:srgbClr val="C9821A"/>
+            </a:solidFill>
+            <a:prstDash val="solid"/>
+          </a:ln>
+        </p:spPr>
+      </p:sp>
+      <p:sp>
+        <p:nvSpPr>
+          <p:cNvPr id="11" name="Text 9"/>
+          <p:cNvSpPr/>
+          <p:nvPr/>
+        </p:nvSpPr>
+        <p:spPr>
+          <a:xfrm>
+            <a:off x="822960" y="3950208"/>
+            <a:ext cx="5394960" cy="320040"/>
+          </a:xfrm>
+          <a:prstGeom prst="rect">
+            <a:avLst/>
+          </a:prstGeom>
+          <a:noFill/>
+          <a:ln/>
+        </p:spPr>
+        <p:txBody>
+          <a:bodyPr wrap="square" lIns="0" tIns="0" rIns="0" bIns="0" rtlCol="0" anchor="ctr"/>
+          <a:lstStyle/>
+          <a:p>
+            <a:pPr indent="0" marL="0">
+              <a:buNone/>
+            </a:pPr>
+            <a:r>
+              <a:rPr lang="en-US" sz="1400" b="1" dirty="0">
+                <a:solidFill>
+                  <a:srgbClr val="C9821A"/>
+                </a:solidFill>
+                <a:latin typeface="Yu Gothic" pitchFamily="34" charset="0"/>
+                <a:ea typeface="Yu Gothic" pitchFamily="34" charset="-122"/>
+                <a:cs typeface="Yu Gothic" pitchFamily="34" charset="-120"/>
+              </a:rPr>
+              <a:t>18時、AIエージェントの調査結果が届く</a:t>
+            </a:r>
+            <a:endParaRPr lang="en-US" sz="1400" dirty="0"/>
+          </a:p>
+        </p:txBody>
+      </p:sp>
+      <p:sp>
+        <p:nvSpPr>
+          <p:cNvPr id="12" name="Text 10"/>
+          <p:cNvSpPr/>
+          <p:nvPr/>
+        </p:nvSpPr>
+        <p:spPr>
+          <a:xfrm>
+            <a:off x="822960" y="4297680"/>
+            <a:ext cx="5394960" cy="777240"/>
+          </a:xfrm>
+          <a:prstGeom prst="rect">
+            <a:avLst/>
+          </a:prstGeom>
+          <a:noFill/>
+          <a:ln/>
+        </p:spPr>
+        <p:txBody>
+          <a:bodyPr wrap="square" lIns="0" tIns="0" rIns="0" bIns="0" rtlCol="0" anchor="t"/>
+          <a:lstStyle/>
+          <a:p>
+            <a:pPr indent="0" marL="0">
+              <a:buNone/>
+            </a:pPr>
+            <a:r>
+              <a:rPr lang="en-US" sz="1350" dirty="0">
+                <a:solidFill>
+                  <a:srgbClr val="16211F"/>
+                </a:solidFill>
+                <a:latin typeface="Yu Gothic" pitchFamily="34" charset="0"/>
+                <a:ea typeface="Yu Gothic" pitchFamily="34" charset="-122"/>
+                <a:cs typeface="Yu Gothic" pitchFamily="34" charset="-120"/>
+              </a:rPr>
+              <a:t>「脆弱な機能は使われていない可能性が高い（静的解析による）。リリースは予定どおりで問題ないと考えられる」</a:t>
+            </a:r>
+            <a:endParaRPr lang="en-US" sz="1350" dirty="0"/>
+          </a:p>
+        </p:txBody>
+      </p:sp>
+      <p:sp>
+        <p:nvSpPr>
+          <p:cNvPr id="13" name="Text 11"/>
+          <p:cNvSpPr/>
+          <p:nvPr/>
+        </p:nvSpPr>
+        <p:spPr>
+          <a:xfrm>
+            <a:off x="6720840" y="1417320"/>
+            <a:ext cx="4830775" cy="274320"/>
+          </a:xfrm>
+          <a:prstGeom prst="rect">
+            <a:avLst/>
+          </a:prstGeom>
+          <a:noFill/>
+          <a:ln/>
+        </p:spPr>
+        <p:txBody>
+          <a:bodyPr wrap="square" lIns="0" tIns="0" rIns="0" bIns="0" rtlCol="0" anchor="ctr"/>
+          <a:lstStyle/>
+          <a:p>
+            <a:pPr indent="0" marL="0">
+              <a:buNone/>
+            </a:pPr>
+            <a:r>
+              <a:rPr lang="en-US" sz="1300" b="1" dirty="0">
+                <a:solidFill>
+                  <a:srgbClr val="2E7D6B"/>
+                </a:solidFill>
+                <a:latin typeface="Yu Gothic" pitchFamily="34" charset="0"/>
+                <a:ea typeface="Yu Gothic" pitchFamily="34" charset="-122"/>
+                <a:cs typeface="Yu Gothic" pitchFamily="34" charset="-120"/>
+              </a:rPr>
+              <a:t>判断してください</a:t>
+            </a:r>
+            <a:endParaRPr lang="en-US" sz="1300" dirty="0"/>
+          </a:p>
+        </p:txBody>
+      </p:sp>
+      <p:sp>
+        <p:nvSpPr>
+          <p:cNvPr id="14" name="Shape 12"/>
+          <p:cNvSpPr/>
+          <p:nvPr/>
+        </p:nvSpPr>
+        <p:spPr>
+          <a:xfrm>
+            <a:off x="6720840" y="1783080"/>
+            <a:ext cx="4830775" cy="987552"/>
+          </a:xfrm>
+          <a:prstGeom prst="roundRect">
+            <a:avLst>
+              <a:gd name="adj" fmla="val 4630"/>
+            </a:avLst>
+          </a:prstGeom>
+          <a:solidFill>
+            <a:srgbClr val="EDF3F1"/>
+          </a:solidFill>
+          <a:ln w="9525">
+            <a:solidFill>
+              <a:srgbClr val="C9D5D1"/>
+            </a:solidFill>
+            <a:prstDash val="solid"/>
+          </a:ln>
+        </p:spPr>
+      </p:sp>
+      <p:sp>
+        <p:nvSpPr>
+          <p:cNvPr id="15" name="Shape 13"/>
+          <p:cNvSpPr/>
+          <p:nvPr/>
+        </p:nvSpPr>
+        <p:spPr>
+          <a:xfrm>
+            <a:off x="6885432" y="2029968"/>
+            <a:ext cx="502920" cy="502920"/>
+          </a:xfrm>
+          <a:prstGeom prst="ellipse">
+            <a:avLst/>
+          </a:prstGeom>
+          <a:solidFill>
+            <a:srgbClr val="2E7D6B"/>
+          </a:solidFill>
+          <a:ln/>
+        </p:spPr>
+      </p:sp>
+      <p:sp>
+        <p:nvSpPr>
+          <p:cNvPr id="16" name="Text 14"/>
+          <p:cNvSpPr/>
+          <p:nvPr/>
+        </p:nvSpPr>
+        <p:spPr>
+          <a:xfrm>
+            <a:off x="6885432" y="2029968"/>
+            <a:ext cx="502920" cy="502920"/>
+          </a:xfrm>
+          <a:prstGeom prst="rect">
+            <a:avLst/>
+          </a:prstGeom>
+          <a:noFill/>
+          <a:ln/>
+        </p:spPr>
+        <p:txBody>
+          <a:bodyPr wrap="square" lIns="0" tIns="0" rIns="0" bIns="0" rtlCol="0" anchor="ctr"/>
+          <a:lstStyle/>
+          <a:p>
+            <a:pPr algn="ctr" indent="0" marL="0">
+              <a:buNone/>
+            </a:pPr>
+            <a:r>
+              <a:rPr lang="en-US" sz="1800" b="1" dirty="0">
+                <a:solidFill>
+                  <a:srgbClr val="FFFFFF"/>
+                </a:solidFill>
+                <a:latin typeface="Yu Gothic" pitchFamily="34" charset="0"/>
+                <a:ea typeface="Yu Gothic" pitchFamily="34" charset="-122"/>
+                <a:cs typeface="Yu Gothic" pitchFamily="34" charset="-120"/>
+              </a:rPr>
+              <a:t>A</a:t>
+            </a:r>
+            <a:endParaRPr lang="en-US" sz="1800" dirty="0"/>
+          </a:p>
+        </p:txBody>
+      </p:sp>
+      <p:sp>
+        <p:nvSpPr>
+          <p:cNvPr id="17" name="Text 15"/>
+          <p:cNvSpPr/>
+          <p:nvPr/>
+        </p:nvSpPr>
+        <p:spPr>
+          <a:xfrm>
+            <a:off x="7543800" y="1874520"/>
+            <a:ext cx="3870655" cy="804672"/>
+          </a:xfrm>
+          <a:prstGeom prst="rect">
+            <a:avLst/>
+          </a:prstGeom>
+          <a:noFill/>
+          <a:ln/>
+        </p:spPr>
+        <p:txBody>
+          <a:bodyPr wrap="square" lIns="0" tIns="0" rIns="0" bIns="0" rtlCol="0" anchor="ctr"/>
+          <a:lstStyle/>
+          <a:p>
+            <a:pPr indent="0" marL="0">
+              <a:buNone/>
+            </a:pPr>
+            <a:r>
+              <a:rPr lang="en-US" sz="1500" dirty="0">
+                <a:solidFill>
+                  <a:srgbClr val="16211F"/>
+                </a:solidFill>
+                <a:latin typeface="Yu Gothic" pitchFamily="34" charset="0"/>
+                <a:ea typeface="Yu Gothic" pitchFamily="34" charset="-122"/>
+                <a:cs typeface="Yu Gothic" pitchFamily="34" charset="-120"/>
+              </a:rPr>
+              <a:t>リリース延期を即決し、週末に緊急対応する</a:t>
+            </a:r>
+            <a:endParaRPr lang="en-US" sz="1500" dirty="0"/>
+          </a:p>
+        </p:txBody>
+      </p:sp>
+      <p:sp>
+        <p:nvSpPr>
+          <p:cNvPr id="18" name="Shape 16"/>
+          <p:cNvSpPr/>
+          <p:nvPr/>
+        </p:nvSpPr>
+        <p:spPr>
+          <a:xfrm>
+            <a:off x="6720840" y="2926080"/>
+            <a:ext cx="4830775" cy="987552"/>
+          </a:xfrm>
+          <a:prstGeom prst="roundRect">
+            <a:avLst>
+              <a:gd name="adj" fmla="val 4630"/>
+            </a:avLst>
+          </a:prstGeom>
+          <a:solidFill>
+            <a:srgbClr val="EDF3F1"/>
+          </a:solidFill>
+          <a:ln w="9525">
+            <a:solidFill>
+              <a:srgbClr val="C9D5D1"/>
+            </a:solidFill>
+            <a:prstDash val="solid"/>
+          </a:ln>
+        </p:spPr>
+      </p:sp>
+      <p:sp>
+        <p:nvSpPr>
+          <p:cNvPr id="19" name="Shape 17"/>
+          <p:cNvSpPr/>
+          <p:nvPr/>
+        </p:nvSpPr>
+        <p:spPr>
+          <a:xfrm>
+            <a:off x="6885432" y="3172968"/>
+            <a:ext cx="502920" cy="502920"/>
+          </a:xfrm>
+          <a:prstGeom prst="ellipse">
+            <a:avLst/>
+          </a:prstGeom>
+          <a:solidFill>
+            <a:srgbClr val="2E7D6B"/>
+          </a:solidFill>
+          <a:ln/>
+        </p:spPr>
+      </p:sp>
+      <p:sp>
+        <p:nvSpPr>
+          <p:cNvPr id="20" name="Text 18"/>
+          <p:cNvSpPr/>
+          <p:nvPr/>
+        </p:nvSpPr>
+        <p:spPr>
+          <a:xfrm>
+            <a:off x="6885432" y="3172968"/>
+            <a:ext cx="502920" cy="502920"/>
+          </a:xfrm>
+          <a:prstGeom prst="rect">
+            <a:avLst/>
+          </a:prstGeom>
+          <a:noFill/>
+          <a:ln/>
+        </p:spPr>
+        <p:txBody>
+          <a:bodyPr wrap="square" lIns="0" tIns="0" rIns="0" bIns="0" rtlCol="0" anchor="ctr"/>
+          <a:lstStyle/>
+          <a:p>
+            <a:pPr algn="ctr" indent="0" marL="0">
+              <a:buNone/>
+            </a:pPr>
+            <a:r>
+              <a:rPr lang="en-US" sz="1800" b="1" dirty="0">
+                <a:solidFill>
+                  <a:srgbClr val="FFFFFF"/>
+                </a:solidFill>
+                <a:latin typeface="Yu Gothic" pitchFamily="34" charset="0"/>
+                <a:ea typeface="Yu Gothic" pitchFamily="34" charset="-122"/>
+                <a:cs typeface="Yu Gothic" pitchFamily="34" charset="-120"/>
+              </a:rPr>
+              <a:t>B</a:t>
+            </a:r>
+            <a:endParaRPr lang="en-US" sz="1800" dirty="0"/>
+          </a:p>
+        </p:txBody>
+      </p:sp>
+      <p:sp>
+        <p:nvSpPr>
+          <p:cNvPr id="21" name="Text 19"/>
+          <p:cNvSpPr/>
+          <p:nvPr/>
+        </p:nvSpPr>
+        <p:spPr>
+          <a:xfrm>
+            <a:off x="7543800" y="3017520"/>
+            <a:ext cx="3870655" cy="804672"/>
+          </a:xfrm>
+          <a:prstGeom prst="rect">
+            <a:avLst/>
+          </a:prstGeom>
+          <a:noFill/>
+          <a:ln/>
+        </p:spPr>
+        <p:txBody>
+          <a:bodyPr wrap="square" lIns="0" tIns="0" rIns="0" bIns="0" rtlCol="0" anchor="ctr"/>
+          <a:lstStyle/>
+          <a:p>
+            <a:pPr indent="0" marL="0">
+              <a:buNone/>
+            </a:pPr>
+            <a:r>
+              <a:rPr lang="en-US" sz="1500" dirty="0">
+                <a:solidFill>
+                  <a:srgbClr val="16211F"/>
+                </a:solidFill>
+                <a:latin typeface="Yu Gothic" pitchFamily="34" charset="0"/>
+                <a:ea typeface="Yu Gothic" pitchFamily="34" charset="-122"/>
+                <a:cs typeface="Yu Gothic" pitchFamily="34" charset="-120"/>
+              </a:rPr>
+              <a:t>AIの結果を受けて、月曜リリースは予定どおり実施する</a:t>
+            </a:r>
+            <a:endParaRPr lang="en-US" sz="1500" dirty="0"/>
+          </a:p>
+        </p:txBody>
+      </p:sp>
+      <p:sp>
+        <p:nvSpPr>
+          <p:cNvPr id="22" name="Shape 20"/>
+          <p:cNvSpPr/>
+          <p:nvPr/>
+        </p:nvSpPr>
+        <p:spPr>
+          <a:xfrm>
+            <a:off x="6720840" y="4069080"/>
+            <a:ext cx="4830775" cy="987552"/>
+          </a:xfrm>
+          <a:prstGeom prst="roundRect">
+            <a:avLst>
+              <a:gd name="adj" fmla="val 4630"/>
+            </a:avLst>
+          </a:prstGeom>
+          <a:solidFill>
+            <a:srgbClr val="EDF3F1"/>
+          </a:solidFill>
+          <a:ln w="9525">
+            <a:solidFill>
+              <a:srgbClr val="C9D5D1"/>
+            </a:solidFill>
+            <a:prstDash val="solid"/>
+          </a:ln>
+        </p:spPr>
+      </p:sp>
+      <p:sp>
+        <p:nvSpPr>
+          <p:cNvPr id="23" name="Shape 21"/>
+          <p:cNvSpPr/>
+          <p:nvPr/>
+        </p:nvSpPr>
+        <p:spPr>
+          <a:xfrm>
+            <a:off x="6885432" y="4315968"/>
+            <a:ext cx="502920" cy="502920"/>
+          </a:xfrm>
+          <a:prstGeom prst="ellipse">
+            <a:avLst/>
+          </a:prstGeom>
+          <a:solidFill>
+            <a:srgbClr val="2E7D6B"/>
+          </a:solidFill>
+          <a:ln/>
+        </p:spPr>
+      </p:sp>
+      <p:sp>
+        <p:nvSpPr>
+          <p:cNvPr id="24" name="Text 22"/>
+          <p:cNvSpPr/>
+          <p:nvPr/>
+        </p:nvSpPr>
+        <p:spPr>
+          <a:xfrm>
+            <a:off x="6885432" y="4315968"/>
+            <a:ext cx="502920" cy="502920"/>
+          </a:xfrm>
+          <a:prstGeom prst="rect">
+            <a:avLst/>
+          </a:prstGeom>
+          <a:noFill/>
+          <a:ln/>
+        </p:spPr>
+        <p:txBody>
+          <a:bodyPr wrap="square" lIns="0" tIns="0" rIns="0" bIns="0" rtlCol="0" anchor="ctr"/>
+          <a:lstStyle/>
+          <a:p>
+            <a:pPr algn="ctr" indent="0" marL="0">
+              <a:buNone/>
+            </a:pPr>
+            <a:r>
+              <a:rPr lang="en-US" sz="1800" b="1" dirty="0">
+                <a:solidFill>
+                  <a:srgbClr val="FFFFFF"/>
+                </a:solidFill>
+                <a:latin typeface="Yu Gothic" pitchFamily="34" charset="0"/>
+                <a:ea typeface="Yu Gothic" pitchFamily="34" charset="-122"/>
+                <a:cs typeface="Yu Gothic" pitchFamily="34" charset="-120"/>
+              </a:rPr>
+              <a:t>C</a:t>
+            </a:r>
+            <a:endParaRPr lang="en-US" sz="1800" dirty="0"/>
+          </a:p>
+        </p:txBody>
+      </p:sp>
+      <p:sp>
+        <p:nvSpPr>
+          <p:cNvPr id="25" name="Text 23"/>
+          <p:cNvSpPr/>
+          <p:nvPr/>
+        </p:nvSpPr>
+        <p:spPr>
+          <a:xfrm>
+            <a:off x="7543800" y="4160520"/>
+            <a:ext cx="3870655" cy="804672"/>
+          </a:xfrm>
+          <a:prstGeom prst="rect">
+            <a:avLst/>
+          </a:prstGeom>
+          <a:noFill/>
+          <a:ln/>
+        </p:spPr>
+        <p:txBody>
+          <a:bodyPr wrap="square" lIns="0" tIns="0" rIns="0" bIns="0" rtlCol="0" anchor="ctr"/>
+          <a:lstStyle/>
+          <a:p>
+            <a:pPr indent="0" marL="0">
+              <a:buNone/>
+            </a:pPr>
+            <a:r>
+              <a:rPr lang="en-US" sz="1500" dirty="0">
+                <a:solidFill>
+                  <a:srgbClr val="16211F"/>
+                </a:solidFill>
+                <a:latin typeface="Yu Gothic" pitchFamily="34" charset="0"/>
+                <a:ea typeface="Yu Gothic" pitchFamily="34" charset="-122"/>
+                <a:cs typeface="Yu Gothic" pitchFamily="34" charset="-120"/>
+              </a:rPr>
+              <a:t>今ある材料で暫定判断し、見直す時刻と条件を決めておく</a:t>
+            </a:r>
+            <a:endParaRPr lang="en-US" sz="1500" dirty="0"/>
+          </a:p>
+        </p:txBody>
+      </p:sp>
+      <p:sp>
+        <p:nvSpPr>
+          <p:cNvPr id="26" name="Text 24"/>
+          <p:cNvSpPr/>
+          <p:nvPr/>
+        </p:nvSpPr>
+        <p:spPr>
+          <a:xfrm>
+            <a:off x="640080" y="5440680"/>
+            <a:ext cx="10911535" cy="320040"/>
+          </a:xfrm>
+          <a:prstGeom prst="rect">
+            <a:avLst/>
+          </a:prstGeom>
+          <a:noFill/>
+          <a:ln/>
+        </p:spPr>
+        <p:txBody>
+          <a:bodyPr wrap="square" lIns="0" tIns="0" rIns="0" bIns="0" rtlCol="0" anchor="ctr"/>
+          <a:lstStyle/>
+          <a:p>
+            <a:pPr indent="0" marL="0">
+              <a:buNone/>
+            </a:pPr>
+            <a:r>
+              <a:rPr lang="en-US" sz="1200" dirty="0">
+                <a:solidFill>
+                  <a:srgbClr val="5E6E6A"/>
+                </a:solidFill>
+                <a:latin typeface="Yu Gothic" pitchFamily="34" charset="0"/>
+                <a:ea typeface="Yu Gothic" pitchFamily="34" charset="-122"/>
+                <a:cs typeface="Yu Gothic" pitchFamily="34" charset="-120"/>
+              </a:rPr>
+              <a:t>5月（鹿児島）のミニ演習の続編です。前提は同じで、途中でAIの調査結果が届きます。</a:t>
+            </a:r>
+            <a:endParaRPr lang="en-US" sz="1200" dirty="0"/>
+          </a:p>
+        </p:txBody>
+      </p:sp>
+    </p:spTree>
+  </p:cSld>
+  <p:clrMapOvr>
+    <a:masterClrMapping/>
+  </p:clrMapOvr>
+</p:sld>
+</file>
+
+<file path=ppt/slides/slide13.xml><?xml version="1.0" encoding="utf-8"?>
+<p:sld xmlns:a="http://schemas.openxmlformats.org/drawingml/2006/main" xmlns:r="http://schemas.openxmlformats.org/officeDocument/2006/relationships" xmlns:p="http://schemas.openxmlformats.org/presentationml/2006/main">
+  <p:cSld name="Slide 13">
+    <p:bg>
+      <p:bgPr>
+        <a:solidFill>
+          <a:srgbClr val="FFFFFF"/>
+        </a:solidFill>
+      </p:bgPr>
+    </p:bg>
+    <p:spTree>
+      <p:nvGrpSpPr>
+        <p:cNvPr id="1" name=""/>
+        <p:cNvGrpSpPr/>
+        <p:nvPr/>
+      </p:nvGrpSpPr>
+      <p:grpSpPr>
+        <a:xfrm>
+          <a:off x="0" y="0"/>
+          <a:ext cx="0" cy="0"/>
+          <a:chOff x="0" y="0"/>
+          <a:chExt cx="0" cy="0"/>
+        </a:xfrm>
+      </p:grpSpPr>
+      <p:sp>
+        <p:nvSpPr>
+          <p:cNvPr id="2" name="Shape 0"/>
+          <p:cNvSpPr/>
+          <p:nvPr/>
+        </p:nvSpPr>
+        <p:spPr>
+          <a:xfrm>
+            <a:off x="0" y="0"/>
+            <a:ext cx="128016" cy="6858000"/>
+          </a:xfrm>
+          <a:prstGeom prst="rect">
+            <a:avLst/>
+          </a:prstGeom>
+          <a:solidFill>
+            <a:srgbClr val="2E7D6B"/>
+          </a:solidFill>
+          <a:ln/>
+        </p:spPr>
+      </p:sp>
+      <p:sp>
+        <p:nvSpPr>
+          <p:cNvPr id="3" name="Text 1"/>
+          <p:cNvSpPr/>
+          <p:nvPr/>
+        </p:nvSpPr>
+        <p:spPr>
+          <a:xfrm>
+            <a:off x="640080" y="292608"/>
+            <a:ext cx="7772400" cy="274320"/>
+          </a:xfrm>
+          <a:prstGeom prst="rect">
+            <a:avLst/>
+          </a:prstGeom>
+          <a:noFill/>
+          <a:ln/>
+        </p:spPr>
+        <p:txBody>
+          <a:bodyPr wrap="square" lIns="0" tIns="0" rIns="0" bIns="0" rtlCol="0" anchor="ctr"/>
+          <a:lstStyle/>
+          <a:p>
+            <a:pPr indent="0" marL="0">
+              <a:buNone/>
+            </a:pPr>
+            <a:r>
+              <a:rPr lang="en-US" sz="1200" b="1" dirty="0">
+                <a:solidFill>
+                  <a:srgbClr val="2E7D6B"/>
+                </a:solidFill>
+                <a:latin typeface="Yu Gothic" pitchFamily="34" charset="0"/>
+                <a:ea typeface="Yu Gothic" pitchFamily="34" charset="-122"/>
+                <a:cs typeface="Yu Gothic" pitchFamily="34" charset="-120"/>
+              </a:rPr>
+              <a:t>第2部　一歩②　暫定判断</a:t>
+            </a:r>
+            <a:endParaRPr lang="en-US" sz="1200" dirty="0"/>
+          </a:p>
+        </p:txBody>
+      </p:sp>
+      <p:sp>
+        <p:nvSpPr>
+          <p:cNvPr id="4" name="Text 2"/>
+          <p:cNvSpPr/>
+          <p:nvPr/>
+        </p:nvSpPr>
+        <p:spPr>
+          <a:xfrm>
+            <a:off x="9722815" y="292608"/>
+            <a:ext cx="1828800" cy="274320"/>
+          </a:xfrm>
+          <a:prstGeom prst="rect">
+            <a:avLst/>
+          </a:prstGeom>
+          <a:noFill/>
+          <a:ln/>
+        </p:spPr>
+        <p:txBody>
+          <a:bodyPr wrap="square" lIns="0" tIns="0" rIns="0" bIns="0" rtlCol="0" anchor="ctr"/>
+          <a:lstStyle/>
+          <a:p>
+            <a:pPr algn="r" indent="0" marL="0">
+              <a:buNone/>
+            </a:pPr>
+            <a:r>
+              <a:rPr lang="en-US" sz="1100" dirty="0">
+                <a:solidFill>
+                  <a:srgbClr val="5E6E6A"/>
+                </a:solidFill>
+                <a:latin typeface="Yu Gothic" pitchFamily="34" charset="0"/>
+                <a:ea typeface="Yu Gothic" pitchFamily="34" charset="-122"/>
+                <a:cs typeface="Yu Gothic" pitchFamily="34" charset="-120"/>
+              </a:rPr>
+              <a:t>9分</a:t>
+            </a:r>
+            <a:endParaRPr lang="en-US" sz="1100" dirty="0"/>
+          </a:p>
+        </p:txBody>
+      </p:sp>
+      <p:sp>
+        <p:nvSpPr>
+          <p:cNvPr id="5" name="Text 3"/>
+          <p:cNvSpPr/>
+          <p:nvPr/>
+        </p:nvSpPr>
+        <p:spPr>
+          <a:xfrm>
+            <a:off x="640080" y="621792"/>
+            <a:ext cx="10911535" cy="685800"/>
+          </a:xfrm>
+          <a:prstGeom prst="rect">
+            <a:avLst/>
+          </a:prstGeom>
+          <a:noFill/>
+          <a:ln/>
+        </p:spPr>
+        <p:txBody>
+          <a:bodyPr wrap="square" lIns="0" tIns="0" rIns="0" bIns="0" rtlCol="0" anchor="t"/>
+          <a:lstStyle/>
+          <a:p>
+            <a:pPr indent="0" marL="0">
+              <a:buNone/>
+            </a:pPr>
+            <a:r>
+              <a:rPr lang="en-US" sz="2600" b="1" dirty="0">
+                <a:solidFill>
+                  <a:srgbClr val="16211F"/>
+                </a:solidFill>
+                <a:latin typeface="Yu Gothic" pitchFamily="34" charset="0"/>
+                <a:ea typeface="Yu Gothic" pitchFamily="34" charset="-122"/>
+                <a:cs typeface="Yu Gothic" pitchFamily="34" charset="-120"/>
+              </a:rPr>
+              <a:t>判断を遅らせすぎず、AIを過信しない ― 暫定判断</a:t>
+            </a:r>
+            <a:endParaRPr lang="en-US" sz="2600" dirty="0"/>
+          </a:p>
+        </p:txBody>
+      </p:sp>
+      <p:sp>
+        <p:nvSpPr>
+          <p:cNvPr id="6" name="Text 4"/>
+          <p:cNvSpPr/>
+          <p:nvPr/>
+        </p:nvSpPr>
+        <p:spPr>
+          <a:xfrm>
+            <a:off x="10180015" y="6446520"/>
+            <a:ext cx="1371600" cy="228600"/>
+          </a:xfrm>
+          <a:prstGeom prst="rect">
+            <a:avLst/>
+          </a:prstGeom>
+          <a:noFill/>
+          <a:ln/>
+        </p:spPr>
+        <p:txBody>
+          <a:bodyPr wrap="square" lIns="0" tIns="0" rIns="0" bIns="0" rtlCol="0" anchor="ctr"/>
+          <a:lstStyle/>
+          <a:p>
+            <a:pPr algn="r" indent="0" marL="0">
+              <a:buNone/>
+            </a:pPr>
+            <a:r>
+              <a:rPr lang="en-US" sz="900" dirty="0">
+                <a:solidFill>
+                  <a:srgbClr val="5E6E6A"/>
+                </a:solidFill>
+                <a:latin typeface="Yu Gothic" pitchFamily="34" charset="0"/>
+                <a:ea typeface="Yu Gothic" pitchFamily="34" charset="-122"/>
+                <a:cs typeface="Yu Gothic" pitchFamily="34" charset="-120"/>
+              </a:rPr>
+              <a:t>13 / 24</a:t>
+            </a:r>
+            <a:endParaRPr lang="en-US" sz="900" dirty="0"/>
+          </a:p>
+        </p:txBody>
+      </p:sp>
+      <p:sp>
+        <p:nvSpPr>
+          <p:cNvPr id="7" name="Text 5"/>
+          <p:cNvSpPr/>
+          <p:nvPr/>
+        </p:nvSpPr>
+        <p:spPr>
+          <a:xfrm>
+            <a:off x="640080" y="6446520"/>
+            <a:ext cx="6400800" cy="228600"/>
+          </a:xfrm>
+          <a:prstGeom prst="rect">
+            <a:avLst/>
+          </a:prstGeom>
+          <a:noFill/>
+          <a:ln/>
+        </p:spPr>
+        <p:txBody>
+          <a:bodyPr wrap="square" lIns="0" tIns="0" rIns="0" bIns="0" rtlCol="0" anchor="ctr"/>
+          <a:lstStyle/>
+          <a:p>
+            <a:pPr indent="0" marL="0">
+              <a:buNone/>
+            </a:pPr>
+            <a:r>
+              <a:rPr lang="en-US" sz="900" dirty="0">
+                <a:solidFill>
+                  <a:srgbClr val="9FB2AD"/>
+                </a:solidFill>
+                <a:latin typeface="Yu Gothic" pitchFamily="34" charset="0"/>
+                <a:ea typeface="Yu Gothic" pitchFamily="34" charset="-122"/>
+                <a:cs typeface="Yu Gothic" pitchFamily="34" charset="-120"/>
+              </a:rPr>
+              <a:t>Security Days Fall 2026 Fukuoka　FB-05　小出 洋（九州大学）</a:t>
+            </a:r>
+            <a:endParaRPr lang="en-US" sz="900" dirty="0"/>
+          </a:p>
+        </p:txBody>
+      </p:sp>
+      <p:sp>
+        <p:nvSpPr>
+          <p:cNvPr id="8" name="Shape 6"/>
+          <p:cNvSpPr/>
+          <p:nvPr/>
+        </p:nvSpPr>
+        <p:spPr>
+          <a:xfrm>
+            <a:off x="640080" y="1508760"/>
+            <a:ext cx="5318608" cy="3246120"/>
+          </a:xfrm>
+          <a:prstGeom prst="roundRect">
+            <a:avLst>
+              <a:gd name="adj" fmla="val 1408"/>
+            </a:avLst>
+          </a:prstGeom>
+          <a:solidFill>
+            <a:srgbClr val="EDF3F1"/>
+          </a:solidFill>
+          <a:ln w="9525">
+            <a:solidFill>
+              <a:srgbClr val="C9D5D1"/>
+            </a:solidFill>
+            <a:prstDash val="solid"/>
+          </a:ln>
+        </p:spPr>
+      </p:sp>
+      <p:sp>
+        <p:nvSpPr>
+          <p:cNvPr id="9" name="Text 7"/>
+          <p:cNvSpPr/>
+          <p:nvPr/>
+        </p:nvSpPr>
+        <p:spPr>
+          <a:xfrm>
+            <a:off x="822960" y="1655064"/>
+            <a:ext cx="4952848" cy="411480"/>
+          </a:xfrm>
+          <a:prstGeom prst="rect">
+            <a:avLst/>
+          </a:prstGeom>
+          <a:noFill/>
+          <a:ln/>
+        </p:spPr>
+        <p:txBody>
+          <a:bodyPr wrap="square" lIns="0" tIns="0" rIns="0" bIns="0" rtlCol="0" anchor="t"/>
+          <a:lstStyle/>
+          <a:p>
+            <a:pPr indent="0" marL="0">
+              <a:buNone/>
+            </a:pPr>
+            <a:r>
+              <a:rPr lang="en-US" sz="1600" b="1" dirty="0">
+                <a:solidFill>
+                  <a:srgbClr val="2E7D6B"/>
+                </a:solidFill>
+                <a:latin typeface="Yu Gothic" pitchFamily="34" charset="0"/>
+                <a:ea typeface="Yu Gothic" pitchFamily="34" charset="-122"/>
+                <a:cs typeface="Yu Gothic" pitchFamily="34" charset="-120"/>
+              </a:rPr>
+              <a:t>不確実なときの2つの失敗</a:t>
+            </a:r>
+            <a:endParaRPr lang="en-US" sz="1600" dirty="0"/>
+          </a:p>
+        </p:txBody>
+      </p:sp>
+      <p:sp>
+        <p:nvSpPr>
+          <p:cNvPr id="10" name="Text 8"/>
+          <p:cNvSpPr/>
+          <p:nvPr/>
+        </p:nvSpPr>
+        <p:spPr>
+          <a:xfrm>
+            <a:off x="822960" y="2157984"/>
+            <a:ext cx="4952848" cy="2487168"/>
+          </a:xfrm>
+          <a:prstGeom prst="rect">
+            <a:avLst/>
+          </a:prstGeom>
+          <a:noFill/>
+          <a:ln/>
+        </p:spPr>
+        <p:txBody>
+          <a:bodyPr wrap="square" lIns="0" tIns="0" rIns="0" bIns="0" rtlCol="0" anchor="t"/>
+          <a:lstStyle/>
+          <a:p>
+            <a:pPr indent="0" marL="0">
+              <a:lnSpc>
+                <a:spcPct val="115000"/>
+              </a:lnSpc>
+              <a:buNone/>
+            </a:pPr>
+            <a:r>
+              <a:rPr lang="en-US" sz="1400" dirty="0">
+                <a:solidFill>
+                  <a:srgbClr val="16211F"/>
+                </a:solidFill>
+                <a:latin typeface="Yu Gothic" pitchFamily="34" charset="0"/>
+                <a:ea typeface="Yu Gothic" pitchFamily="34" charset="-122"/>
+                <a:cs typeface="Yu Gothic" pitchFamily="34" charset="-120"/>
+              </a:rPr>
+              <a:t>過信：AIのもっともらしい結論をそのまま採用する（ミニ演習の B）</a:t>
+            </a:r>
+            <a:endParaRPr lang="en-US" sz="1400" dirty="0"/>
+          </a:p>
+          <a:p>
+            <a:pPr indent="0" marL="0">
+              <a:lnSpc>
+                <a:spcPct val="115000"/>
+              </a:lnSpc>
+              <a:buNone/>
+            </a:pPr>
+            <a:endParaRPr lang="en-US" sz="1400" dirty="0"/>
+          </a:p>
+          <a:p>
+            <a:pPr indent="0" marL="0">
+              <a:lnSpc>
+                <a:spcPct val="115000"/>
+              </a:lnSpc>
+              <a:buNone/>
+            </a:pPr>
+            <a:r>
+              <a:rPr lang="en-US" sz="1400" dirty="0">
+                <a:solidFill>
+                  <a:srgbClr val="16211F"/>
+                </a:solidFill>
+                <a:latin typeface="Yu Gothic" pitchFamily="34" charset="0"/>
+                <a:ea typeface="Yu Gothic" pitchFamily="34" charset="-122"/>
+                <a:cs typeface="Yu Gothic" pitchFamily="34" charset="-120"/>
+              </a:rPr>
+              <a:t>先送り：情報がそろうまで決めない。その間に悪用と問い合わせが広がる</a:t>
+            </a:r>
+            <a:endParaRPr lang="en-US" sz="1400" dirty="0"/>
+          </a:p>
+          <a:p>
+            <a:pPr indent="0" marL="0">
+              <a:lnSpc>
+                <a:spcPct val="115000"/>
+              </a:lnSpc>
+              <a:buNone/>
+            </a:pPr>
+            <a:r>
+              <a:rPr lang="en-US" sz="1400" dirty="0">
+                <a:solidFill>
+                  <a:srgbClr val="16211F"/>
+                </a:solidFill>
+                <a:latin typeface="Yu Gothic" pitchFamily="34" charset="0"/>
+                <a:ea typeface="Yu Gothic" pitchFamily="34" charset="-122"/>
+                <a:cs typeface="Yu Gothic" pitchFamily="34" charset="-120"/>
+              </a:rPr>
+              <a:t>（AIの出力を一律に信じない「過剰な拒否」もこちら）</a:t>
+            </a:r>
+            <a:endParaRPr lang="en-US" sz="1400" dirty="0"/>
+          </a:p>
+        </p:txBody>
+      </p:sp>
+      <p:sp>
+        <p:nvSpPr>
+          <p:cNvPr id="11" name="Shape 9"/>
+          <p:cNvSpPr/>
+          <p:nvPr/>
+        </p:nvSpPr>
+        <p:spPr>
+          <a:xfrm>
+            <a:off x="6233008" y="1508760"/>
+            <a:ext cx="5318608" cy="3246120"/>
+          </a:xfrm>
+          <a:prstGeom prst="roundRect">
+            <a:avLst>
+              <a:gd name="adj" fmla="val 1408"/>
+            </a:avLst>
+          </a:prstGeom>
+          <a:solidFill>
+            <a:srgbClr val="2E7D6B"/>
+          </a:solidFill>
+          <a:ln w="9525">
+            <a:solidFill>
+              <a:srgbClr val="2E7D6B"/>
+            </a:solidFill>
+            <a:prstDash val="solid"/>
+          </a:ln>
+        </p:spPr>
+      </p:sp>
+      <p:sp>
+        <p:nvSpPr>
+          <p:cNvPr id="12" name="Text 10"/>
+          <p:cNvSpPr/>
+          <p:nvPr/>
+        </p:nvSpPr>
+        <p:spPr>
+          <a:xfrm>
+            <a:off x="6415888" y="1655064"/>
+            <a:ext cx="4952848" cy="411480"/>
+          </a:xfrm>
+          <a:prstGeom prst="rect">
+            <a:avLst/>
+          </a:prstGeom>
+          <a:noFill/>
+          <a:ln/>
+        </p:spPr>
+        <p:txBody>
+          <a:bodyPr wrap="square" lIns="0" tIns="0" rIns="0" bIns="0" rtlCol="0" anchor="t"/>
+          <a:lstStyle/>
+          <a:p>
+            <a:pPr indent="0" marL="0">
+              <a:buNone/>
+            </a:pPr>
+            <a:r>
+              <a:rPr lang="en-US" sz="1600" b="1" dirty="0">
+                <a:solidFill>
+                  <a:srgbClr val="FFFFFF"/>
+                </a:solidFill>
+                <a:latin typeface="Yu Gothic" pitchFamily="34" charset="0"/>
+                <a:ea typeface="Yu Gothic" pitchFamily="34" charset="-122"/>
+                <a:cs typeface="Yu Gothic" pitchFamily="34" charset="-120"/>
+              </a:rPr>
+              <a:t>暫定で決め、見直す時刻を決める</a:t>
+            </a:r>
+            <a:endParaRPr lang="en-US" sz="1600" dirty="0"/>
+          </a:p>
+        </p:txBody>
+      </p:sp>
+      <p:sp>
+        <p:nvSpPr>
+          <p:cNvPr id="13" name="Text 11"/>
+          <p:cNvSpPr/>
+          <p:nvPr/>
+        </p:nvSpPr>
+        <p:spPr>
+          <a:xfrm>
+            <a:off x="6415888" y="2157984"/>
+            <a:ext cx="4952848" cy="2487168"/>
+          </a:xfrm>
+          <a:prstGeom prst="rect">
+            <a:avLst/>
+          </a:prstGeom>
+          <a:noFill/>
+          <a:ln/>
+        </p:spPr>
+        <p:txBody>
+          <a:bodyPr wrap="square" lIns="0" tIns="0" rIns="0" bIns="0" rtlCol="0" anchor="t"/>
+          <a:lstStyle/>
+          <a:p>
+            <a:pPr indent="0" marL="0">
+              <a:lnSpc>
+                <a:spcPct val="115000"/>
+              </a:lnSpc>
+              <a:buNone/>
+            </a:pPr>
+            <a:r>
+              <a:rPr lang="en-US" sz="1400" dirty="0">
+                <a:solidFill>
+                  <a:srgbClr val="E8F0EC"/>
+                </a:solidFill>
+                <a:latin typeface="Yu Gothic" pitchFamily="34" charset="0"/>
+                <a:ea typeface="Yu Gothic" pitchFamily="34" charset="-122"/>
+                <a:cs typeface="Yu Gothic" pitchFamily="34" charset="-120"/>
+              </a:rPr>
+              <a:t>「今の材料では、リリースは保留。顧客に暫定の連絡を入れる」</a:t>
+            </a:r>
+            <a:endParaRPr lang="en-US" sz="1400" dirty="0"/>
+          </a:p>
+          <a:p>
+            <a:pPr indent="0" marL="0">
+              <a:lnSpc>
+                <a:spcPct val="115000"/>
+              </a:lnSpc>
+              <a:buNone/>
+            </a:pPr>
+            <a:r>
+              <a:rPr lang="en-US" sz="1400" dirty="0">
+                <a:solidFill>
+                  <a:srgbClr val="E8F0EC"/>
+                </a:solidFill>
+                <a:latin typeface="Yu Gothic" pitchFamily="34" charset="0"/>
+                <a:ea typeface="Yu Gothic" pitchFamily="34" charset="-122"/>
+                <a:cs typeface="Yu Gothic" pitchFamily="34" charset="-120"/>
+              </a:rPr>
+              <a:t>「日曜12時に、動的な確認の結果を見て見直す」</a:t>
+            </a:r>
+            <a:endParaRPr lang="en-US" sz="1400" dirty="0"/>
+          </a:p>
+          <a:p>
+            <a:pPr indent="0" marL="0">
+              <a:lnSpc>
+                <a:spcPct val="115000"/>
+              </a:lnSpc>
+              <a:buNone/>
+            </a:pPr>
+            <a:r>
+              <a:rPr lang="en-US" sz="1400" dirty="0">
+                <a:solidFill>
+                  <a:srgbClr val="E8F0EC"/>
+                </a:solidFill>
+                <a:latin typeface="Yu Gothic" pitchFamily="34" charset="0"/>
+                <a:ea typeface="Yu Gothic" pitchFamily="34" charset="-122"/>
+                <a:cs typeface="Yu Gothic" pitchFamily="34" charset="-120"/>
+              </a:rPr>
+              <a:t>「脆弱な機能の利用が否定できれば、予定どおり出す」</a:t>
+            </a:r>
+            <a:endParaRPr lang="en-US" sz="1400" dirty="0"/>
+          </a:p>
+          <a:p>
+            <a:pPr indent="0" marL="0">
+              <a:lnSpc>
+                <a:spcPct val="115000"/>
+              </a:lnSpc>
+              <a:buNone/>
+            </a:pPr>
+            <a:endParaRPr lang="en-US" sz="1400" dirty="0"/>
+          </a:p>
+          <a:p>
+            <a:pPr indent="0" marL="0">
+              <a:lnSpc>
+                <a:spcPct val="115000"/>
+              </a:lnSpc>
+              <a:buNone/>
+            </a:pPr>
+            <a:r>
+              <a:rPr lang="en-US" sz="1400" dirty="0">
+                <a:solidFill>
+                  <a:srgbClr val="E8F0EC"/>
+                </a:solidFill>
+                <a:latin typeface="Yu Gothic" pitchFamily="34" charset="0"/>
+                <a:ea typeface="Yu Gothic" pitchFamily="34" charset="-122"/>
+                <a:cs typeface="Yu Gothic" pitchFamily="34" charset="-120"/>
+              </a:rPr>
+              <a:t>この3点を、決めた人の名前と時刻とともに記録します。</a:t>
+            </a:r>
+            <a:endParaRPr lang="en-US" sz="1400" dirty="0"/>
+          </a:p>
+        </p:txBody>
+      </p:sp>
+      <p:sp>
+        <p:nvSpPr>
+          <p:cNvPr id="14" name="Shape 12"/>
+          <p:cNvSpPr/>
+          <p:nvPr/>
+        </p:nvSpPr>
+        <p:spPr>
+          <a:xfrm>
+            <a:off x="640080" y="4983480"/>
+            <a:ext cx="10911535" cy="658368"/>
+          </a:xfrm>
+          <a:prstGeom prst="rect">
+            <a:avLst/>
+          </a:prstGeom>
+          <a:solidFill>
+            <a:srgbClr val="F6EBD8"/>
+          </a:solidFill>
+          <a:ln/>
+        </p:spPr>
+      </p:sp>
+      <p:sp>
+        <p:nvSpPr>
+          <p:cNvPr id="15" name="Shape 13"/>
+          <p:cNvSpPr/>
+          <p:nvPr/>
+        </p:nvSpPr>
+        <p:spPr>
+          <a:xfrm>
+            <a:off x="640080" y="4983480"/>
+            <a:ext cx="73152" cy="658368"/>
+          </a:xfrm>
+          <a:prstGeom prst="rect">
+            <a:avLst/>
+          </a:prstGeom>
+          <a:solidFill>
+            <a:srgbClr val="C9821A"/>
+          </a:solidFill>
+          <a:ln/>
+        </p:spPr>
+      </p:sp>
+      <p:sp>
+        <p:nvSpPr>
+          <p:cNvPr id="16" name="Text 14"/>
+          <p:cNvSpPr/>
+          <p:nvPr/>
+        </p:nvSpPr>
+        <p:spPr>
+          <a:xfrm>
+            <a:off x="914400" y="5056632"/>
+            <a:ext cx="10454335" cy="512064"/>
+          </a:xfrm>
+          <a:prstGeom prst="rect">
+            <a:avLst/>
+          </a:prstGeom>
+          <a:noFill/>
+          <a:ln/>
+        </p:spPr>
+        <p:txBody>
+          <a:bodyPr wrap="square" lIns="0" tIns="0" rIns="0" bIns="0" rtlCol="0" anchor="ctr"/>
+          <a:lstStyle/>
+          <a:p>
+            <a:pPr indent="0" marL="0">
+              <a:buNone/>
+            </a:pPr>
+            <a:r>
+              <a:rPr lang="en-US" sz="1400" b="1" dirty="0">
+                <a:solidFill>
+                  <a:srgbClr val="16211F"/>
+                </a:solidFill>
+                <a:latin typeface="Yu Gothic" pitchFamily="34" charset="0"/>
+                <a:ea typeface="Yu Gothic" pitchFamily="34" charset="-122"/>
+                <a:cs typeface="Yu Gothic" pitchFamily="34" charset="-120"/>
+              </a:rPr>
+              <a:t>完全な情報は来ません。決め直せる形で早く決めることが、不確実な状況での判断の型です。</a:t>
+            </a:r>
+            <a:endParaRPr lang="en-US" sz="1400" dirty="0"/>
+          </a:p>
+        </p:txBody>
+      </p:sp>
+    </p:spTree>
+  </p:cSld>
+  <p:clrMapOvr>
+    <a:masterClrMapping/>
+  </p:clrMapOvr>
+</p:sld>
+</file>
+
+<file path=ppt/slides/slide14.xml><?xml version="1.0" encoding="utf-8"?>
+<p:sld xmlns:a="http://schemas.openxmlformats.org/drawingml/2006/main" xmlns:r="http://schemas.openxmlformats.org/officeDocument/2006/relationships" xmlns:p="http://schemas.openxmlformats.org/presentationml/2006/main">
+  <p:cSld name="Slide 14">
+    <p:bg>
+      <p:bgPr>
+        <a:solidFill>
+          <a:srgbClr val="0E2E2A"/>
+        </a:solidFill>
+      </p:bgPr>
+    </p:bg>
+    <p:spTree>
+      <p:nvGrpSpPr>
+        <p:cNvPr id="1" name=""/>
+        <p:cNvGrpSpPr/>
+        <p:nvPr/>
+      </p:nvGrpSpPr>
+      <p:grpSpPr>
+        <a:xfrm>
+          <a:off x="0" y="0"/>
+          <a:ext cx="0" cy="0"/>
+          <a:chOff x="0" y="0"/>
+          <a:chExt cx="0" cy="0"/>
+        </a:xfrm>
+      </p:grpSpPr>
+      <p:sp>
+        <p:nvSpPr>
+          <p:cNvPr id="2" name="Shape 0"/>
+          <p:cNvSpPr/>
+          <p:nvPr/>
+        </p:nvSpPr>
+        <p:spPr>
+          <a:xfrm>
+            <a:off x="0" y="0"/>
+            <a:ext cx="201168" cy="6858000"/>
+          </a:xfrm>
+          <a:prstGeom prst="rect">
+            <a:avLst/>
+          </a:prstGeom>
+          <a:solidFill>
+            <a:srgbClr val="2E7D6B"/>
+          </a:solidFill>
+          <a:ln/>
+        </p:spPr>
+      </p:sp>
+      <p:sp>
+        <p:nvSpPr>
+          <p:cNvPr id="3" name="Text 1"/>
+          <p:cNvSpPr/>
+          <p:nvPr/>
+        </p:nvSpPr>
+        <p:spPr>
+          <a:xfrm>
+            <a:off x="822960" y="2103120"/>
+            <a:ext cx="3657600" cy="548640"/>
+          </a:xfrm>
+          <a:prstGeom prst="rect">
+            <a:avLst/>
+          </a:prstGeom>
+          <a:noFill/>
+          <a:ln/>
+        </p:spPr>
+        <p:txBody>
+          <a:bodyPr wrap="square" lIns="0" tIns="0" rIns="0" bIns="0" rtlCol="0" anchor="ctr"/>
+          <a:lstStyle/>
+          <a:p>
+            <a:pPr indent="0" marL="0">
+              <a:buNone/>
+            </a:pPr>
+            <a:r>
+              <a:rPr lang="en-US" sz="2400" b="1" dirty="0">
+                <a:solidFill>
+                  <a:srgbClr val="C9821A"/>
+                </a:solidFill>
+                <a:latin typeface="Yu Gothic" pitchFamily="34" charset="0"/>
+                <a:ea typeface="Yu Gothic" pitchFamily="34" charset="-122"/>
+                <a:cs typeface="Yu Gothic" pitchFamily="34" charset="-120"/>
+              </a:rPr>
+              <a:t>第3部</a:t>
+            </a:r>
+            <a:endParaRPr lang="en-US" sz="2400" dirty="0"/>
+          </a:p>
+        </p:txBody>
+      </p:sp>
+      <p:sp>
+        <p:nvSpPr>
+          <p:cNvPr id="4" name="Text 2"/>
+          <p:cNvSpPr/>
+          <p:nvPr/>
+        </p:nvSpPr>
+        <p:spPr>
+          <a:xfrm>
+            <a:off x="822960" y="2697480"/>
+            <a:ext cx="10607040" cy="822960"/>
+          </a:xfrm>
+          <a:prstGeom prst="rect">
+            <a:avLst/>
+          </a:prstGeom>
+          <a:noFill/>
+          <a:ln/>
+        </p:spPr>
+        <p:txBody>
+          <a:bodyPr wrap="square" lIns="0" tIns="0" rIns="0" bIns="0" rtlCol="0" anchor="ctr"/>
+          <a:lstStyle/>
+          <a:p>
+            <a:pPr indent="0" marL="0">
+              <a:buNone/>
+            </a:pPr>
+            <a:r>
+              <a:rPr lang="en-US" sz="3800" b="1" dirty="0">
+                <a:solidFill>
+                  <a:srgbClr val="FFFFFF"/>
+                </a:solidFill>
+                <a:latin typeface="Yu Gothic" pitchFamily="34" charset="0"/>
+                <a:ea typeface="Yu Gothic" pitchFamily="34" charset="-122"/>
+                <a:cs typeface="Yu Gothic" pitchFamily="34" charset="-120"/>
+              </a:rPr>
+              <a:t>限られた人員で回す</a:t>
+            </a:r>
+            <a:endParaRPr lang="en-US" sz="3800" dirty="0"/>
+          </a:p>
+        </p:txBody>
+      </p:sp>
+      <p:sp>
+        <p:nvSpPr>
+          <p:cNvPr id="5" name="Text 3"/>
+          <p:cNvSpPr/>
+          <p:nvPr/>
+        </p:nvSpPr>
+        <p:spPr>
+          <a:xfrm>
+            <a:off x="822960" y="3657600"/>
+            <a:ext cx="10607040" cy="457200"/>
+          </a:xfrm>
+          <a:prstGeom prst="rect">
+            <a:avLst/>
+          </a:prstGeom>
+          <a:noFill/>
+          <a:ln/>
+        </p:spPr>
+        <p:txBody>
+          <a:bodyPr wrap="square" lIns="0" tIns="0" rIns="0" bIns="0" rtlCol="0" anchor="ctr"/>
+          <a:lstStyle/>
+          <a:p>
+            <a:pPr indent="0" marL="0">
+              <a:buNone/>
+            </a:pPr>
+            <a:r>
+              <a:rPr lang="en-US" sz="1800" dirty="0">
+                <a:solidFill>
+                  <a:srgbClr val="9FB2AD"/>
+                </a:solidFill>
+                <a:latin typeface="Yu Gothic" pitchFamily="34" charset="0"/>
+                <a:ea typeface="Yu Gothic" pitchFamily="34" charset="-122"/>
+                <a:cs typeface="Yu Gothic" pitchFamily="34" charset="-120"/>
+              </a:rPr>
+              <a:t>「あの人がいないと動かない」をなくす</a:t>
+            </a:r>
+            <a:endParaRPr lang="en-US" sz="1800" dirty="0"/>
+          </a:p>
+        </p:txBody>
+      </p:sp>
+    </p:spTree>
+  </p:cSld>
+  <p:clrMapOvr>
+    <a:masterClrMapping/>
+  </p:clrMapOvr>
+</p:sld>
+</file>
+
+<file path=ppt/slides/slide15.xml><?xml version="1.0" encoding="utf-8"?>
+<p:sld xmlns:a="http://schemas.openxmlformats.org/drawingml/2006/main" xmlns:r="http://schemas.openxmlformats.org/officeDocument/2006/relationships" xmlns:p="http://schemas.openxmlformats.org/presentationml/2006/main">
+  <p:cSld name="Slide 15">
+    <p:bg>
+      <p:bgPr>
+        <a:solidFill>
+          <a:srgbClr val="FFFFFF"/>
+        </a:solidFill>
+      </p:bgPr>
+    </p:bg>
+    <p:spTree>
+      <p:nvGrpSpPr>
+        <p:cNvPr id="1" name=""/>
+        <p:cNvGrpSpPr/>
+        <p:nvPr/>
+      </p:nvGrpSpPr>
+      <p:grpSpPr>
+        <a:xfrm>
+          <a:off x="0" y="0"/>
+          <a:ext cx="0" cy="0"/>
+          <a:chOff x="0" y="0"/>
+          <a:chExt cx="0" cy="0"/>
+        </a:xfrm>
+      </p:grpSpPr>
+      <p:sp>
+        <p:nvSpPr>
+          <p:cNvPr id="2" name="Shape 0"/>
+          <p:cNvSpPr/>
+          <p:nvPr/>
+        </p:nvSpPr>
+        <p:spPr>
+          <a:xfrm>
+            <a:off x="0" y="0"/>
+            <a:ext cx="128016" cy="6858000"/>
+          </a:xfrm>
+          <a:prstGeom prst="rect">
+            <a:avLst/>
+          </a:prstGeom>
+          <a:solidFill>
+            <a:srgbClr val="2E7D6B"/>
+          </a:solidFill>
+          <a:ln/>
+        </p:spPr>
+      </p:sp>
+      <p:sp>
+        <p:nvSpPr>
+          <p:cNvPr id="3" name="Text 1"/>
+          <p:cNvSpPr/>
+          <p:nvPr/>
+        </p:nvSpPr>
+        <p:spPr>
+          <a:xfrm>
+            <a:off x="640080" y="292608"/>
+            <a:ext cx="7772400" cy="274320"/>
+          </a:xfrm>
+          <a:prstGeom prst="rect">
+            <a:avLst/>
+          </a:prstGeom>
+          <a:noFill/>
+          <a:ln/>
+        </p:spPr>
+        <p:txBody>
+          <a:bodyPr wrap="square" lIns="0" tIns="0" rIns="0" bIns="0" rtlCol="0" anchor="ctr"/>
+          <a:lstStyle/>
+          <a:p>
+            <a:pPr indent="0" marL="0">
+              <a:buNone/>
+            </a:pPr>
+            <a:r>
+              <a:rPr lang="en-US" sz="1200" b="1" dirty="0">
+                <a:solidFill>
+                  <a:srgbClr val="2E7D6B"/>
+                </a:solidFill>
+                <a:latin typeface="Yu Gothic" pitchFamily="34" charset="0"/>
+                <a:ea typeface="Yu Gothic" pitchFamily="34" charset="-122"/>
+                <a:cs typeface="Yu Gothic" pitchFamily="34" charset="-120"/>
+              </a:rPr>
+              <a:t>第3部　限られた人員で回す</a:t>
+            </a:r>
+            <a:endParaRPr lang="en-US" sz="1200" dirty="0"/>
+          </a:p>
+        </p:txBody>
+      </p:sp>
+      <p:sp>
+        <p:nvSpPr>
+          <p:cNvPr id="4" name="Text 2"/>
+          <p:cNvSpPr/>
+          <p:nvPr/>
+        </p:nvSpPr>
+        <p:spPr>
+          <a:xfrm>
+            <a:off x="9722815" y="292608"/>
+            <a:ext cx="1828800" cy="274320"/>
+          </a:xfrm>
+          <a:prstGeom prst="rect">
+            <a:avLst/>
+          </a:prstGeom>
+          <a:noFill/>
+          <a:ln/>
+        </p:spPr>
+        <p:txBody>
+          <a:bodyPr wrap="square" lIns="0" tIns="0" rIns="0" bIns="0" rtlCol="0" anchor="ctr"/>
+          <a:lstStyle/>
+          <a:p>
+            <a:pPr algn="r" indent="0" marL="0">
+              <a:buNone/>
+            </a:pPr>
+            <a:r>
+              <a:rPr lang="en-US" sz="1100" dirty="0">
+                <a:solidFill>
+                  <a:srgbClr val="5E6E6A"/>
+                </a:solidFill>
+                <a:latin typeface="Yu Gothic" pitchFamily="34" charset="0"/>
+                <a:ea typeface="Yu Gothic" pitchFamily="34" charset="-122"/>
+                <a:cs typeface="Yu Gothic" pitchFamily="34" charset="-120"/>
+              </a:rPr>
+              <a:t>5分</a:t>
+            </a:r>
+            <a:endParaRPr lang="en-US" sz="1100" dirty="0"/>
+          </a:p>
+        </p:txBody>
+      </p:sp>
+      <p:sp>
+        <p:nvSpPr>
+          <p:cNvPr id="5" name="Text 3"/>
+          <p:cNvSpPr/>
+          <p:nvPr/>
+        </p:nvSpPr>
+        <p:spPr>
+          <a:xfrm>
+            <a:off x="640080" y="621792"/>
+            <a:ext cx="10911535" cy="685800"/>
+          </a:xfrm>
+          <a:prstGeom prst="rect">
+            <a:avLst/>
+          </a:prstGeom>
+          <a:noFill/>
+          <a:ln/>
+        </p:spPr>
+        <p:txBody>
+          <a:bodyPr wrap="square" lIns="0" tIns="0" rIns="0" bIns="0" rtlCol="0" anchor="t"/>
+          <a:lstStyle/>
+          <a:p>
+            <a:pPr indent="0" marL="0">
+              <a:buNone/>
+            </a:pPr>
+            <a:r>
+              <a:rPr lang="en-US" sz="2600" b="1" dirty="0">
+                <a:solidFill>
+                  <a:srgbClr val="16211F"/>
+                </a:solidFill>
+                <a:latin typeface="Yu Gothic" pitchFamily="34" charset="0"/>
+                <a:ea typeface="Yu Gothic" pitchFamily="34" charset="-122"/>
+                <a:cs typeface="Yu Gothic" pitchFamily="34" charset="-120"/>
+              </a:rPr>
+              <a:t>「ひとががんばる」体制の弱さは、判断が人に貼りついていること</a:t>
+            </a:r>
+            <a:endParaRPr lang="en-US" sz="2600" dirty="0"/>
+          </a:p>
+        </p:txBody>
+      </p:sp>
+      <p:sp>
+        <p:nvSpPr>
+          <p:cNvPr id="6" name="Text 4"/>
+          <p:cNvSpPr/>
+          <p:nvPr/>
+        </p:nvSpPr>
+        <p:spPr>
+          <a:xfrm>
+            <a:off x="10180015" y="6446520"/>
+            <a:ext cx="1371600" cy="228600"/>
+          </a:xfrm>
+          <a:prstGeom prst="rect">
+            <a:avLst/>
+          </a:prstGeom>
+          <a:noFill/>
+          <a:ln/>
+        </p:spPr>
+        <p:txBody>
+          <a:bodyPr wrap="square" lIns="0" tIns="0" rIns="0" bIns="0" rtlCol="0" anchor="ctr"/>
+          <a:lstStyle/>
+          <a:p>
+            <a:pPr algn="r" indent="0" marL="0">
+              <a:buNone/>
+            </a:pPr>
+            <a:r>
+              <a:rPr lang="en-US" sz="900" dirty="0">
+                <a:solidFill>
+                  <a:srgbClr val="5E6E6A"/>
+                </a:solidFill>
+                <a:latin typeface="Yu Gothic" pitchFamily="34" charset="0"/>
+                <a:ea typeface="Yu Gothic" pitchFamily="34" charset="-122"/>
+                <a:cs typeface="Yu Gothic" pitchFamily="34" charset="-120"/>
+              </a:rPr>
+              <a:t>15 / 24</a:t>
+            </a:r>
+            <a:endParaRPr lang="en-US" sz="900" dirty="0"/>
+          </a:p>
+        </p:txBody>
+      </p:sp>
+      <p:sp>
+        <p:nvSpPr>
+          <p:cNvPr id="7" name="Text 5"/>
+          <p:cNvSpPr/>
+          <p:nvPr/>
+        </p:nvSpPr>
+        <p:spPr>
+          <a:xfrm>
+            <a:off x="640080" y="6446520"/>
+            <a:ext cx="6400800" cy="228600"/>
+          </a:xfrm>
+          <a:prstGeom prst="rect">
+            <a:avLst/>
+          </a:prstGeom>
+          <a:noFill/>
+          <a:ln/>
+        </p:spPr>
+        <p:txBody>
+          <a:bodyPr wrap="square" lIns="0" tIns="0" rIns="0" bIns="0" rtlCol="0" anchor="ctr"/>
+          <a:lstStyle/>
+          <a:p>
+            <a:pPr indent="0" marL="0">
+              <a:buNone/>
+            </a:pPr>
+            <a:r>
+              <a:rPr lang="en-US" sz="900" dirty="0">
+                <a:solidFill>
+                  <a:srgbClr val="9FB2AD"/>
+                </a:solidFill>
+                <a:latin typeface="Yu Gothic" pitchFamily="34" charset="0"/>
+                <a:ea typeface="Yu Gothic" pitchFamily="34" charset="-122"/>
+                <a:cs typeface="Yu Gothic" pitchFamily="34" charset="-120"/>
+              </a:rPr>
+              <a:t>Security Days Fall 2026 Fukuoka　FB-05　小出 洋（九州大学）</a:t>
+            </a:r>
+            <a:endParaRPr lang="en-US" sz="900" dirty="0"/>
+          </a:p>
+        </p:txBody>
+      </p:sp>
+      <p:sp>
+        <p:nvSpPr>
+          <p:cNvPr id="8" name="Shape 6"/>
+          <p:cNvSpPr/>
+          <p:nvPr/>
+        </p:nvSpPr>
+        <p:spPr>
+          <a:xfrm>
+            <a:off x="640080" y="1508760"/>
+            <a:ext cx="5318608" cy="3246120"/>
+          </a:xfrm>
+          <a:prstGeom prst="roundRect">
+            <a:avLst>
+              <a:gd name="adj" fmla="val 1408"/>
+            </a:avLst>
+          </a:prstGeom>
+          <a:solidFill>
+            <a:srgbClr val="EDF3F1"/>
+          </a:solidFill>
+          <a:ln w="9525">
+            <a:solidFill>
+              <a:srgbClr val="C9D5D1"/>
+            </a:solidFill>
+            <a:prstDash val="solid"/>
+          </a:ln>
+        </p:spPr>
+      </p:sp>
+      <p:sp>
+        <p:nvSpPr>
+          <p:cNvPr id="9" name="Text 7"/>
+          <p:cNvSpPr/>
+          <p:nvPr/>
+        </p:nvSpPr>
+        <p:spPr>
+          <a:xfrm>
+            <a:off x="822960" y="1655064"/>
+            <a:ext cx="4952848" cy="411480"/>
+          </a:xfrm>
+          <a:prstGeom prst="rect">
+            <a:avLst/>
+          </a:prstGeom>
+          <a:noFill/>
+          <a:ln/>
+        </p:spPr>
+        <p:txBody>
+          <a:bodyPr wrap="square" lIns="0" tIns="0" rIns="0" bIns="0" rtlCol="0" anchor="t"/>
+          <a:lstStyle/>
+          <a:p>
+            <a:pPr indent="0" marL="0">
+              <a:buNone/>
+            </a:pPr>
+            <a:r>
+              <a:rPr lang="en-US" sz="1600" b="1" dirty="0">
+                <a:solidFill>
+                  <a:srgbClr val="2E7D6B"/>
+                </a:solidFill>
+                <a:latin typeface="Yu Gothic" pitchFamily="34" charset="0"/>
+                <a:ea typeface="Yu Gothic" pitchFamily="34" charset="-122"/>
+                <a:cs typeface="Yu Gothic" pitchFamily="34" charset="-120"/>
+              </a:rPr>
+              <a:t>よくある状態</a:t>
+            </a:r>
+            <a:endParaRPr lang="en-US" sz="1600" dirty="0"/>
+          </a:p>
+        </p:txBody>
+      </p:sp>
+      <p:sp>
+        <p:nvSpPr>
+          <p:cNvPr id="10" name="Text 8"/>
+          <p:cNvSpPr/>
+          <p:nvPr/>
+        </p:nvSpPr>
+        <p:spPr>
+          <a:xfrm>
+            <a:off x="822960" y="2157984"/>
+            <a:ext cx="4952848" cy="2487168"/>
+          </a:xfrm>
+          <a:prstGeom prst="rect">
+            <a:avLst/>
+          </a:prstGeom>
+          <a:noFill/>
+          <a:ln/>
+        </p:spPr>
+        <p:txBody>
+          <a:bodyPr wrap="square" lIns="0" tIns="0" rIns="0" bIns="0" rtlCol="0" anchor="t"/>
+          <a:lstStyle/>
+          <a:p>
+            <a:pPr indent="0" marL="0">
+              <a:lnSpc>
+                <a:spcPct val="115000"/>
+              </a:lnSpc>
+              <a:buNone/>
+            </a:pPr>
+            <a:r>
+              <a:rPr lang="en-US" sz="1400" dirty="0">
+                <a:solidFill>
+                  <a:srgbClr val="16211F"/>
+                </a:solidFill>
+                <a:latin typeface="Yu Gothic" pitchFamily="34" charset="0"/>
+                <a:ea typeface="Yu Gothic" pitchFamily="34" charset="-122"/>
+                <a:cs typeface="Yu Gothic" pitchFamily="34" charset="-120"/>
+              </a:rPr>
+              <a:t>・判断できる人が1〜2人に集中している</a:t>
+            </a:r>
+            <a:endParaRPr lang="en-US" sz="1400" dirty="0"/>
+          </a:p>
+          <a:p>
+            <a:pPr indent="0" marL="0">
+              <a:lnSpc>
+                <a:spcPct val="115000"/>
+              </a:lnSpc>
+              <a:buNone/>
+            </a:pPr>
+            <a:r>
+              <a:rPr lang="en-US" sz="1400" dirty="0">
+                <a:solidFill>
+                  <a:srgbClr val="16211F"/>
+                </a:solidFill>
+                <a:latin typeface="Yu Gothic" pitchFamily="34" charset="0"/>
+                <a:ea typeface="Yu Gothic" pitchFamily="34" charset="-122"/>
+                <a:cs typeface="Yu Gothic" pitchFamily="34" charset="-120"/>
+              </a:rPr>
+              <a:t>・夜間・休日・長期戦で、その人が倒れる</a:t>
+            </a:r>
+            <a:endParaRPr lang="en-US" sz="1400" dirty="0"/>
+          </a:p>
+          <a:p>
+            <a:pPr indent="0" marL="0">
+              <a:lnSpc>
+                <a:spcPct val="115000"/>
+              </a:lnSpc>
+              <a:buNone/>
+            </a:pPr>
+            <a:r>
+              <a:rPr lang="en-US" sz="1400" dirty="0">
+                <a:solidFill>
+                  <a:srgbClr val="16211F"/>
+                </a:solidFill>
+                <a:latin typeface="Yu Gothic" pitchFamily="34" charset="0"/>
+                <a:ea typeface="Yu Gothic" pitchFamily="34" charset="-122"/>
+                <a:cs typeface="Yu Gothic" pitchFamily="34" charset="-120"/>
+              </a:rPr>
+              <a:t>・判断の根拠が頭の中にあり、記録に残らない</a:t>
+            </a:r>
+            <a:endParaRPr lang="en-US" sz="1400" dirty="0"/>
+          </a:p>
+        </p:txBody>
+      </p:sp>
+      <p:sp>
+        <p:nvSpPr>
+          <p:cNvPr id="11" name="Shape 9"/>
+          <p:cNvSpPr/>
+          <p:nvPr/>
+        </p:nvSpPr>
+        <p:spPr>
+          <a:xfrm>
+            <a:off x="6233008" y="1508760"/>
+            <a:ext cx="5318608" cy="3246120"/>
+          </a:xfrm>
+          <a:prstGeom prst="roundRect">
+            <a:avLst>
+              <a:gd name="adj" fmla="val 1408"/>
+            </a:avLst>
+          </a:prstGeom>
+          <a:solidFill>
+            <a:srgbClr val="2E7D6B"/>
+          </a:solidFill>
+          <a:ln w="9525">
+            <a:solidFill>
+              <a:srgbClr val="2E7D6B"/>
+            </a:solidFill>
+            <a:prstDash val="solid"/>
+          </a:ln>
+        </p:spPr>
+      </p:sp>
+      <p:sp>
+        <p:nvSpPr>
+          <p:cNvPr id="12" name="Text 10"/>
+          <p:cNvSpPr/>
+          <p:nvPr/>
+        </p:nvSpPr>
+        <p:spPr>
+          <a:xfrm>
+            <a:off x="6415888" y="1655064"/>
+            <a:ext cx="4952848" cy="411480"/>
+          </a:xfrm>
+          <a:prstGeom prst="rect">
+            <a:avLst/>
+          </a:prstGeom>
+          <a:noFill/>
+          <a:ln/>
+        </p:spPr>
+        <p:txBody>
+          <a:bodyPr wrap="square" lIns="0" tIns="0" rIns="0" bIns="0" rtlCol="0" anchor="t"/>
+          <a:lstStyle/>
+          <a:p>
+            <a:pPr indent="0" marL="0">
+              <a:buNone/>
+            </a:pPr>
+            <a:r>
+              <a:rPr lang="en-US" sz="1600" b="1" dirty="0">
+                <a:solidFill>
+                  <a:srgbClr val="FFFFFF"/>
+                </a:solidFill>
+                <a:latin typeface="Yu Gothic" pitchFamily="34" charset="0"/>
+                <a:ea typeface="Yu Gothic" pitchFamily="34" charset="-122"/>
+                <a:cs typeface="Yu Gothic" pitchFamily="34" charset="-120"/>
+              </a:rPr>
+              <a:t>規模の小さい組織ではさらに</a:t>
+            </a:r>
+            <a:endParaRPr lang="en-US" sz="1600" dirty="0"/>
+          </a:p>
+        </p:txBody>
+      </p:sp>
+      <p:sp>
+        <p:nvSpPr>
+          <p:cNvPr id="13" name="Text 11"/>
+          <p:cNvSpPr/>
+          <p:nvPr/>
+        </p:nvSpPr>
+        <p:spPr>
+          <a:xfrm>
+            <a:off x="6415888" y="2157984"/>
+            <a:ext cx="4952848" cy="2487168"/>
+          </a:xfrm>
+          <a:prstGeom prst="rect">
+            <a:avLst/>
+          </a:prstGeom>
+          <a:noFill/>
+          <a:ln/>
+        </p:spPr>
+        <p:txBody>
+          <a:bodyPr wrap="square" lIns="0" tIns="0" rIns="0" bIns="0" rtlCol="0" anchor="t"/>
+          <a:lstStyle/>
+          <a:p>
+            <a:pPr indent="0" marL="0">
+              <a:lnSpc>
+                <a:spcPct val="115000"/>
+              </a:lnSpc>
+              <a:buNone/>
+            </a:pPr>
+            <a:r>
+              <a:rPr lang="en-US" sz="1400" dirty="0">
+                <a:solidFill>
+                  <a:srgbClr val="E8F0EC"/>
+                </a:solidFill>
+                <a:latin typeface="Yu Gothic" pitchFamily="34" charset="0"/>
+                <a:ea typeface="Yu Gothic" pitchFamily="34" charset="-122"/>
+                <a:cs typeface="Yu Gothic" pitchFamily="34" charset="-120"/>
+              </a:rPr>
+              <a:t>・情シスが1人、または兼務</a:t>
+            </a:r>
+            <a:endParaRPr lang="en-US" sz="1400" dirty="0"/>
+          </a:p>
+          <a:p>
+            <a:pPr indent="0" marL="0">
+              <a:lnSpc>
+                <a:spcPct val="115000"/>
+              </a:lnSpc>
+              <a:buNone/>
+            </a:pPr>
+            <a:r>
+              <a:rPr lang="en-US" sz="1400" dirty="0">
+                <a:solidFill>
+                  <a:srgbClr val="E8F0EC"/>
+                </a:solidFill>
+                <a:latin typeface="Yu Gothic" pitchFamily="34" charset="0"/>
+                <a:ea typeface="Yu Gothic" pitchFamily="34" charset="-122"/>
+                <a:cs typeface="Yu Gothic" pitchFamily="34" charset="-120"/>
+              </a:rPr>
+              <a:t>・経営層が「ITの問題」と捉えている</a:t>
+            </a:r>
+            <a:endParaRPr lang="en-US" sz="1400" dirty="0"/>
+          </a:p>
+          <a:p>
+            <a:pPr indent="0" marL="0">
+              <a:lnSpc>
+                <a:spcPct val="115000"/>
+              </a:lnSpc>
+              <a:buNone/>
+            </a:pPr>
+            <a:r>
+              <a:rPr lang="en-US" sz="1400" dirty="0">
+                <a:solidFill>
+                  <a:srgbClr val="E8F0EC"/>
+                </a:solidFill>
+                <a:latin typeface="Yu Gothic" pitchFamily="34" charset="0"/>
+                <a:ea typeface="Yu Gothic" pitchFamily="34" charset="-122"/>
+                <a:cs typeface="Yu Gothic" pitchFamily="34" charset="-120"/>
+              </a:rPr>
+              <a:t>・反対意見を言ってくれる同僚がいない</a:t>
+            </a:r>
+            <a:endParaRPr lang="en-US" sz="1400" dirty="0"/>
+          </a:p>
+          <a:p>
+            <a:pPr indent="0" marL="0">
+              <a:lnSpc>
+                <a:spcPct val="115000"/>
+              </a:lnSpc>
+              <a:buNone/>
+            </a:pPr>
+            <a:r>
+              <a:rPr lang="en-US" sz="1400" dirty="0">
+                <a:solidFill>
+                  <a:srgbClr val="E8F0EC"/>
+                </a:solidFill>
+                <a:latin typeface="Yu Gothic" pitchFamily="34" charset="0"/>
+                <a:ea typeface="Yu Gothic" pitchFamily="34" charset="-122"/>
+                <a:cs typeface="Yu Gothic" pitchFamily="34" charset="-120"/>
+              </a:rPr>
+              <a:t>・頼る先を、事故が起きてから探す</a:t>
+            </a:r>
+            <a:endParaRPr lang="en-US" sz="1400" dirty="0"/>
+          </a:p>
+        </p:txBody>
+      </p:sp>
+      <p:sp>
+        <p:nvSpPr>
+          <p:cNvPr id="14" name="Shape 12"/>
+          <p:cNvSpPr/>
+          <p:nvPr/>
+        </p:nvSpPr>
+        <p:spPr>
+          <a:xfrm>
+            <a:off x="640080" y="4983480"/>
+            <a:ext cx="10911535" cy="658368"/>
+          </a:xfrm>
+          <a:prstGeom prst="rect">
+            <a:avLst/>
+          </a:prstGeom>
+          <a:solidFill>
+            <a:srgbClr val="F6EBD8"/>
+          </a:solidFill>
+          <a:ln/>
+        </p:spPr>
+      </p:sp>
+      <p:sp>
+        <p:nvSpPr>
+          <p:cNvPr id="15" name="Shape 13"/>
+          <p:cNvSpPr/>
+          <p:nvPr/>
+        </p:nvSpPr>
+        <p:spPr>
+          <a:xfrm>
+            <a:off x="640080" y="4983480"/>
+            <a:ext cx="73152" cy="658368"/>
+          </a:xfrm>
+          <a:prstGeom prst="rect">
+            <a:avLst/>
+          </a:prstGeom>
+          <a:solidFill>
+            <a:srgbClr val="C9821A"/>
+          </a:solidFill>
+          <a:ln/>
+        </p:spPr>
+      </p:sp>
+      <p:sp>
+        <p:nvSpPr>
+          <p:cNvPr id="16" name="Text 14"/>
+          <p:cNvSpPr/>
+          <p:nvPr/>
+        </p:nvSpPr>
+        <p:spPr>
+          <a:xfrm>
+            <a:off x="914400" y="5056632"/>
+            <a:ext cx="10454335" cy="512064"/>
+          </a:xfrm>
+          <a:prstGeom prst="rect">
+            <a:avLst/>
+          </a:prstGeom>
+          <a:noFill/>
+          <a:ln/>
+        </p:spPr>
+        <p:txBody>
+          <a:bodyPr wrap="square" lIns="0" tIns="0" rIns="0" bIns="0" rtlCol="0" anchor="ctr"/>
+          <a:lstStyle/>
+          <a:p>
+            <a:pPr indent="0" marL="0">
+              <a:buNone/>
+            </a:pPr>
+            <a:r>
+              <a:rPr lang="en-US" sz="1400" b="1" dirty="0">
+                <a:solidFill>
+                  <a:srgbClr val="16211F"/>
+                </a:solidFill>
+                <a:latin typeface="Yu Gothic" pitchFamily="34" charset="0"/>
+                <a:ea typeface="Yu Gothic" pitchFamily="34" charset="-122"/>
+                <a:cs typeface="Yu Gothic" pitchFamily="34" charset="-120"/>
+              </a:rPr>
+              <a:t>人を増やすのは難しい。変えられるのは、判断を人から仕組みへ移すことです。</a:t>
+            </a:r>
+            <a:endParaRPr lang="en-US" sz="1400" dirty="0"/>
+          </a:p>
+        </p:txBody>
+      </p:sp>
+    </p:spTree>
+  </p:cSld>
+  <p:clrMapOvr>
+    <a:masterClrMapping/>
+  </p:clrMapOvr>
+</p:sld>
+</file>
+
+<file path=ppt/slides/slide16.xml><?xml version="1.0" encoding="utf-8"?>
+<p:sld xmlns:a="http://schemas.openxmlformats.org/drawingml/2006/main" xmlns:r="http://schemas.openxmlformats.org/officeDocument/2006/relationships" xmlns:p="http://schemas.openxmlformats.org/presentationml/2006/main">
+  <p:cSld name="Slide 16">
+    <p:bg>
+      <p:bgPr>
+        <a:solidFill>
+          <a:srgbClr val="FFFFFF"/>
+        </a:solidFill>
+      </p:bgPr>
+    </p:bg>
+    <p:spTree>
+      <p:nvGrpSpPr>
+        <p:cNvPr id="1" name=""/>
+        <p:cNvGrpSpPr/>
+        <p:nvPr/>
+      </p:nvGrpSpPr>
+      <p:grpSpPr>
+        <a:xfrm>
+          <a:off x="0" y="0"/>
+          <a:ext cx="0" cy="0"/>
+          <a:chOff x="0" y="0"/>
+          <a:chExt cx="0" cy="0"/>
+        </a:xfrm>
+      </p:grpSpPr>
+      <p:sp>
+        <p:nvSpPr>
+          <p:cNvPr id="2" name="Shape 0"/>
+          <p:cNvSpPr/>
+          <p:nvPr/>
+        </p:nvSpPr>
+        <p:spPr>
+          <a:xfrm>
+            <a:off x="0" y="0"/>
+            <a:ext cx="128016" cy="6858000"/>
+          </a:xfrm>
+          <a:prstGeom prst="rect">
+            <a:avLst/>
+          </a:prstGeom>
+          <a:solidFill>
+            <a:srgbClr val="2E7D6B"/>
+          </a:solidFill>
+          <a:ln/>
+        </p:spPr>
+      </p:sp>
+      <p:sp>
+        <p:nvSpPr>
+          <p:cNvPr id="3" name="Text 1"/>
+          <p:cNvSpPr/>
+          <p:nvPr/>
+        </p:nvSpPr>
+        <p:spPr>
+          <a:xfrm>
+            <a:off x="640080" y="292608"/>
+            <a:ext cx="7772400" cy="274320"/>
+          </a:xfrm>
+          <a:prstGeom prst="rect">
+            <a:avLst/>
+          </a:prstGeom>
+          <a:noFill/>
+          <a:ln/>
+        </p:spPr>
+        <p:txBody>
+          <a:bodyPr wrap="square" lIns="0" tIns="0" rIns="0" bIns="0" rtlCol="0" anchor="ctr"/>
+          <a:lstStyle/>
+          <a:p>
+            <a:pPr indent="0" marL="0">
+              <a:buNone/>
+            </a:pPr>
+            <a:r>
+              <a:rPr lang="en-US" sz="1200" b="1" dirty="0">
+                <a:solidFill>
+                  <a:srgbClr val="2E7D6B"/>
+                </a:solidFill>
+                <a:latin typeface="Yu Gothic" pitchFamily="34" charset="0"/>
+                <a:ea typeface="Yu Gothic" pitchFamily="34" charset="-122"/>
+                <a:cs typeface="Yu Gothic" pitchFamily="34" charset="-120"/>
+              </a:rPr>
+              <a:t>第3部　一歩③　任せ方を書く</a:t>
+            </a:r>
+            <a:endParaRPr lang="en-US" sz="1200" dirty="0"/>
+          </a:p>
+        </p:txBody>
+      </p:sp>
+      <p:sp>
+        <p:nvSpPr>
+          <p:cNvPr id="4" name="Text 2"/>
+          <p:cNvSpPr/>
+          <p:nvPr/>
+        </p:nvSpPr>
+        <p:spPr>
+          <a:xfrm>
+            <a:off x="9722815" y="292608"/>
+            <a:ext cx="1828800" cy="274320"/>
+          </a:xfrm>
+          <a:prstGeom prst="rect">
+            <a:avLst/>
+          </a:prstGeom>
+          <a:noFill/>
+          <a:ln/>
+        </p:spPr>
+        <p:txBody>
+          <a:bodyPr wrap="square" lIns="0" tIns="0" rIns="0" bIns="0" rtlCol="0" anchor="ctr"/>
+          <a:lstStyle/>
+          <a:p>
+            <a:pPr algn="r" indent="0" marL="0">
+              <a:buNone/>
+            </a:pPr>
+            <a:r>
+              <a:rPr lang="en-US" sz="1100" dirty="0">
+                <a:solidFill>
+                  <a:srgbClr val="5E6E6A"/>
+                </a:solidFill>
+                <a:latin typeface="Yu Gothic" pitchFamily="34" charset="0"/>
+                <a:ea typeface="Yu Gothic" pitchFamily="34" charset="-122"/>
+                <a:cs typeface="Yu Gothic" pitchFamily="34" charset="-120"/>
+              </a:rPr>
+              <a:t>5分</a:t>
+            </a:r>
+            <a:endParaRPr lang="en-US" sz="1100" dirty="0"/>
+          </a:p>
+        </p:txBody>
+      </p:sp>
+      <p:sp>
+        <p:nvSpPr>
+          <p:cNvPr id="5" name="Text 3"/>
+          <p:cNvSpPr/>
+          <p:nvPr/>
+        </p:nvSpPr>
+        <p:spPr>
+          <a:xfrm>
+            <a:off x="640080" y="621792"/>
+            <a:ext cx="10911535" cy="685800"/>
+          </a:xfrm>
+          <a:prstGeom prst="rect">
+            <a:avLst/>
+          </a:prstGeom>
+          <a:noFill/>
+          <a:ln/>
+        </p:spPr>
+        <p:txBody>
+          <a:bodyPr wrap="square" lIns="0" tIns="0" rIns="0" bIns="0" rtlCol="0" anchor="t"/>
+          <a:lstStyle/>
+          <a:p>
+            <a:pPr indent="0" marL="0">
+              <a:buNone/>
+            </a:pPr>
+            <a:r>
+              <a:rPr lang="en-US" sz="2600" b="1" dirty="0">
+                <a:solidFill>
+                  <a:srgbClr val="16211F"/>
+                </a:solidFill>
+                <a:latin typeface="Yu Gothic" pitchFamily="34" charset="0"/>
+                <a:ea typeface="Yu Gothic" pitchFamily="34" charset="-122"/>
+                <a:cs typeface="Yu Gothic" pitchFamily="34" charset="-120"/>
+              </a:rPr>
+              <a:t>AIへの任せ方は、3つの問いで3段階に分けておきます</a:t>
+            </a:r>
+            <a:endParaRPr lang="en-US" sz="2600" dirty="0"/>
+          </a:p>
+        </p:txBody>
+      </p:sp>
+      <p:sp>
+        <p:nvSpPr>
+          <p:cNvPr id="6" name="Text 4"/>
+          <p:cNvSpPr/>
+          <p:nvPr/>
+        </p:nvSpPr>
+        <p:spPr>
+          <a:xfrm>
+            <a:off x="10180015" y="6446520"/>
+            <a:ext cx="1371600" cy="228600"/>
+          </a:xfrm>
+          <a:prstGeom prst="rect">
+            <a:avLst/>
+          </a:prstGeom>
+          <a:noFill/>
+          <a:ln/>
+        </p:spPr>
+        <p:txBody>
+          <a:bodyPr wrap="square" lIns="0" tIns="0" rIns="0" bIns="0" rtlCol="0" anchor="ctr"/>
+          <a:lstStyle/>
+          <a:p>
+            <a:pPr algn="r" indent="0" marL="0">
+              <a:buNone/>
+            </a:pPr>
+            <a:r>
+              <a:rPr lang="en-US" sz="900" dirty="0">
+                <a:solidFill>
+                  <a:srgbClr val="5E6E6A"/>
+                </a:solidFill>
+                <a:latin typeface="Yu Gothic" pitchFamily="34" charset="0"/>
+                <a:ea typeface="Yu Gothic" pitchFamily="34" charset="-122"/>
+                <a:cs typeface="Yu Gothic" pitchFamily="34" charset="-120"/>
+              </a:rPr>
+              <a:t>16 / 24</a:t>
+            </a:r>
+            <a:endParaRPr lang="en-US" sz="900" dirty="0"/>
+          </a:p>
+        </p:txBody>
+      </p:sp>
+      <p:sp>
+        <p:nvSpPr>
+          <p:cNvPr id="7" name="Text 5"/>
+          <p:cNvSpPr/>
+          <p:nvPr/>
+        </p:nvSpPr>
+        <p:spPr>
+          <a:xfrm>
+            <a:off x="640080" y="6446520"/>
+            <a:ext cx="6400800" cy="228600"/>
+          </a:xfrm>
+          <a:prstGeom prst="rect">
+            <a:avLst/>
+          </a:prstGeom>
+          <a:noFill/>
+          <a:ln/>
+        </p:spPr>
+        <p:txBody>
+          <a:bodyPr wrap="square" lIns="0" tIns="0" rIns="0" bIns="0" rtlCol="0" anchor="ctr"/>
+          <a:lstStyle/>
+          <a:p>
+            <a:pPr indent="0" marL="0">
+              <a:buNone/>
+            </a:pPr>
+            <a:r>
+              <a:rPr lang="en-US" sz="900" dirty="0">
+                <a:solidFill>
+                  <a:srgbClr val="9FB2AD"/>
+                </a:solidFill>
+                <a:latin typeface="Yu Gothic" pitchFamily="34" charset="0"/>
+                <a:ea typeface="Yu Gothic" pitchFamily="34" charset="-122"/>
+                <a:cs typeface="Yu Gothic" pitchFamily="34" charset="-120"/>
+              </a:rPr>
+              <a:t>Security Days Fall 2026 Fukuoka　FB-05　小出 洋（九州大学）</a:t>
+            </a:r>
+            <a:endParaRPr lang="en-US" sz="900" dirty="0"/>
+          </a:p>
+        </p:txBody>
+      </p:sp>
       <p:graphicFrame>
         <p:nvGraphicFramePr>
-          <p:cNvPr id="12" name="Table 0"/>
+          <p:cNvPr id="17" name="Table 0"/>
           <p:cNvGraphicFramePr>
             <a:graphicFrameLocks noGrp="1"/>
           </p:cNvGraphicFramePr>
@@ -5491,7 +8547,7 @@
                           <a:ea typeface="Yu Gothic" pitchFamily="34" charset="-122"/>
                           <a:cs typeface="Yu Gothic" pitchFamily="34" charset="-120"/>
                         </a:rPr>
-                        <a:t>全面停止、公表、身代金</a:t>
+                        <a:t>リリース延期、公表、身代金</a:t>
                       </a:r>
                       <a:endParaRPr lang="en-US" sz="1300" dirty="0">
                         <a:latin typeface="Yu Gothic" charset="0"/>
@@ -5620,7 +8676,7 @@
                 <a:ea typeface="Yu Gothic" pitchFamily="34" charset="-122"/>
                 <a:cs typeface="Yu Gothic" pitchFamily="34" charset="-120"/>
               </a:rPr>
-              <a:t>3つのうち1つでも右に寄れば、右の段階に置きます。これを事故の前に決めて、書いておきます。</a:t>
+              <a:t>3つのうち1つでも右に寄れば、右の段階に置きます。AIエージェントのリスクは「賢さ」より「権限」にあります。</a:t>
             </a:r>
             <a:endParaRPr lang="en-US" sz="1400" dirty="0"/>
           </a:p>
@@ -5634,9 +8690,9 @@
 </p:sld>
 </file>
 
-<file path=ppt/slides/slide12.xml><?xml version="1.0" encoding="utf-8"?>
+<file path=ppt/slides/slide17.xml><?xml version="1.0" encoding="utf-8"?>
 <p:sld xmlns:a="http://schemas.openxmlformats.org/drawingml/2006/main" xmlns:r="http://schemas.openxmlformats.org/officeDocument/2006/relationships" xmlns:p="http://schemas.openxmlformats.org/presentationml/2006/main">
-  <p:cSld name="Slide 12">
+  <p:cSld name="Slide 17">
     <p:bg>
       <p:bgPr>
         <a:solidFill>
@@ -5711,7 +8767,7 @@
                 <a:ea typeface="Yu Gothic" pitchFamily="34" charset="-122"/>
                 <a:cs typeface="Yu Gothic" pitchFamily="34" charset="-120"/>
               </a:rPr>
-              <a:t>第2部　一歩②　暫定判断</a:t>
+              <a:t>第3部　一歩③　判断カード</a:t>
             </a:r>
             <a:endParaRPr lang="en-US" sz="1200" dirty="0"/>
           </a:p>
@@ -5750,7 +8806,7 @@
                 <a:ea typeface="Yu Gothic" pitchFamily="34" charset="-122"/>
                 <a:cs typeface="Yu Gothic" pitchFamily="34" charset="-120"/>
               </a:rPr>
-              <a:t>8分</a:t>
+              <a:t>5分</a:t>
             </a:r>
             <a:endParaRPr lang="en-US" sz="1100" dirty="0"/>
           </a:p>
@@ -5789,7 +8845,7 @@
                 <a:ea typeface="Yu Gothic" pitchFamily="34" charset="-122"/>
                 <a:cs typeface="Yu Gothic" pitchFamily="34" charset="-120"/>
               </a:rPr>
-              <a:t>判断を遅らせすぎず、AIを過信しない ― 暫定判断</a:t>
+              <a:t>5つの判断を、1枚ずつ「判断カード」にしておきます</a:t>
             </a:r>
             <a:endParaRPr lang="en-US" sz="2600" dirty="0"/>
           </a:p>
@@ -5828,7 +8884,7 @@
                 <a:ea typeface="Yu Gothic" pitchFamily="34" charset="-122"/>
                 <a:cs typeface="Yu Gothic" pitchFamily="34" charset="-120"/>
               </a:rPr>
-              <a:t>12 / 24</a:t>
+              <a:t>17 / 24</a:t>
             </a:r>
             <a:endParaRPr lang="en-US" sz="900" dirty="0"/>
           </a:p>
@@ -5873,2110 +8929,9 @@
           </a:p>
         </p:txBody>
       </p:sp>
-      <p:sp>
-        <p:nvSpPr>
-          <p:cNvPr id="8" name="Shape 6"/>
-          <p:cNvSpPr/>
-          <p:nvPr/>
-        </p:nvSpPr>
-        <p:spPr>
-          <a:xfrm>
-            <a:off x="640080" y="1508760"/>
-            <a:ext cx="5318608" cy="3246120"/>
-          </a:xfrm>
-          <a:prstGeom prst="roundRect">
-            <a:avLst>
-              <a:gd name="adj" fmla="val 1408"/>
-            </a:avLst>
-          </a:prstGeom>
-          <a:solidFill>
-            <a:srgbClr val="EDF3F1"/>
-          </a:solidFill>
-          <a:ln w="9525">
-            <a:solidFill>
-              <a:srgbClr val="C9D5D1"/>
-            </a:solidFill>
-            <a:prstDash val="solid"/>
-          </a:ln>
-        </p:spPr>
-      </p:sp>
-      <p:sp>
-        <p:nvSpPr>
-          <p:cNvPr id="9" name="Text 7"/>
-          <p:cNvSpPr/>
-          <p:nvPr/>
-        </p:nvSpPr>
-        <p:spPr>
-          <a:xfrm>
-            <a:off x="822960" y="1655064"/>
-            <a:ext cx="4952848" cy="411480"/>
-          </a:xfrm>
-          <a:prstGeom prst="rect">
-            <a:avLst/>
-          </a:prstGeom>
-          <a:noFill/>
-          <a:ln/>
-        </p:spPr>
-        <p:txBody>
-          <a:bodyPr wrap="square" lIns="0" tIns="0" rIns="0" bIns="0" rtlCol="0" anchor="t"/>
-          <a:lstStyle/>
-          <a:p>
-            <a:pPr indent="0" marL="0">
-              <a:buNone/>
-            </a:pPr>
-            <a:r>
-              <a:rPr lang="en-US" sz="1600" b="1" dirty="0">
-                <a:solidFill>
-                  <a:srgbClr val="2E7D6B"/>
-                </a:solidFill>
-                <a:latin typeface="Yu Gothic" pitchFamily="34" charset="0"/>
-                <a:ea typeface="Yu Gothic" pitchFamily="34" charset="-122"/>
-                <a:cs typeface="Yu Gothic" pitchFamily="34" charset="-120"/>
-              </a:rPr>
-              <a:t>不確実なときの2つの失敗</a:t>
-            </a:r>
-            <a:endParaRPr lang="en-US" sz="1600" dirty="0"/>
-          </a:p>
-        </p:txBody>
-      </p:sp>
-      <p:sp>
-        <p:nvSpPr>
-          <p:cNvPr id="10" name="Text 8"/>
-          <p:cNvSpPr/>
-          <p:nvPr/>
-        </p:nvSpPr>
-        <p:spPr>
-          <a:xfrm>
-            <a:off x="822960" y="2157984"/>
-            <a:ext cx="4952848" cy="2487168"/>
-          </a:xfrm>
-          <a:prstGeom prst="rect">
-            <a:avLst/>
-          </a:prstGeom>
-          <a:noFill/>
-          <a:ln/>
-        </p:spPr>
-        <p:txBody>
-          <a:bodyPr wrap="square" lIns="0" tIns="0" rIns="0" bIns="0" rtlCol="0" anchor="t"/>
-          <a:lstStyle/>
-          <a:p>
-            <a:pPr indent="0" marL="0">
-              <a:lnSpc>
-                <a:spcPct val="115000"/>
-              </a:lnSpc>
-              <a:buNone/>
-            </a:pPr>
-            <a:r>
-              <a:rPr lang="en-US" sz="1400" dirty="0">
-                <a:solidFill>
-                  <a:srgbClr val="16211F"/>
-                </a:solidFill>
-                <a:latin typeface="Yu Gothic" pitchFamily="34" charset="0"/>
-                <a:ea typeface="Yu Gothic" pitchFamily="34" charset="-122"/>
-                <a:cs typeface="Yu Gothic" pitchFamily="34" charset="-120"/>
-              </a:rPr>
-              <a:t>過信：AIのもっともらしい要約をそのまま採用し、誤った範囲を止める</a:t>
-            </a:r>
-            <a:endParaRPr lang="en-US" sz="1400" dirty="0"/>
-          </a:p>
-          <a:p>
-            <a:pPr indent="0" marL="0">
-              <a:lnSpc>
-                <a:spcPct val="115000"/>
-              </a:lnSpc>
-              <a:buNone/>
-            </a:pPr>
-            <a:endParaRPr lang="en-US" sz="1400" dirty="0"/>
-          </a:p>
-          <a:p>
-            <a:pPr indent="0" marL="0">
-              <a:lnSpc>
-                <a:spcPct val="115000"/>
-              </a:lnSpc>
-              <a:buNone/>
-            </a:pPr>
-            <a:r>
-              <a:rPr lang="en-US" sz="1400" dirty="0">
-                <a:solidFill>
-                  <a:srgbClr val="16211F"/>
-                </a:solidFill>
-                <a:latin typeface="Yu Gothic" pitchFamily="34" charset="0"/>
-                <a:ea typeface="Yu Gothic" pitchFamily="34" charset="-122"/>
-                <a:cs typeface="Yu Gothic" pitchFamily="34" charset="-120"/>
-              </a:rPr>
-              <a:t>先送り：情報がそろうまで決めない。その間に被害と問い合わせが広がる</a:t>
-            </a:r>
-            <a:endParaRPr lang="en-US" sz="1400" dirty="0"/>
-          </a:p>
-          <a:p>
-            <a:pPr indent="0" marL="0">
-              <a:lnSpc>
-                <a:spcPct val="115000"/>
-              </a:lnSpc>
-              <a:buNone/>
-            </a:pPr>
-            <a:r>
-              <a:rPr lang="en-US" sz="1400" dirty="0">
-                <a:solidFill>
-                  <a:srgbClr val="16211F"/>
-                </a:solidFill>
-                <a:latin typeface="Yu Gothic" pitchFamily="34" charset="0"/>
-                <a:ea typeface="Yu Gothic" pitchFamily="34" charset="-122"/>
-                <a:cs typeface="Yu Gothic" pitchFamily="34" charset="-120"/>
-              </a:rPr>
-              <a:t>（AIの出力を一律に信じない「過剰な拒否」もこちら）</a:t>
-            </a:r>
-            <a:endParaRPr lang="en-US" sz="1400" dirty="0"/>
-          </a:p>
-        </p:txBody>
-      </p:sp>
-      <p:sp>
-        <p:nvSpPr>
-          <p:cNvPr id="11" name="Shape 9"/>
-          <p:cNvSpPr/>
-          <p:nvPr/>
-        </p:nvSpPr>
-        <p:spPr>
-          <a:xfrm>
-            <a:off x="6233008" y="1508760"/>
-            <a:ext cx="5318608" cy="3246120"/>
-          </a:xfrm>
-          <a:prstGeom prst="roundRect">
-            <a:avLst>
-              <a:gd name="adj" fmla="val 1408"/>
-            </a:avLst>
-          </a:prstGeom>
-          <a:solidFill>
-            <a:srgbClr val="2E7D6B"/>
-          </a:solidFill>
-          <a:ln w="9525">
-            <a:solidFill>
-              <a:srgbClr val="2E7D6B"/>
-            </a:solidFill>
-            <a:prstDash val="solid"/>
-          </a:ln>
-        </p:spPr>
-      </p:sp>
-      <p:sp>
-        <p:nvSpPr>
-          <p:cNvPr id="12" name="Text 10"/>
-          <p:cNvSpPr/>
-          <p:nvPr/>
-        </p:nvSpPr>
-        <p:spPr>
-          <a:xfrm>
-            <a:off x="6415888" y="1655064"/>
-            <a:ext cx="4952848" cy="411480"/>
-          </a:xfrm>
-          <a:prstGeom prst="rect">
-            <a:avLst/>
-          </a:prstGeom>
-          <a:noFill/>
-          <a:ln/>
-        </p:spPr>
-        <p:txBody>
-          <a:bodyPr wrap="square" lIns="0" tIns="0" rIns="0" bIns="0" rtlCol="0" anchor="t"/>
-          <a:lstStyle/>
-          <a:p>
-            <a:pPr indent="0" marL="0">
-              <a:buNone/>
-            </a:pPr>
-            <a:r>
-              <a:rPr lang="en-US" sz="1600" b="1" dirty="0">
-                <a:solidFill>
-                  <a:srgbClr val="FFFFFF"/>
-                </a:solidFill>
-                <a:latin typeface="Yu Gothic" pitchFamily="34" charset="0"/>
-                <a:ea typeface="Yu Gothic" pitchFamily="34" charset="-122"/>
-                <a:cs typeface="Yu Gothic" pitchFamily="34" charset="-120"/>
-              </a:rPr>
-              <a:t>暫定で決め、見直す時刻を決める</a:t>
-            </a:r>
-            <a:endParaRPr lang="en-US" sz="1600" dirty="0"/>
-          </a:p>
-        </p:txBody>
-      </p:sp>
-      <p:sp>
-        <p:nvSpPr>
-          <p:cNvPr id="13" name="Text 11"/>
-          <p:cNvSpPr/>
-          <p:nvPr/>
-        </p:nvSpPr>
-        <p:spPr>
-          <a:xfrm>
-            <a:off x="6415888" y="2157984"/>
-            <a:ext cx="4952848" cy="2487168"/>
-          </a:xfrm>
-          <a:prstGeom prst="rect">
-            <a:avLst/>
-          </a:prstGeom>
-          <a:noFill/>
-          <a:ln/>
-        </p:spPr>
-        <p:txBody>
-          <a:bodyPr wrap="square" lIns="0" tIns="0" rIns="0" bIns="0" rtlCol="0" anchor="t"/>
-          <a:lstStyle/>
-          <a:p>
-            <a:pPr indent="0" marL="0">
-              <a:lnSpc>
-                <a:spcPct val="115000"/>
-              </a:lnSpc>
-              <a:buNone/>
-            </a:pPr>
-            <a:r>
-              <a:rPr lang="en-US" sz="1400" dirty="0">
-                <a:solidFill>
-                  <a:srgbClr val="E8F0EC"/>
-                </a:solidFill>
-                <a:latin typeface="Yu Gothic" pitchFamily="34" charset="0"/>
-                <a:ea typeface="Yu Gothic" pitchFamily="34" charset="-122"/>
-                <a:cs typeface="Yu Gothic" pitchFamily="34" charset="-120"/>
-              </a:rPr>
-              <a:t>「今ある材料では、こう決める」</a:t>
-            </a:r>
-            <a:endParaRPr lang="en-US" sz="1400" dirty="0"/>
-          </a:p>
-          <a:p>
-            <a:pPr indent="0" marL="0">
-              <a:lnSpc>
-                <a:spcPct val="115000"/>
-              </a:lnSpc>
-              <a:buNone/>
-            </a:pPr>
-            <a:r>
-              <a:rPr lang="en-US" sz="1400" dirty="0">
-                <a:solidFill>
-                  <a:srgbClr val="E8F0EC"/>
-                </a:solidFill>
-                <a:latin typeface="Yu Gothic" pitchFamily="34" charset="0"/>
-                <a:ea typeface="Yu Gothic" pitchFamily="34" charset="-122"/>
-                <a:cs typeface="Yu Gothic" pitchFamily="34" charset="-120"/>
-              </a:rPr>
-              <a:t>「○時に、この材料を見て見直す」</a:t>
-            </a:r>
-            <a:endParaRPr lang="en-US" sz="1400" dirty="0"/>
-          </a:p>
-          <a:p>
-            <a:pPr indent="0" marL="0">
-              <a:lnSpc>
-                <a:spcPct val="115000"/>
-              </a:lnSpc>
-              <a:buNone/>
-            </a:pPr>
-            <a:r>
-              <a:rPr lang="en-US" sz="1400" dirty="0">
-                <a:solidFill>
-                  <a:srgbClr val="E8F0EC"/>
-                </a:solidFill>
-                <a:latin typeface="Yu Gothic" pitchFamily="34" charset="0"/>
-                <a:ea typeface="Yu Gothic" pitchFamily="34" charset="-122"/>
-                <a:cs typeface="Yu Gothic" pitchFamily="34" charset="-120"/>
-              </a:rPr>
-              <a:t>「見直しで覆す条件はこれ」</a:t>
-            </a:r>
-            <a:endParaRPr lang="en-US" sz="1400" dirty="0"/>
-          </a:p>
-          <a:p>
-            <a:pPr indent="0" marL="0">
-              <a:lnSpc>
-                <a:spcPct val="115000"/>
-              </a:lnSpc>
-              <a:buNone/>
-            </a:pPr>
-            <a:endParaRPr lang="en-US" sz="1400" dirty="0"/>
-          </a:p>
-          <a:p>
-            <a:pPr indent="0" marL="0">
-              <a:lnSpc>
-                <a:spcPct val="115000"/>
-              </a:lnSpc>
-              <a:buNone/>
-            </a:pPr>
-            <a:r>
-              <a:rPr lang="en-US" sz="1400" dirty="0">
-                <a:solidFill>
-                  <a:srgbClr val="E8F0EC"/>
-                </a:solidFill>
-                <a:latin typeface="Yu Gothic" pitchFamily="34" charset="0"/>
-                <a:ea typeface="Yu Gothic" pitchFamily="34" charset="-122"/>
-                <a:cs typeface="Yu Gothic" pitchFamily="34" charset="-120"/>
-              </a:rPr>
-              <a:t>の3点を、決めた人の名前と時刻とともに記録します。決めないことも、理由と時刻を残せば判断です。</a:t>
-            </a:r>
-            <a:endParaRPr lang="en-US" sz="1400" dirty="0"/>
-          </a:p>
-        </p:txBody>
-      </p:sp>
-      <p:sp>
-        <p:nvSpPr>
-          <p:cNvPr id="14" name="Shape 12"/>
-          <p:cNvSpPr/>
-          <p:nvPr/>
-        </p:nvSpPr>
-        <p:spPr>
-          <a:xfrm>
-            <a:off x="640080" y="4983480"/>
-            <a:ext cx="10911535" cy="658368"/>
-          </a:xfrm>
-          <a:prstGeom prst="rect">
-            <a:avLst/>
-          </a:prstGeom>
-          <a:solidFill>
-            <a:srgbClr val="F6EBD8"/>
-          </a:solidFill>
-          <a:ln/>
-        </p:spPr>
-      </p:sp>
-      <p:sp>
-        <p:nvSpPr>
-          <p:cNvPr id="15" name="Shape 13"/>
-          <p:cNvSpPr/>
-          <p:nvPr/>
-        </p:nvSpPr>
-        <p:spPr>
-          <a:xfrm>
-            <a:off x="640080" y="4983480"/>
-            <a:ext cx="73152" cy="658368"/>
-          </a:xfrm>
-          <a:prstGeom prst="rect">
-            <a:avLst/>
-          </a:prstGeom>
-          <a:solidFill>
-            <a:srgbClr val="C9821A"/>
-          </a:solidFill>
-          <a:ln/>
-        </p:spPr>
-      </p:sp>
-      <p:sp>
-        <p:nvSpPr>
-          <p:cNvPr id="16" name="Text 14"/>
-          <p:cNvSpPr/>
-          <p:nvPr/>
-        </p:nvSpPr>
-        <p:spPr>
-          <a:xfrm>
-            <a:off x="914400" y="5056632"/>
-            <a:ext cx="10454335" cy="512064"/>
-          </a:xfrm>
-          <a:prstGeom prst="rect">
-            <a:avLst/>
-          </a:prstGeom>
-          <a:noFill/>
-          <a:ln/>
-        </p:spPr>
-        <p:txBody>
-          <a:bodyPr wrap="square" lIns="0" tIns="0" rIns="0" bIns="0" rtlCol="0" anchor="ctr"/>
-          <a:lstStyle/>
-          <a:p>
-            <a:pPr indent="0" marL="0">
-              <a:buNone/>
-            </a:pPr>
-            <a:r>
-              <a:rPr lang="en-US" sz="1400" b="1" dirty="0">
-                <a:solidFill>
-                  <a:srgbClr val="16211F"/>
-                </a:solidFill>
-                <a:latin typeface="Yu Gothic" pitchFamily="34" charset="0"/>
-                <a:ea typeface="Yu Gothic" pitchFamily="34" charset="-122"/>
-                <a:cs typeface="Yu Gothic" pitchFamily="34" charset="-120"/>
-              </a:rPr>
-              <a:t>完全な情報は来ません。決め直せる形で早く決めることが、不確実な状況での判断の型です。</a:t>
-            </a:r>
-            <a:endParaRPr lang="en-US" sz="1400" dirty="0"/>
-          </a:p>
-        </p:txBody>
-      </p:sp>
-    </p:spTree>
-  </p:cSld>
-  <p:clrMapOvr>
-    <a:masterClrMapping/>
-  </p:clrMapOvr>
-</p:sld>
-</file>
-
-<file path=ppt/slides/slide13.xml><?xml version="1.0" encoding="utf-8"?>
-<p:sld xmlns:a="http://schemas.openxmlformats.org/drawingml/2006/main" xmlns:r="http://schemas.openxmlformats.org/officeDocument/2006/relationships" xmlns:p="http://schemas.openxmlformats.org/presentationml/2006/main">
-  <p:cSld name="Slide 13">
-    <p:bg>
-      <p:bgPr>
-        <a:solidFill>
-          <a:srgbClr val="FFFFFF"/>
-        </a:solidFill>
-      </p:bgPr>
-    </p:bg>
-    <p:spTree>
-      <p:nvGrpSpPr>
-        <p:cNvPr id="1" name=""/>
-        <p:cNvGrpSpPr/>
-        <p:nvPr/>
-      </p:nvGrpSpPr>
-      <p:grpSpPr>
-        <a:xfrm>
-          <a:off x="0" y="0"/>
-          <a:ext cx="0" cy="0"/>
-          <a:chOff x="0" y="0"/>
-          <a:chExt cx="0" cy="0"/>
-        </a:xfrm>
-      </p:grpSpPr>
-      <p:sp>
-        <p:nvSpPr>
-          <p:cNvPr id="2" name="Shape 0"/>
-          <p:cNvSpPr/>
-          <p:nvPr/>
-        </p:nvSpPr>
-        <p:spPr>
-          <a:xfrm>
-            <a:off x="0" y="0"/>
-            <a:ext cx="128016" cy="6858000"/>
-          </a:xfrm>
-          <a:prstGeom prst="rect">
-            <a:avLst/>
-          </a:prstGeom>
-          <a:solidFill>
-            <a:srgbClr val="2E7D6B"/>
-          </a:solidFill>
-          <a:ln/>
-        </p:spPr>
-      </p:sp>
-      <p:sp>
-        <p:nvSpPr>
-          <p:cNvPr id="3" name="Text 1"/>
-          <p:cNvSpPr/>
-          <p:nvPr/>
-        </p:nvSpPr>
-        <p:spPr>
-          <a:xfrm>
-            <a:off x="640080" y="292608"/>
-            <a:ext cx="7772400" cy="274320"/>
-          </a:xfrm>
-          <a:prstGeom prst="rect">
-            <a:avLst/>
-          </a:prstGeom>
-          <a:noFill/>
-          <a:ln/>
-        </p:spPr>
-        <p:txBody>
-          <a:bodyPr wrap="square" lIns="0" tIns="0" rIns="0" bIns="0" rtlCol="0" anchor="ctr"/>
-          <a:lstStyle/>
-          <a:p>
-            <a:pPr indent="0" marL="0">
-              <a:buNone/>
-            </a:pPr>
-            <a:r>
-              <a:rPr lang="en-US" sz="1200" b="1" dirty="0">
-                <a:solidFill>
-                  <a:srgbClr val="2E7D6B"/>
-                </a:solidFill>
-                <a:latin typeface="Yu Gothic" pitchFamily="34" charset="0"/>
-                <a:ea typeface="Yu Gothic" pitchFamily="34" charset="-122"/>
-                <a:cs typeface="Yu Gothic" pitchFamily="34" charset="-120"/>
-              </a:rPr>
-              <a:t>第2部　AIとともに判断する</a:t>
-            </a:r>
-            <a:endParaRPr lang="en-US" sz="1200" dirty="0"/>
-          </a:p>
-        </p:txBody>
-      </p:sp>
-      <p:sp>
-        <p:nvSpPr>
-          <p:cNvPr id="4" name="Text 2"/>
-          <p:cNvSpPr/>
-          <p:nvPr/>
-        </p:nvSpPr>
-        <p:spPr>
-          <a:xfrm>
-            <a:off x="9722815" y="292608"/>
-            <a:ext cx="1828800" cy="274320"/>
-          </a:xfrm>
-          <a:prstGeom prst="rect">
-            <a:avLst/>
-          </a:prstGeom>
-          <a:noFill/>
-          <a:ln/>
-        </p:spPr>
-        <p:txBody>
-          <a:bodyPr wrap="square" lIns="0" tIns="0" rIns="0" bIns="0" rtlCol="0" anchor="ctr"/>
-          <a:lstStyle/>
-          <a:p>
-            <a:pPr algn="r" indent="0" marL="0">
-              <a:buNone/>
-            </a:pPr>
-            <a:r>
-              <a:rPr lang="en-US" sz="1100" dirty="0">
-                <a:solidFill>
-                  <a:srgbClr val="5E6E6A"/>
-                </a:solidFill>
-                <a:latin typeface="Yu Gothic" pitchFamily="34" charset="0"/>
-                <a:ea typeface="Yu Gothic" pitchFamily="34" charset="-122"/>
-                <a:cs typeface="Yu Gothic" pitchFamily="34" charset="-120"/>
-              </a:rPr>
-              <a:t>8分</a:t>
-            </a:r>
-            <a:endParaRPr lang="en-US" sz="1100" dirty="0"/>
-          </a:p>
-        </p:txBody>
-      </p:sp>
-      <p:sp>
-        <p:nvSpPr>
-          <p:cNvPr id="5" name="Text 3"/>
-          <p:cNvSpPr/>
-          <p:nvPr/>
-        </p:nvSpPr>
-        <p:spPr>
-          <a:xfrm>
-            <a:off x="640080" y="621792"/>
-            <a:ext cx="10911535" cy="685800"/>
-          </a:xfrm>
-          <a:prstGeom prst="rect">
-            <a:avLst/>
-          </a:prstGeom>
-          <a:noFill/>
-          <a:ln/>
-        </p:spPr>
-        <p:txBody>
-          <a:bodyPr wrap="square" lIns="0" tIns="0" rIns="0" bIns="0" rtlCol="0" anchor="t"/>
-          <a:lstStyle/>
-          <a:p>
-            <a:pPr indent="0" marL="0">
-              <a:buNone/>
-            </a:pPr>
-            <a:r>
-              <a:rPr lang="en-US" sz="2600" b="1" dirty="0">
-                <a:solidFill>
-                  <a:srgbClr val="16211F"/>
-                </a:solidFill>
-                <a:latin typeface="Yu Gothic" pitchFamily="34" charset="0"/>
-                <a:ea typeface="Yu Gothic" pitchFamily="34" charset="-122"/>
-                <a:cs typeface="Yu Gothic" pitchFamily="34" charset="-120"/>
-              </a:rPr>
-              <a:t>AIに任せると、AI自身が守るべき面になります</a:t>
-            </a:r>
-            <a:endParaRPr lang="en-US" sz="2600" dirty="0"/>
-          </a:p>
-        </p:txBody>
-      </p:sp>
-      <p:sp>
-        <p:nvSpPr>
-          <p:cNvPr id="6" name="Text 4"/>
-          <p:cNvSpPr/>
-          <p:nvPr/>
-        </p:nvSpPr>
-        <p:spPr>
-          <a:xfrm>
-            <a:off x="10180015" y="6446520"/>
-            <a:ext cx="1371600" cy="228600"/>
-          </a:xfrm>
-          <a:prstGeom prst="rect">
-            <a:avLst/>
-          </a:prstGeom>
-          <a:noFill/>
-          <a:ln/>
-        </p:spPr>
-        <p:txBody>
-          <a:bodyPr wrap="square" lIns="0" tIns="0" rIns="0" bIns="0" rtlCol="0" anchor="ctr"/>
-          <a:lstStyle/>
-          <a:p>
-            <a:pPr algn="r" indent="0" marL="0">
-              <a:buNone/>
-            </a:pPr>
-            <a:r>
-              <a:rPr lang="en-US" sz="900" dirty="0">
-                <a:solidFill>
-                  <a:srgbClr val="5E6E6A"/>
-                </a:solidFill>
-                <a:latin typeface="Yu Gothic" pitchFamily="34" charset="0"/>
-                <a:ea typeface="Yu Gothic" pitchFamily="34" charset="-122"/>
-                <a:cs typeface="Yu Gothic" pitchFamily="34" charset="-120"/>
-              </a:rPr>
-              <a:t>13 / 24</a:t>
-            </a:r>
-            <a:endParaRPr lang="en-US" sz="900" dirty="0"/>
-          </a:p>
-        </p:txBody>
-      </p:sp>
-      <p:sp>
-        <p:nvSpPr>
-          <p:cNvPr id="7" name="Text 5"/>
-          <p:cNvSpPr/>
-          <p:nvPr/>
-        </p:nvSpPr>
-        <p:spPr>
-          <a:xfrm>
-            <a:off x="640080" y="6446520"/>
-            <a:ext cx="6400800" cy="228600"/>
-          </a:xfrm>
-          <a:prstGeom prst="rect">
-            <a:avLst/>
-          </a:prstGeom>
-          <a:noFill/>
-          <a:ln/>
-        </p:spPr>
-        <p:txBody>
-          <a:bodyPr wrap="square" lIns="0" tIns="0" rIns="0" bIns="0" rtlCol="0" anchor="ctr"/>
-          <a:lstStyle/>
-          <a:p>
-            <a:pPr indent="0" marL="0">
-              <a:buNone/>
-            </a:pPr>
-            <a:r>
-              <a:rPr lang="en-US" sz="900" dirty="0">
-                <a:solidFill>
-                  <a:srgbClr val="9FB2AD"/>
-                </a:solidFill>
-                <a:latin typeface="Yu Gothic" pitchFamily="34" charset="0"/>
-                <a:ea typeface="Yu Gothic" pitchFamily="34" charset="-122"/>
-                <a:cs typeface="Yu Gothic" pitchFamily="34" charset="-120"/>
-              </a:rPr>
-              <a:t>Security Days Fall 2026 Fukuoka　FB-05　小出 洋（九州大学）</a:t>
-            </a:r>
-            <a:endParaRPr lang="en-US" sz="900" dirty="0"/>
-          </a:p>
-        </p:txBody>
-      </p:sp>
-      <p:sp>
-        <p:nvSpPr>
-          <p:cNvPr id="8" name="Shape 6"/>
-          <p:cNvSpPr/>
-          <p:nvPr/>
-        </p:nvSpPr>
-        <p:spPr>
-          <a:xfrm>
-            <a:off x="640080" y="1554480"/>
-            <a:ext cx="3503066" cy="3063240"/>
-          </a:xfrm>
-          <a:prstGeom prst="roundRect">
-            <a:avLst>
-              <a:gd name="adj" fmla="val 1493"/>
-            </a:avLst>
-          </a:prstGeom>
-          <a:solidFill>
-            <a:srgbClr val="EDF3F1"/>
-          </a:solidFill>
-          <a:ln w="9525">
-            <a:solidFill>
-              <a:srgbClr val="C9D5D1"/>
-            </a:solidFill>
-            <a:prstDash val="solid"/>
-          </a:ln>
-        </p:spPr>
-      </p:sp>
-      <p:sp>
-        <p:nvSpPr>
-          <p:cNvPr id="9" name="Text 7"/>
-          <p:cNvSpPr/>
-          <p:nvPr/>
-        </p:nvSpPr>
-        <p:spPr>
-          <a:xfrm>
-            <a:off x="822960" y="1700784"/>
-            <a:ext cx="3137306" cy="411480"/>
-          </a:xfrm>
-          <a:prstGeom prst="rect">
-            <a:avLst/>
-          </a:prstGeom>
-          <a:noFill/>
-          <a:ln/>
-        </p:spPr>
-        <p:txBody>
-          <a:bodyPr wrap="square" lIns="0" tIns="0" rIns="0" bIns="0" rtlCol="0" anchor="t"/>
-          <a:lstStyle/>
-          <a:p>
-            <a:pPr indent="0" marL="0">
-              <a:buNone/>
-            </a:pPr>
-            <a:r>
-              <a:rPr lang="en-US" sz="1600" b="1" dirty="0">
-                <a:solidFill>
-                  <a:srgbClr val="2E7D6B"/>
-                </a:solidFill>
-                <a:latin typeface="Yu Gothic" pitchFamily="34" charset="0"/>
-                <a:ea typeface="Yu Gothic" pitchFamily="34" charset="-122"/>
-                <a:cs typeface="Yu Gothic" pitchFamily="34" charset="-120"/>
-              </a:rPr>
-              <a:t>指示の混入</a:t>
-            </a:r>
-            <a:endParaRPr lang="en-US" sz="1600" dirty="0"/>
-          </a:p>
-        </p:txBody>
-      </p:sp>
-      <p:sp>
-        <p:nvSpPr>
-          <p:cNvPr id="10" name="Text 8"/>
-          <p:cNvSpPr/>
-          <p:nvPr/>
-        </p:nvSpPr>
-        <p:spPr>
-          <a:xfrm>
-            <a:off x="822960" y="2203704"/>
-            <a:ext cx="3137306" cy="2304288"/>
-          </a:xfrm>
-          <a:prstGeom prst="rect">
-            <a:avLst/>
-          </a:prstGeom>
-          <a:noFill/>
-          <a:ln/>
-        </p:spPr>
-        <p:txBody>
-          <a:bodyPr wrap="square" lIns="0" tIns="0" rIns="0" bIns="0" rtlCol="0" anchor="t"/>
-          <a:lstStyle/>
-          <a:p>
-            <a:pPr indent="0" marL="0">
-              <a:lnSpc>
-                <a:spcPct val="115000"/>
-              </a:lnSpc>
-              <a:buNone/>
-            </a:pPr>
-            <a:r>
-              <a:rPr lang="en-US" sz="1300" dirty="0">
-                <a:solidFill>
-                  <a:srgbClr val="16211F"/>
-                </a:solidFill>
-                <a:latin typeface="Yu Gothic" pitchFamily="34" charset="0"/>
-                <a:ea typeface="Yu Gothic" pitchFamily="34" charset="-122"/>
-                <a:cs typeface="Yu Gothic" pitchFamily="34" charset="-120"/>
-              </a:rPr>
-              <a:t>読み込んだメールや Web ページに仕込まれた指示で、判断材料が歪められます（プロンプトインジェクション）</a:t>
-            </a:r>
-            <a:endParaRPr lang="en-US" sz="1300" dirty="0"/>
-          </a:p>
-        </p:txBody>
-      </p:sp>
-      <p:sp>
-        <p:nvSpPr>
-          <p:cNvPr id="11" name="Shape 9"/>
-          <p:cNvSpPr/>
-          <p:nvPr/>
-        </p:nvSpPr>
-        <p:spPr>
-          <a:xfrm>
-            <a:off x="4344314" y="1554480"/>
-            <a:ext cx="3503066" cy="3063240"/>
-          </a:xfrm>
-          <a:prstGeom prst="roundRect">
-            <a:avLst>
-              <a:gd name="adj" fmla="val 1493"/>
-            </a:avLst>
-          </a:prstGeom>
-          <a:solidFill>
-            <a:srgbClr val="EDF3F1"/>
-          </a:solidFill>
-          <a:ln w="9525">
-            <a:solidFill>
-              <a:srgbClr val="C9D5D1"/>
-            </a:solidFill>
-            <a:prstDash val="solid"/>
-          </a:ln>
-        </p:spPr>
-      </p:sp>
-      <p:sp>
-        <p:nvSpPr>
-          <p:cNvPr id="12" name="Text 10"/>
-          <p:cNvSpPr/>
-          <p:nvPr/>
-        </p:nvSpPr>
-        <p:spPr>
-          <a:xfrm>
-            <a:off x="4527194" y="1700784"/>
-            <a:ext cx="3137306" cy="411480"/>
-          </a:xfrm>
-          <a:prstGeom prst="rect">
-            <a:avLst/>
-          </a:prstGeom>
-          <a:noFill/>
-          <a:ln/>
-        </p:spPr>
-        <p:txBody>
-          <a:bodyPr wrap="square" lIns="0" tIns="0" rIns="0" bIns="0" rtlCol="0" anchor="t"/>
-          <a:lstStyle/>
-          <a:p>
-            <a:pPr indent="0" marL="0">
-              <a:buNone/>
-            </a:pPr>
-            <a:r>
-              <a:rPr lang="en-US" sz="1600" b="1" dirty="0">
-                <a:solidFill>
-                  <a:srgbClr val="2E7D6B"/>
-                </a:solidFill>
-                <a:latin typeface="Yu Gothic" pitchFamily="34" charset="0"/>
-                <a:ea typeface="Yu Gothic" pitchFamily="34" charset="-122"/>
-                <a:cs typeface="Yu Gothic" pitchFamily="34" charset="-120"/>
-              </a:rPr>
-              <a:t>権限の渡しすぎ</a:t>
-            </a:r>
-            <a:endParaRPr lang="en-US" sz="1600" dirty="0"/>
-          </a:p>
-        </p:txBody>
-      </p:sp>
-      <p:sp>
-        <p:nvSpPr>
-          <p:cNvPr id="13" name="Text 11"/>
-          <p:cNvSpPr/>
-          <p:nvPr/>
-        </p:nvSpPr>
-        <p:spPr>
-          <a:xfrm>
-            <a:off x="4527194" y="2203704"/>
-            <a:ext cx="3137306" cy="2304288"/>
-          </a:xfrm>
-          <a:prstGeom prst="rect">
-            <a:avLst/>
-          </a:prstGeom>
-          <a:noFill/>
-          <a:ln/>
-        </p:spPr>
-        <p:txBody>
-          <a:bodyPr wrap="square" lIns="0" tIns="0" rIns="0" bIns="0" rtlCol="0" anchor="t"/>
-          <a:lstStyle/>
-          <a:p>
-            <a:pPr indent="0" marL="0">
-              <a:lnSpc>
-                <a:spcPct val="115000"/>
-              </a:lnSpc>
-              <a:buNone/>
-            </a:pPr>
-            <a:r>
-              <a:rPr lang="en-US" sz="1300" dirty="0">
-                <a:solidFill>
-                  <a:srgbClr val="16211F"/>
-                </a:solidFill>
-                <a:latin typeface="Yu Gothic" pitchFamily="34" charset="0"/>
-                <a:ea typeface="Yu Gothic" pitchFamily="34" charset="-122"/>
-                <a:cs typeface="Yu Gothic" pitchFamily="34" charset="-120"/>
-              </a:rPr>
-              <a:t>エージェントに渡した権限は、乗っ取られたときの被害範囲です。必要な分だけ渡します</a:t>
-            </a:r>
-            <a:endParaRPr lang="en-US" sz="1300" dirty="0"/>
-          </a:p>
-        </p:txBody>
-      </p:sp>
-      <p:sp>
-        <p:nvSpPr>
-          <p:cNvPr id="14" name="Shape 12"/>
-          <p:cNvSpPr/>
-          <p:nvPr/>
-        </p:nvSpPr>
-        <p:spPr>
-          <a:xfrm>
-            <a:off x="8048549" y="1554480"/>
-            <a:ext cx="3503066" cy="3063240"/>
-          </a:xfrm>
-          <a:prstGeom prst="roundRect">
-            <a:avLst>
-              <a:gd name="adj" fmla="val 1493"/>
-            </a:avLst>
-          </a:prstGeom>
-          <a:solidFill>
-            <a:srgbClr val="EDF3F1"/>
-          </a:solidFill>
-          <a:ln w="9525">
-            <a:solidFill>
-              <a:srgbClr val="C9D5D1"/>
-            </a:solidFill>
-            <a:prstDash val="solid"/>
-          </a:ln>
-        </p:spPr>
-      </p:sp>
-      <p:sp>
-        <p:nvSpPr>
-          <p:cNvPr id="15" name="Text 13"/>
-          <p:cNvSpPr/>
-          <p:nvPr/>
-        </p:nvSpPr>
-        <p:spPr>
-          <a:xfrm>
-            <a:off x="8231429" y="1700784"/>
-            <a:ext cx="3137306" cy="411480"/>
-          </a:xfrm>
-          <a:prstGeom prst="rect">
-            <a:avLst/>
-          </a:prstGeom>
-          <a:noFill/>
-          <a:ln/>
-        </p:spPr>
-        <p:txBody>
-          <a:bodyPr wrap="square" lIns="0" tIns="0" rIns="0" bIns="0" rtlCol="0" anchor="t"/>
-          <a:lstStyle/>
-          <a:p>
-            <a:pPr indent="0" marL="0">
-              <a:buNone/>
-            </a:pPr>
-            <a:r>
-              <a:rPr lang="en-US" sz="1600" b="1" dirty="0">
-                <a:solidFill>
-                  <a:srgbClr val="2E7D6B"/>
-                </a:solidFill>
-                <a:latin typeface="Yu Gothic" pitchFamily="34" charset="0"/>
-                <a:ea typeface="Yu Gothic" pitchFamily="34" charset="-122"/>
-                <a:cs typeface="Yu Gothic" pitchFamily="34" charset="-120"/>
-              </a:rPr>
-              <a:t>戻せない操作</a:t>
-            </a:r>
-            <a:endParaRPr lang="en-US" sz="1600" dirty="0"/>
-          </a:p>
-        </p:txBody>
-      </p:sp>
-      <p:sp>
-        <p:nvSpPr>
-          <p:cNvPr id="16" name="Text 14"/>
-          <p:cNvSpPr/>
-          <p:nvPr/>
-        </p:nvSpPr>
-        <p:spPr>
-          <a:xfrm>
-            <a:off x="8231429" y="2203704"/>
-            <a:ext cx="3137306" cy="2304288"/>
-          </a:xfrm>
-          <a:prstGeom prst="rect">
-            <a:avLst/>
-          </a:prstGeom>
-          <a:noFill/>
-          <a:ln/>
-        </p:spPr>
-        <p:txBody>
-          <a:bodyPr wrap="square" lIns="0" tIns="0" rIns="0" bIns="0" rtlCol="0" anchor="t"/>
-          <a:lstStyle/>
-          <a:p>
-            <a:pPr indent="0" marL="0">
-              <a:lnSpc>
-                <a:spcPct val="115000"/>
-              </a:lnSpc>
-              <a:buNone/>
-            </a:pPr>
-            <a:r>
-              <a:rPr lang="en-US" sz="1300" dirty="0">
-                <a:solidFill>
-                  <a:srgbClr val="16211F"/>
-                </a:solidFill>
-                <a:latin typeface="Yu Gothic" pitchFamily="34" charset="0"/>
-                <a:ea typeface="Yu Gothic" pitchFamily="34" charset="-122"/>
-                <a:cs typeface="Yu Gothic" pitchFamily="34" charset="-120"/>
-              </a:rPr>
-              <a:t>送信・削除・決済の前に人が承認します。任せ方の3段階の「右側」です</a:t>
-            </a:r>
-            <a:endParaRPr lang="en-US" sz="1300" dirty="0"/>
-          </a:p>
-        </p:txBody>
-      </p:sp>
-      <p:sp>
-        <p:nvSpPr>
-          <p:cNvPr id="17" name="Shape 15"/>
-          <p:cNvSpPr/>
-          <p:nvPr/>
-        </p:nvSpPr>
-        <p:spPr>
-          <a:xfrm>
-            <a:off x="640080" y="4892040"/>
-            <a:ext cx="10911535" cy="658368"/>
-          </a:xfrm>
-          <a:prstGeom prst="rect">
-            <a:avLst/>
-          </a:prstGeom>
-          <a:solidFill>
-            <a:srgbClr val="F6EBD8"/>
-          </a:solidFill>
-          <a:ln/>
-        </p:spPr>
-      </p:sp>
-      <p:sp>
-        <p:nvSpPr>
-          <p:cNvPr id="18" name="Shape 16"/>
-          <p:cNvSpPr/>
-          <p:nvPr/>
-        </p:nvSpPr>
-        <p:spPr>
-          <a:xfrm>
-            <a:off x="640080" y="4892040"/>
-            <a:ext cx="73152" cy="658368"/>
-          </a:xfrm>
-          <a:prstGeom prst="rect">
-            <a:avLst/>
-          </a:prstGeom>
-          <a:solidFill>
-            <a:srgbClr val="C9821A"/>
-          </a:solidFill>
-          <a:ln/>
-        </p:spPr>
-      </p:sp>
-      <p:sp>
-        <p:nvSpPr>
-          <p:cNvPr id="19" name="Text 17"/>
-          <p:cNvSpPr/>
-          <p:nvPr/>
-        </p:nvSpPr>
-        <p:spPr>
-          <a:xfrm>
-            <a:off x="914400" y="4965192"/>
-            <a:ext cx="10454335" cy="512064"/>
-          </a:xfrm>
-          <a:prstGeom prst="rect">
-            <a:avLst/>
-          </a:prstGeom>
-          <a:noFill/>
-          <a:ln/>
-        </p:spPr>
-        <p:txBody>
-          <a:bodyPr wrap="square" lIns="0" tIns="0" rIns="0" bIns="0" rtlCol="0" anchor="ctr"/>
-          <a:lstStyle/>
-          <a:p>
-            <a:pPr indent="0" marL="0">
-              <a:buNone/>
-            </a:pPr>
-            <a:r>
-              <a:rPr lang="en-US" sz="1400" b="1" dirty="0">
-                <a:solidFill>
-                  <a:srgbClr val="16211F"/>
-                </a:solidFill>
-                <a:latin typeface="Yu Gothic" pitchFamily="34" charset="0"/>
-                <a:ea typeface="Yu Gothic" pitchFamily="34" charset="-122"/>
-                <a:cs typeface="Yu Gothic" pitchFamily="34" charset="-120"/>
-              </a:rPr>
-              <a:t>対策は新しくありません。最小権限、戻せない操作の前の承認、何をしたかの記録。忘れられやすいだけです。</a:t>
-            </a:r>
-            <a:endParaRPr lang="en-US" sz="1400" dirty="0"/>
-          </a:p>
-        </p:txBody>
-      </p:sp>
-    </p:spTree>
-  </p:cSld>
-  <p:clrMapOvr>
-    <a:masterClrMapping/>
-  </p:clrMapOvr>
-</p:sld>
-</file>
-
-<file path=ppt/slides/slide14.xml><?xml version="1.0" encoding="utf-8"?>
-<p:sld xmlns:a="http://schemas.openxmlformats.org/drawingml/2006/main" xmlns:r="http://schemas.openxmlformats.org/officeDocument/2006/relationships" xmlns:p="http://schemas.openxmlformats.org/presentationml/2006/main">
-  <p:cSld name="Slide 14">
-    <p:bg>
-      <p:bgPr>
-        <a:solidFill>
-          <a:srgbClr val="0E2E2A"/>
-        </a:solidFill>
-      </p:bgPr>
-    </p:bg>
-    <p:spTree>
-      <p:nvGrpSpPr>
-        <p:cNvPr id="1" name=""/>
-        <p:cNvGrpSpPr/>
-        <p:nvPr/>
-      </p:nvGrpSpPr>
-      <p:grpSpPr>
-        <a:xfrm>
-          <a:off x="0" y="0"/>
-          <a:ext cx="0" cy="0"/>
-          <a:chOff x="0" y="0"/>
-          <a:chExt cx="0" cy="0"/>
-        </a:xfrm>
-      </p:grpSpPr>
-      <p:sp>
-        <p:nvSpPr>
-          <p:cNvPr id="2" name="Shape 0"/>
-          <p:cNvSpPr/>
-          <p:nvPr/>
-        </p:nvSpPr>
-        <p:spPr>
-          <a:xfrm>
-            <a:off x="0" y="0"/>
-            <a:ext cx="201168" cy="6858000"/>
-          </a:xfrm>
-          <a:prstGeom prst="rect">
-            <a:avLst/>
-          </a:prstGeom>
-          <a:solidFill>
-            <a:srgbClr val="2E7D6B"/>
-          </a:solidFill>
-          <a:ln/>
-        </p:spPr>
-      </p:sp>
-      <p:sp>
-        <p:nvSpPr>
-          <p:cNvPr id="3" name="Text 1"/>
-          <p:cNvSpPr/>
-          <p:nvPr/>
-        </p:nvSpPr>
-        <p:spPr>
-          <a:xfrm>
-            <a:off x="822960" y="2103120"/>
-            <a:ext cx="3657600" cy="548640"/>
-          </a:xfrm>
-          <a:prstGeom prst="rect">
-            <a:avLst/>
-          </a:prstGeom>
-          <a:noFill/>
-          <a:ln/>
-        </p:spPr>
-        <p:txBody>
-          <a:bodyPr wrap="square" lIns="0" tIns="0" rIns="0" bIns="0" rtlCol="0" anchor="ctr"/>
-          <a:lstStyle/>
-          <a:p>
-            <a:pPr indent="0" marL="0">
-              <a:buNone/>
-            </a:pPr>
-            <a:r>
-              <a:rPr lang="en-US" sz="2400" b="1" dirty="0">
-                <a:solidFill>
-                  <a:srgbClr val="C9821A"/>
-                </a:solidFill>
-                <a:latin typeface="Yu Gothic" pitchFamily="34" charset="0"/>
-                <a:ea typeface="Yu Gothic" pitchFamily="34" charset="-122"/>
-                <a:cs typeface="Yu Gothic" pitchFamily="34" charset="-120"/>
-              </a:rPr>
-              <a:t>第3部</a:t>
-            </a:r>
-            <a:endParaRPr lang="en-US" sz="2400" dirty="0"/>
-          </a:p>
-        </p:txBody>
-      </p:sp>
-      <p:sp>
-        <p:nvSpPr>
-          <p:cNvPr id="4" name="Text 2"/>
-          <p:cNvSpPr/>
-          <p:nvPr/>
-        </p:nvSpPr>
-        <p:spPr>
-          <a:xfrm>
-            <a:off x="822960" y="2697480"/>
-            <a:ext cx="10607040" cy="822960"/>
-          </a:xfrm>
-          <a:prstGeom prst="rect">
-            <a:avLst/>
-          </a:prstGeom>
-          <a:noFill/>
-          <a:ln/>
-        </p:spPr>
-        <p:txBody>
-          <a:bodyPr wrap="square" lIns="0" tIns="0" rIns="0" bIns="0" rtlCol="0" anchor="ctr"/>
-          <a:lstStyle/>
-          <a:p>
-            <a:pPr indent="0" marL="0">
-              <a:buNone/>
-            </a:pPr>
-            <a:r>
-              <a:rPr lang="en-US" sz="3800" b="1" dirty="0">
-                <a:solidFill>
-                  <a:srgbClr val="FFFFFF"/>
-                </a:solidFill>
-                <a:latin typeface="Yu Gothic" pitchFamily="34" charset="0"/>
-                <a:ea typeface="Yu Gothic" pitchFamily="34" charset="-122"/>
-                <a:cs typeface="Yu Gothic" pitchFamily="34" charset="-120"/>
-              </a:rPr>
-              <a:t>限られた人員で回す</a:t>
-            </a:r>
-            <a:endParaRPr lang="en-US" sz="3800" dirty="0"/>
-          </a:p>
-        </p:txBody>
-      </p:sp>
-      <p:sp>
-        <p:nvSpPr>
-          <p:cNvPr id="5" name="Text 3"/>
-          <p:cNvSpPr/>
-          <p:nvPr/>
-        </p:nvSpPr>
-        <p:spPr>
-          <a:xfrm>
-            <a:off x="822960" y="3657600"/>
-            <a:ext cx="10607040" cy="457200"/>
-          </a:xfrm>
-          <a:prstGeom prst="rect">
-            <a:avLst/>
-          </a:prstGeom>
-          <a:noFill/>
-          <a:ln/>
-        </p:spPr>
-        <p:txBody>
-          <a:bodyPr wrap="square" lIns="0" tIns="0" rIns="0" bIns="0" rtlCol="0" anchor="ctr"/>
-          <a:lstStyle/>
-          <a:p>
-            <a:pPr indent="0" marL="0">
-              <a:buNone/>
-            </a:pPr>
-            <a:r>
-              <a:rPr lang="en-US" sz="1800" dirty="0">
-                <a:solidFill>
-                  <a:srgbClr val="9FB2AD"/>
-                </a:solidFill>
-                <a:latin typeface="Yu Gothic" pitchFamily="34" charset="0"/>
-                <a:ea typeface="Yu Gothic" pitchFamily="34" charset="-122"/>
-                <a:cs typeface="Yu Gothic" pitchFamily="34" charset="-120"/>
-              </a:rPr>
-              <a:t>「あの人がいないと動かない」をなくす</a:t>
-            </a:r>
-            <a:endParaRPr lang="en-US" sz="1800" dirty="0"/>
-          </a:p>
-        </p:txBody>
-      </p:sp>
-    </p:spTree>
-  </p:cSld>
-  <p:clrMapOvr>
-    <a:masterClrMapping/>
-  </p:clrMapOvr>
-</p:sld>
-</file>
-
-<file path=ppt/slides/slide15.xml><?xml version="1.0" encoding="utf-8"?>
-<p:sld xmlns:a="http://schemas.openxmlformats.org/drawingml/2006/main" xmlns:r="http://schemas.openxmlformats.org/officeDocument/2006/relationships" xmlns:p="http://schemas.openxmlformats.org/presentationml/2006/main">
-  <p:cSld name="Slide 15">
-    <p:bg>
-      <p:bgPr>
-        <a:solidFill>
-          <a:srgbClr val="FFFFFF"/>
-        </a:solidFill>
-      </p:bgPr>
-    </p:bg>
-    <p:spTree>
-      <p:nvGrpSpPr>
-        <p:cNvPr id="1" name=""/>
-        <p:cNvGrpSpPr/>
-        <p:nvPr/>
-      </p:nvGrpSpPr>
-      <p:grpSpPr>
-        <a:xfrm>
-          <a:off x="0" y="0"/>
-          <a:ext cx="0" cy="0"/>
-          <a:chOff x="0" y="0"/>
-          <a:chExt cx="0" cy="0"/>
-        </a:xfrm>
-      </p:grpSpPr>
-      <p:sp>
-        <p:nvSpPr>
-          <p:cNvPr id="2" name="Shape 0"/>
-          <p:cNvSpPr/>
-          <p:nvPr/>
-        </p:nvSpPr>
-        <p:spPr>
-          <a:xfrm>
-            <a:off x="0" y="0"/>
-            <a:ext cx="128016" cy="6858000"/>
-          </a:xfrm>
-          <a:prstGeom prst="rect">
-            <a:avLst/>
-          </a:prstGeom>
-          <a:solidFill>
-            <a:srgbClr val="2E7D6B"/>
-          </a:solidFill>
-          <a:ln/>
-        </p:spPr>
-      </p:sp>
-      <p:sp>
-        <p:nvSpPr>
-          <p:cNvPr id="3" name="Text 1"/>
-          <p:cNvSpPr/>
-          <p:nvPr/>
-        </p:nvSpPr>
-        <p:spPr>
-          <a:xfrm>
-            <a:off x="640080" y="292608"/>
-            <a:ext cx="7772400" cy="274320"/>
-          </a:xfrm>
-          <a:prstGeom prst="rect">
-            <a:avLst/>
-          </a:prstGeom>
-          <a:noFill/>
-          <a:ln/>
-        </p:spPr>
-        <p:txBody>
-          <a:bodyPr wrap="square" lIns="0" tIns="0" rIns="0" bIns="0" rtlCol="0" anchor="ctr"/>
-          <a:lstStyle/>
-          <a:p>
-            <a:pPr indent="0" marL="0">
-              <a:buNone/>
-            </a:pPr>
-            <a:r>
-              <a:rPr lang="en-US" sz="1200" b="1" dirty="0">
-                <a:solidFill>
-                  <a:srgbClr val="2E7D6B"/>
-                </a:solidFill>
-                <a:latin typeface="Yu Gothic" pitchFamily="34" charset="0"/>
-                <a:ea typeface="Yu Gothic" pitchFamily="34" charset="-122"/>
-                <a:cs typeface="Yu Gothic" pitchFamily="34" charset="-120"/>
-              </a:rPr>
-              <a:t>第3部　限られた人員で回す</a:t>
-            </a:r>
-            <a:endParaRPr lang="en-US" sz="1200" dirty="0"/>
-          </a:p>
-        </p:txBody>
-      </p:sp>
-      <p:sp>
-        <p:nvSpPr>
-          <p:cNvPr id="4" name="Text 2"/>
-          <p:cNvSpPr/>
-          <p:nvPr/>
-        </p:nvSpPr>
-        <p:spPr>
-          <a:xfrm>
-            <a:off x="9722815" y="292608"/>
-            <a:ext cx="1828800" cy="274320"/>
-          </a:xfrm>
-          <a:prstGeom prst="rect">
-            <a:avLst/>
-          </a:prstGeom>
-          <a:noFill/>
-          <a:ln/>
-        </p:spPr>
-        <p:txBody>
-          <a:bodyPr wrap="square" lIns="0" tIns="0" rIns="0" bIns="0" rtlCol="0" anchor="ctr"/>
-          <a:lstStyle/>
-          <a:p>
-            <a:pPr algn="r" indent="0" marL="0">
-              <a:buNone/>
-            </a:pPr>
-            <a:r>
-              <a:rPr lang="en-US" sz="1100" dirty="0">
-                <a:solidFill>
-                  <a:srgbClr val="5E6E6A"/>
-                </a:solidFill>
-                <a:latin typeface="Yu Gothic" pitchFamily="34" charset="0"/>
-                <a:ea typeface="Yu Gothic" pitchFamily="34" charset="-122"/>
-                <a:cs typeface="Yu Gothic" pitchFamily="34" charset="-120"/>
-              </a:rPr>
-              <a:t>6分</a:t>
-            </a:r>
-            <a:endParaRPr lang="en-US" sz="1100" dirty="0"/>
-          </a:p>
-        </p:txBody>
-      </p:sp>
-      <p:sp>
-        <p:nvSpPr>
-          <p:cNvPr id="5" name="Text 3"/>
-          <p:cNvSpPr/>
-          <p:nvPr/>
-        </p:nvSpPr>
-        <p:spPr>
-          <a:xfrm>
-            <a:off x="640080" y="621792"/>
-            <a:ext cx="10911535" cy="685800"/>
-          </a:xfrm>
-          <a:prstGeom prst="rect">
-            <a:avLst/>
-          </a:prstGeom>
-          <a:noFill/>
-          <a:ln/>
-        </p:spPr>
-        <p:txBody>
-          <a:bodyPr wrap="square" lIns="0" tIns="0" rIns="0" bIns="0" rtlCol="0" anchor="t"/>
-          <a:lstStyle/>
-          <a:p>
-            <a:pPr indent="0" marL="0">
-              <a:buNone/>
-            </a:pPr>
-            <a:r>
-              <a:rPr lang="en-US" sz="2600" b="1" dirty="0">
-                <a:solidFill>
-                  <a:srgbClr val="16211F"/>
-                </a:solidFill>
-                <a:latin typeface="Yu Gothic" pitchFamily="34" charset="0"/>
-                <a:ea typeface="Yu Gothic" pitchFamily="34" charset="-122"/>
-                <a:cs typeface="Yu Gothic" pitchFamily="34" charset="-120"/>
-              </a:rPr>
-              <a:t>「ひとががんばる」体制の弱さは、判断が人に貼りついていること</a:t>
-            </a:r>
-            <a:endParaRPr lang="en-US" sz="2600" dirty="0"/>
-          </a:p>
-        </p:txBody>
-      </p:sp>
-      <p:sp>
-        <p:nvSpPr>
-          <p:cNvPr id="6" name="Text 4"/>
-          <p:cNvSpPr/>
-          <p:nvPr/>
-        </p:nvSpPr>
-        <p:spPr>
-          <a:xfrm>
-            <a:off x="10180015" y="6446520"/>
-            <a:ext cx="1371600" cy="228600"/>
-          </a:xfrm>
-          <a:prstGeom prst="rect">
-            <a:avLst/>
-          </a:prstGeom>
-          <a:noFill/>
-          <a:ln/>
-        </p:spPr>
-        <p:txBody>
-          <a:bodyPr wrap="square" lIns="0" tIns="0" rIns="0" bIns="0" rtlCol="0" anchor="ctr"/>
-          <a:lstStyle/>
-          <a:p>
-            <a:pPr algn="r" indent="0" marL="0">
-              <a:buNone/>
-            </a:pPr>
-            <a:r>
-              <a:rPr lang="en-US" sz="900" dirty="0">
-                <a:solidFill>
-                  <a:srgbClr val="5E6E6A"/>
-                </a:solidFill>
-                <a:latin typeface="Yu Gothic" pitchFamily="34" charset="0"/>
-                <a:ea typeface="Yu Gothic" pitchFamily="34" charset="-122"/>
-                <a:cs typeface="Yu Gothic" pitchFamily="34" charset="-120"/>
-              </a:rPr>
-              <a:t>15 / 24</a:t>
-            </a:r>
-            <a:endParaRPr lang="en-US" sz="900" dirty="0"/>
-          </a:p>
-        </p:txBody>
-      </p:sp>
-      <p:sp>
-        <p:nvSpPr>
-          <p:cNvPr id="7" name="Text 5"/>
-          <p:cNvSpPr/>
-          <p:nvPr/>
-        </p:nvSpPr>
-        <p:spPr>
-          <a:xfrm>
-            <a:off x="640080" y="6446520"/>
-            <a:ext cx="6400800" cy="228600"/>
-          </a:xfrm>
-          <a:prstGeom prst="rect">
-            <a:avLst/>
-          </a:prstGeom>
-          <a:noFill/>
-          <a:ln/>
-        </p:spPr>
-        <p:txBody>
-          <a:bodyPr wrap="square" lIns="0" tIns="0" rIns="0" bIns="0" rtlCol="0" anchor="ctr"/>
-          <a:lstStyle/>
-          <a:p>
-            <a:pPr indent="0" marL="0">
-              <a:buNone/>
-            </a:pPr>
-            <a:r>
-              <a:rPr lang="en-US" sz="900" dirty="0">
-                <a:solidFill>
-                  <a:srgbClr val="9FB2AD"/>
-                </a:solidFill>
-                <a:latin typeface="Yu Gothic" pitchFamily="34" charset="0"/>
-                <a:ea typeface="Yu Gothic" pitchFamily="34" charset="-122"/>
-                <a:cs typeface="Yu Gothic" pitchFamily="34" charset="-120"/>
-              </a:rPr>
-              <a:t>Security Days Fall 2026 Fukuoka　FB-05　小出 洋（九州大学）</a:t>
-            </a:r>
-            <a:endParaRPr lang="en-US" sz="900" dirty="0"/>
-          </a:p>
-        </p:txBody>
-      </p:sp>
-      <p:sp>
-        <p:nvSpPr>
-          <p:cNvPr id="8" name="Shape 6"/>
-          <p:cNvSpPr/>
-          <p:nvPr/>
-        </p:nvSpPr>
-        <p:spPr>
-          <a:xfrm>
-            <a:off x="640080" y="1508760"/>
-            <a:ext cx="5318608" cy="3246120"/>
-          </a:xfrm>
-          <a:prstGeom prst="roundRect">
-            <a:avLst>
-              <a:gd name="adj" fmla="val 1408"/>
-            </a:avLst>
-          </a:prstGeom>
-          <a:solidFill>
-            <a:srgbClr val="EDF3F1"/>
-          </a:solidFill>
-          <a:ln w="9525">
-            <a:solidFill>
-              <a:srgbClr val="C9D5D1"/>
-            </a:solidFill>
-            <a:prstDash val="solid"/>
-          </a:ln>
-        </p:spPr>
-      </p:sp>
-      <p:sp>
-        <p:nvSpPr>
-          <p:cNvPr id="9" name="Text 7"/>
-          <p:cNvSpPr/>
-          <p:nvPr/>
-        </p:nvSpPr>
-        <p:spPr>
-          <a:xfrm>
-            <a:off x="822960" y="1655064"/>
-            <a:ext cx="4952848" cy="411480"/>
-          </a:xfrm>
-          <a:prstGeom prst="rect">
-            <a:avLst/>
-          </a:prstGeom>
-          <a:noFill/>
-          <a:ln/>
-        </p:spPr>
-        <p:txBody>
-          <a:bodyPr wrap="square" lIns="0" tIns="0" rIns="0" bIns="0" rtlCol="0" anchor="t"/>
-          <a:lstStyle/>
-          <a:p>
-            <a:pPr indent="0" marL="0">
-              <a:buNone/>
-            </a:pPr>
-            <a:r>
-              <a:rPr lang="en-US" sz="1600" b="1" dirty="0">
-                <a:solidFill>
-                  <a:srgbClr val="2E7D6B"/>
-                </a:solidFill>
-                <a:latin typeface="Yu Gothic" pitchFamily="34" charset="0"/>
-                <a:ea typeface="Yu Gothic" pitchFamily="34" charset="-122"/>
-                <a:cs typeface="Yu Gothic" pitchFamily="34" charset="-120"/>
-              </a:rPr>
-              <a:t>よくある状態</a:t>
-            </a:r>
-            <a:endParaRPr lang="en-US" sz="1600" dirty="0"/>
-          </a:p>
-        </p:txBody>
-      </p:sp>
-      <p:sp>
-        <p:nvSpPr>
-          <p:cNvPr id="10" name="Text 8"/>
-          <p:cNvSpPr/>
-          <p:nvPr/>
-        </p:nvSpPr>
-        <p:spPr>
-          <a:xfrm>
-            <a:off x="822960" y="2157984"/>
-            <a:ext cx="4952848" cy="2487168"/>
-          </a:xfrm>
-          <a:prstGeom prst="rect">
-            <a:avLst/>
-          </a:prstGeom>
-          <a:noFill/>
-          <a:ln/>
-        </p:spPr>
-        <p:txBody>
-          <a:bodyPr wrap="square" lIns="0" tIns="0" rIns="0" bIns="0" rtlCol="0" anchor="t"/>
-          <a:lstStyle/>
-          <a:p>
-            <a:pPr indent="0" marL="0">
-              <a:lnSpc>
-                <a:spcPct val="115000"/>
-              </a:lnSpc>
-              <a:buNone/>
-            </a:pPr>
-            <a:r>
-              <a:rPr lang="en-US" sz="1400" dirty="0">
-                <a:solidFill>
-                  <a:srgbClr val="16211F"/>
-                </a:solidFill>
-                <a:latin typeface="Yu Gothic" pitchFamily="34" charset="0"/>
-                <a:ea typeface="Yu Gothic" pitchFamily="34" charset="-122"/>
-                <a:cs typeface="Yu Gothic" pitchFamily="34" charset="-120"/>
-              </a:rPr>
-              <a:t>・判断できる人が1〜2人に集中している</a:t>
-            </a:r>
-            <a:endParaRPr lang="en-US" sz="1400" dirty="0"/>
-          </a:p>
-          <a:p>
-            <a:pPr indent="0" marL="0">
-              <a:lnSpc>
-                <a:spcPct val="115000"/>
-              </a:lnSpc>
-              <a:buNone/>
-            </a:pPr>
-            <a:r>
-              <a:rPr lang="en-US" sz="1400" dirty="0">
-                <a:solidFill>
-                  <a:srgbClr val="16211F"/>
-                </a:solidFill>
-                <a:latin typeface="Yu Gothic" pitchFamily="34" charset="0"/>
-                <a:ea typeface="Yu Gothic" pitchFamily="34" charset="-122"/>
-                <a:cs typeface="Yu Gothic" pitchFamily="34" charset="-120"/>
-              </a:rPr>
-              <a:t>・夜間・休日・長期戦で、その人が倒れる</a:t>
-            </a:r>
-            <a:endParaRPr lang="en-US" sz="1400" dirty="0"/>
-          </a:p>
-          <a:p>
-            <a:pPr indent="0" marL="0">
-              <a:lnSpc>
-                <a:spcPct val="115000"/>
-              </a:lnSpc>
-              <a:buNone/>
-            </a:pPr>
-            <a:r>
-              <a:rPr lang="en-US" sz="1400" dirty="0">
-                <a:solidFill>
-                  <a:srgbClr val="16211F"/>
-                </a:solidFill>
-                <a:latin typeface="Yu Gothic" pitchFamily="34" charset="0"/>
-                <a:ea typeface="Yu Gothic" pitchFamily="34" charset="-122"/>
-                <a:cs typeface="Yu Gothic" pitchFamily="34" charset="-120"/>
-              </a:rPr>
-              <a:t>・判断の根拠が頭の中にあり、記録に残らない</a:t>
-            </a:r>
-            <a:endParaRPr lang="en-US" sz="1400" dirty="0"/>
-          </a:p>
-        </p:txBody>
-      </p:sp>
-      <p:sp>
-        <p:nvSpPr>
-          <p:cNvPr id="11" name="Shape 9"/>
-          <p:cNvSpPr/>
-          <p:nvPr/>
-        </p:nvSpPr>
-        <p:spPr>
-          <a:xfrm>
-            <a:off x="6233008" y="1508760"/>
-            <a:ext cx="5318608" cy="3246120"/>
-          </a:xfrm>
-          <a:prstGeom prst="roundRect">
-            <a:avLst>
-              <a:gd name="adj" fmla="val 1408"/>
-            </a:avLst>
-          </a:prstGeom>
-          <a:solidFill>
-            <a:srgbClr val="2E7D6B"/>
-          </a:solidFill>
-          <a:ln w="9525">
-            <a:solidFill>
-              <a:srgbClr val="2E7D6B"/>
-            </a:solidFill>
-            <a:prstDash val="solid"/>
-          </a:ln>
-        </p:spPr>
-      </p:sp>
-      <p:sp>
-        <p:nvSpPr>
-          <p:cNvPr id="12" name="Text 10"/>
-          <p:cNvSpPr/>
-          <p:nvPr/>
-        </p:nvSpPr>
-        <p:spPr>
-          <a:xfrm>
-            <a:off x="6415888" y="1655064"/>
-            <a:ext cx="4952848" cy="411480"/>
-          </a:xfrm>
-          <a:prstGeom prst="rect">
-            <a:avLst/>
-          </a:prstGeom>
-          <a:noFill/>
-          <a:ln/>
-        </p:spPr>
-        <p:txBody>
-          <a:bodyPr wrap="square" lIns="0" tIns="0" rIns="0" bIns="0" rtlCol="0" anchor="t"/>
-          <a:lstStyle/>
-          <a:p>
-            <a:pPr indent="0" marL="0">
-              <a:buNone/>
-            </a:pPr>
-            <a:r>
-              <a:rPr lang="en-US" sz="1600" b="1" dirty="0">
-                <a:solidFill>
-                  <a:srgbClr val="FFFFFF"/>
-                </a:solidFill>
-                <a:latin typeface="Yu Gothic" pitchFamily="34" charset="0"/>
-                <a:ea typeface="Yu Gothic" pitchFamily="34" charset="-122"/>
-                <a:cs typeface="Yu Gothic" pitchFamily="34" charset="-120"/>
-              </a:rPr>
-              <a:t>規模の小さい組織ではさらに</a:t>
-            </a:r>
-            <a:endParaRPr lang="en-US" sz="1600" dirty="0"/>
-          </a:p>
-        </p:txBody>
-      </p:sp>
-      <p:sp>
-        <p:nvSpPr>
-          <p:cNvPr id="13" name="Text 11"/>
-          <p:cNvSpPr/>
-          <p:nvPr/>
-        </p:nvSpPr>
-        <p:spPr>
-          <a:xfrm>
-            <a:off x="6415888" y="2157984"/>
-            <a:ext cx="4952848" cy="2487168"/>
-          </a:xfrm>
-          <a:prstGeom prst="rect">
-            <a:avLst/>
-          </a:prstGeom>
-          <a:noFill/>
-          <a:ln/>
-        </p:spPr>
-        <p:txBody>
-          <a:bodyPr wrap="square" lIns="0" tIns="0" rIns="0" bIns="0" rtlCol="0" anchor="t"/>
-          <a:lstStyle/>
-          <a:p>
-            <a:pPr indent="0" marL="0">
-              <a:lnSpc>
-                <a:spcPct val="115000"/>
-              </a:lnSpc>
-              <a:buNone/>
-            </a:pPr>
-            <a:r>
-              <a:rPr lang="en-US" sz="1400" dirty="0">
-                <a:solidFill>
-                  <a:srgbClr val="E8F0EC"/>
-                </a:solidFill>
-                <a:latin typeface="Yu Gothic" pitchFamily="34" charset="0"/>
-                <a:ea typeface="Yu Gothic" pitchFamily="34" charset="-122"/>
-                <a:cs typeface="Yu Gothic" pitchFamily="34" charset="-120"/>
-              </a:rPr>
-              <a:t>・情シスが1人、または兼務</a:t>
-            </a:r>
-            <a:endParaRPr lang="en-US" sz="1400" dirty="0"/>
-          </a:p>
-          <a:p>
-            <a:pPr indent="0" marL="0">
-              <a:lnSpc>
-                <a:spcPct val="115000"/>
-              </a:lnSpc>
-              <a:buNone/>
-            </a:pPr>
-            <a:r>
-              <a:rPr lang="en-US" sz="1400" dirty="0">
-                <a:solidFill>
-                  <a:srgbClr val="E8F0EC"/>
-                </a:solidFill>
-                <a:latin typeface="Yu Gothic" pitchFamily="34" charset="0"/>
-                <a:ea typeface="Yu Gothic" pitchFamily="34" charset="-122"/>
-                <a:cs typeface="Yu Gothic" pitchFamily="34" charset="-120"/>
-              </a:rPr>
-              <a:t>・経営層が「ITの問題」と捉えている</a:t>
-            </a:r>
-            <a:endParaRPr lang="en-US" sz="1400" dirty="0"/>
-          </a:p>
-          <a:p>
-            <a:pPr indent="0" marL="0">
-              <a:lnSpc>
-                <a:spcPct val="115000"/>
-              </a:lnSpc>
-              <a:buNone/>
-            </a:pPr>
-            <a:r>
-              <a:rPr lang="en-US" sz="1400" dirty="0">
-                <a:solidFill>
-                  <a:srgbClr val="E8F0EC"/>
-                </a:solidFill>
-                <a:latin typeface="Yu Gothic" pitchFamily="34" charset="0"/>
-                <a:ea typeface="Yu Gothic" pitchFamily="34" charset="-122"/>
-                <a:cs typeface="Yu Gothic" pitchFamily="34" charset="-120"/>
-              </a:rPr>
-              <a:t>・頼る先を、事故が起きてから探す</a:t>
-            </a:r>
-            <a:endParaRPr lang="en-US" sz="1400" dirty="0"/>
-          </a:p>
-        </p:txBody>
-      </p:sp>
-      <p:sp>
-        <p:nvSpPr>
-          <p:cNvPr id="14" name="Shape 12"/>
-          <p:cNvSpPr/>
-          <p:nvPr/>
-        </p:nvSpPr>
-        <p:spPr>
-          <a:xfrm>
-            <a:off x="640080" y="4983480"/>
-            <a:ext cx="10911535" cy="658368"/>
-          </a:xfrm>
-          <a:prstGeom prst="rect">
-            <a:avLst/>
-          </a:prstGeom>
-          <a:solidFill>
-            <a:srgbClr val="F6EBD8"/>
-          </a:solidFill>
-          <a:ln/>
-        </p:spPr>
-      </p:sp>
-      <p:sp>
-        <p:nvSpPr>
-          <p:cNvPr id="15" name="Shape 13"/>
-          <p:cNvSpPr/>
-          <p:nvPr/>
-        </p:nvSpPr>
-        <p:spPr>
-          <a:xfrm>
-            <a:off x="640080" y="4983480"/>
-            <a:ext cx="73152" cy="658368"/>
-          </a:xfrm>
-          <a:prstGeom prst="rect">
-            <a:avLst/>
-          </a:prstGeom>
-          <a:solidFill>
-            <a:srgbClr val="C9821A"/>
-          </a:solidFill>
-          <a:ln/>
-        </p:spPr>
-      </p:sp>
-      <p:sp>
-        <p:nvSpPr>
-          <p:cNvPr id="16" name="Text 14"/>
-          <p:cNvSpPr/>
-          <p:nvPr/>
-        </p:nvSpPr>
-        <p:spPr>
-          <a:xfrm>
-            <a:off x="914400" y="5056632"/>
-            <a:ext cx="10454335" cy="512064"/>
-          </a:xfrm>
-          <a:prstGeom prst="rect">
-            <a:avLst/>
-          </a:prstGeom>
-          <a:noFill/>
-          <a:ln/>
-        </p:spPr>
-        <p:txBody>
-          <a:bodyPr wrap="square" lIns="0" tIns="0" rIns="0" bIns="0" rtlCol="0" anchor="ctr"/>
-          <a:lstStyle/>
-          <a:p>
-            <a:pPr indent="0" marL="0">
-              <a:buNone/>
-            </a:pPr>
-            <a:r>
-              <a:rPr lang="en-US" sz="1400" b="1" dirty="0">
-                <a:solidFill>
-                  <a:srgbClr val="16211F"/>
-                </a:solidFill>
-                <a:latin typeface="Yu Gothic" pitchFamily="34" charset="0"/>
-                <a:ea typeface="Yu Gothic" pitchFamily="34" charset="-122"/>
-                <a:cs typeface="Yu Gothic" pitchFamily="34" charset="-120"/>
-              </a:rPr>
-              <a:t>人を増やすのは難しい。変えられるのは、判断を人から仕組みへ移すことです。</a:t>
-            </a:r>
-            <a:endParaRPr lang="en-US" sz="1400" dirty="0"/>
-          </a:p>
-        </p:txBody>
-      </p:sp>
-    </p:spTree>
-  </p:cSld>
-  <p:clrMapOvr>
-    <a:masterClrMapping/>
-  </p:clrMapOvr>
-</p:sld>
-</file>
-
-<file path=ppt/slides/slide16.xml><?xml version="1.0" encoding="utf-8"?>
-<p:sld xmlns:a="http://schemas.openxmlformats.org/drawingml/2006/main" xmlns:r="http://schemas.openxmlformats.org/officeDocument/2006/relationships" xmlns:p="http://schemas.openxmlformats.org/presentationml/2006/main">
-  <p:cSld name="Slide 16">
-    <p:bg>
-      <p:bgPr>
-        <a:solidFill>
-          <a:srgbClr val="FFFFFF"/>
-        </a:solidFill>
-      </p:bgPr>
-    </p:bg>
-    <p:spTree>
-      <p:nvGrpSpPr>
-        <p:cNvPr id="1" name=""/>
-        <p:cNvGrpSpPr/>
-        <p:nvPr/>
-      </p:nvGrpSpPr>
-      <p:grpSpPr>
-        <a:xfrm>
-          <a:off x="0" y="0"/>
-          <a:ext cx="0" cy="0"/>
-          <a:chOff x="0" y="0"/>
-          <a:chExt cx="0" cy="0"/>
-        </a:xfrm>
-      </p:grpSpPr>
-      <p:sp>
-        <p:nvSpPr>
-          <p:cNvPr id="2" name="Shape 0"/>
-          <p:cNvSpPr/>
-          <p:nvPr/>
-        </p:nvSpPr>
-        <p:spPr>
-          <a:xfrm>
-            <a:off x="0" y="0"/>
-            <a:ext cx="128016" cy="6858000"/>
-          </a:xfrm>
-          <a:prstGeom prst="rect">
-            <a:avLst/>
-          </a:prstGeom>
-          <a:solidFill>
-            <a:srgbClr val="2E7D6B"/>
-          </a:solidFill>
-          <a:ln/>
-        </p:spPr>
-      </p:sp>
-      <p:sp>
-        <p:nvSpPr>
-          <p:cNvPr id="3" name="Text 1"/>
-          <p:cNvSpPr/>
-          <p:nvPr/>
-        </p:nvSpPr>
-        <p:spPr>
-          <a:xfrm>
-            <a:off x="640080" y="292608"/>
-            <a:ext cx="7772400" cy="274320"/>
-          </a:xfrm>
-          <a:prstGeom prst="rect">
-            <a:avLst/>
-          </a:prstGeom>
-          <a:noFill/>
-          <a:ln/>
-        </p:spPr>
-        <p:txBody>
-          <a:bodyPr wrap="square" lIns="0" tIns="0" rIns="0" bIns="0" rtlCol="0" anchor="ctr"/>
-          <a:lstStyle/>
-          <a:p>
-            <a:pPr indent="0" marL="0">
-              <a:buNone/>
-            </a:pPr>
-            <a:r>
-              <a:rPr lang="en-US" sz="1200" b="1" dirty="0">
-                <a:solidFill>
-                  <a:srgbClr val="2E7D6B"/>
-                </a:solidFill>
-                <a:latin typeface="Yu Gothic" pitchFamily="34" charset="0"/>
-                <a:ea typeface="Yu Gothic" pitchFamily="34" charset="-122"/>
-                <a:cs typeface="Yu Gothic" pitchFamily="34" charset="-120"/>
-              </a:rPr>
-              <a:t>第3部　一歩③　判断カード</a:t>
-            </a:r>
-            <a:endParaRPr lang="en-US" sz="1200" dirty="0"/>
-          </a:p>
-        </p:txBody>
-      </p:sp>
-      <p:sp>
-        <p:nvSpPr>
-          <p:cNvPr id="4" name="Text 2"/>
-          <p:cNvSpPr/>
-          <p:nvPr/>
-        </p:nvSpPr>
-        <p:spPr>
-          <a:xfrm>
-            <a:off x="9722815" y="292608"/>
-            <a:ext cx="1828800" cy="274320"/>
-          </a:xfrm>
-          <a:prstGeom prst="rect">
-            <a:avLst/>
-          </a:prstGeom>
-          <a:noFill/>
-          <a:ln/>
-        </p:spPr>
-        <p:txBody>
-          <a:bodyPr wrap="square" lIns="0" tIns="0" rIns="0" bIns="0" rtlCol="0" anchor="ctr"/>
-          <a:lstStyle/>
-          <a:p>
-            <a:pPr algn="r" indent="0" marL="0">
-              <a:buNone/>
-            </a:pPr>
-            <a:r>
-              <a:rPr lang="en-US" sz="1100" dirty="0">
-                <a:solidFill>
-                  <a:srgbClr val="5E6E6A"/>
-                </a:solidFill>
-                <a:latin typeface="Yu Gothic" pitchFamily="34" charset="0"/>
-                <a:ea typeface="Yu Gothic" pitchFamily="34" charset="-122"/>
-                <a:cs typeface="Yu Gothic" pitchFamily="34" charset="-120"/>
-              </a:rPr>
-              <a:t>6分</a:t>
-            </a:r>
-            <a:endParaRPr lang="en-US" sz="1100" dirty="0"/>
-          </a:p>
-        </p:txBody>
-      </p:sp>
-      <p:sp>
-        <p:nvSpPr>
-          <p:cNvPr id="5" name="Text 3"/>
-          <p:cNvSpPr/>
-          <p:nvPr/>
-        </p:nvSpPr>
-        <p:spPr>
-          <a:xfrm>
-            <a:off x="640080" y="621792"/>
-            <a:ext cx="10911535" cy="685800"/>
-          </a:xfrm>
-          <a:prstGeom prst="rect">
-            <a:avLst/>
-          </a:prstGeom>
-          <a:noFill/>
-          <a:ln/>
-        </p:spPr>
-        <p:txBody>
-          <a:bodyPr wrap="square" lIns="0" tIns="0" rIns="0" bIns="0" rtlCol="0" anchor="t"/>
-          <a:lstStyle/>
-          <a:p>
-            <a:pPr indent="0" marL="0">
-              <a:buNone/>
-            </a:pPr>
-            <a:r>
-              <a:rPr lang="en-US" sz="2600" b="1" dirty="0">
-                <a:solidFill>
-                  <a:srgbClr val="16211F"/>
-                </a:solidFill>
-                <a:latin typeface="Yu Gothic" pitchFamily="34" charset="0"/>
-                <a:ea typeface="Yu Gothic" pitchFamily="34" charset="-122"/>
-                <a:cs typeface="Yu Gothic" pitchFamily="34" charset="-120"/>
-              </a:rPr>
-              <a:t>5つの判断を、1枚ずつ「判断カード」にしておきます</a:t>
-            </a:r>
-            <a:endParaRPr lang="en-US" sz="2600" dirty="0"/>
-          </a:p>
-        </p:txBody>
-      </p:sp>
-      <p:sp>
-        <p:nvSpPr>
-          <p:cNvPr id="6" name="Text 4"/>
-          <p:cNvSpPr/>
-          <p:nvPr/>
-        </p:nvSpPr>
-        <p:spPr>
-          <a:xfrm>
-            <a:off x="10180015" y="6446520"/>
-            <a:ext cx="1371600" cy="228600"/>
-          </a:xfrm>
-          <a:prstGeom prst="rect">
-            <a:avLst/>
-          </a:prstGeom>
-          <a:noFill/>
-          <a:ln/>
-        </p:spPr>
-        <p:txBody>
-          <a:bodyPr wrap="square" lIns="0" tIns="0" rIns="0" bIns="0" rtlCol="0" anchor="ctr"/>
-          <a:lstStyle/>
-          <a:p>
-            <a:pPr algn="r" indent="0" marL="0">
-              <a:buNone/>
-            </a:pPr>
-            <a:r>
-              <a:rPr lang="en-US" sz="900" dirty="0">
-                <a:solidFill>
-                  <a:srgbClr val="5E6E6A"/>
-                </a:solidFill>
-                <a:latin typeface="Yu Gothic" pitchFamily="34" charset="0"/>
-                <a:ea typeface="Yu Gothic" pitchFamily="34" charset="-122"/>
-                <a:cs typeface="Yu Gothic" pitchFamily="34" charset="-120"/>
-              </a:rPr>
-              <a:t>16 / 24</a:t>
-            </a:r>
-            <a:endParaRPr lang="en-US" sz="900" dirty="0"/>
-          </a:p>
-        </p:txBody>
-      </p:sp>
-      <p:sp>
-        <p:nvSpPr>
-          <p:cNvPr id="7" name="Text 5"/>
-          <p:cNvSpPr/>
-          <p:nvPr/>
-        </p:nvSpPr>
-        <p:spPr>
-          <a:xfrm>
-            <a:off x="640080" y="6446520"/>
-            <a:ext cx="6400800" cy="228600"/>
-          </a:xfrm>
-          <a:prstGeom prst="rect">
-            <a:avLst/>
-          </a:prstGeom>
-          <a:noFill/>
-          <a:ln/>
-        </p:spPr>
-        <p:txBody>
-          <a:bodyPr wrap="square" lIns="0" tIns="0" rIns="0" bIns="0" rtlCol="0" anchor="ctr"/>
-          <a:lstStyle/>
-          <a:p>
-            <a:pPr indent="0" marL="0">
-              <a:buNone/>
-            </a:pPr>
-            <a:r>
-              <a:rPr lang="en-US" sz="900" dirty="0">
-                <a:solidFill>
-                  <a:srgbClr val="9FB2AD"/>
-                </a:solidFill>
-                <a:latin typeface="Yu Gothic" pitchFamily="34" charset="0"/>
-                <a:ea typeface="Yu Gothic" pitchFamily="34" charset="-122"/>
-                <a:cs typeface="Yu Gothic" pitchFamily="34" charset="-120"/>
-              </a:rPr>
-              <a:t>Security Days Fall 2026 Fukuoka　FB-05　小出 洋（九州大学）</a:t>
-            </a:r>
-            <a:endParaRPr lang="en-US" sz="900" dirty="0"/>
-          </a:p>
-        </p:txBody>
-      </p:sp>
       <p:graphicFrame>
         <p:nvGraphicFramePr>
-          <p:cNvPr id="17" name="Table 0"/>
+          <p:cNvPr id="18" name="Table 0"/>
           <p:cNvGraphicFramePr>
             <a:graphicFrameLocks noGrp="1"/>
           </p:cNvGraphicFramePr>
@@ -8086,7 +9041,7 @@
                           <a:ea typeface="Yu Gothic" pitchFamily="34" charset="-122"/>
                           <a:cs typeface="Yu Gothic" pitchFamily="34" charset="-120"/>
                         </a:rPr>
-                        <a:t>記入例：「一部サービスを止めるか」</a:t>
+                        <a:t>記入例：「リリース・サービスを止めるか」</a:t>
                       </a:r>
                       <a:endParaRPr lang="en-US" sz="1300" dirty="0">
                         <a:latin typeface="Yu Gothic" charset="0"/>
@@ -8294,7 +9249,7 @@
                           <a:ea typeface="Yu Gothic" pitchFamily="34" charset="-122"/>
                           <a:cs typeface="Yu Gothic" pitchFamily="34" charset="-120"/>
                         </a:rPr>
-                        <a:t>判断の材料</a:t>
+                        <a:t>確認する順番</a:t>
                       </a:r>
                       <a:endParaRPr lang="en-US" sz="1300" dirty="0">
                         <a:latin typeface="Yu Gothic" charset="0"/>
@@ -8362,7 +9317,7 @@
                           <a:ea typeface="Yu Gothic" pitchFamily="34" charset="-122"/>
                           <a:cs typeface="Yu Gothic" pitchFamily="34" charset="-120"/>
                         </a:rPr>
-                        <a:t>影響範囲、顧客への影響、復旧見込み。材料のうち AI に出させるものに印をつける</a:t>
+                        <a:t>露出 → 実際に使っているか → 顧客・業務への影響 → 停止以外の緩和策</a:t>
                       </a:r>
                       <a:endParaRPr lang="en-US" sz="1300" dirty="0">
                         <a:latin typeface="Yu Gothic" charset="0"/>
@@ -8432,7 +9387,7 @@
                           <a:ea typeface="Yu Gothic" pitchFamily="34" charset="-122"/>
                           <a:cs typeface="Yu Gothic" pitchFamily="34" charset="-120"/>
                         </a:rPr>
-                        <a:t>任せ方の段階</a:t>
+                        <a:t>AIに出させるもの</a:t>
                       </a:r>
                       <a:endParaRPr lang="en-US" sz="1300" dirty="0">
                         <a:latin typeface="Yu Gothic" charset="0"/>
@@ -8500,7 +9455,7 @@
                           <a:ea typeface="Yu Gothic" pitchFamily="34" charset="-122"/>
                           <a:cs typeface="Yu Gothic" pitchFamily="34" charset="-120"/>
                         </a:rPr>
-                        <a:t>人の承認つき（端末隔離までは自動）</a:t>
+                        <a:t>影響範囲の候補、選択肢とその根拠、反対の立場からの指摘</a:t>
                       </a:r>
                       <a:endParaRPr lang="en-US" sz="1300" dirty="0">
                         <a:latin typeface="Yu Gothic" charset="0"/>
@@ -8570,7 +9525,7 @@
                           <a:ea typeface="Yu Gothic" pitchFamily="34" charset="-122"/>
                           <a:cs typeface="Yu Gothic" pitchFamily="34" charset="-120"/>
                         </a:rPr>
-                        <a:t>いつまでに決めるか</a:t>
+                        <a:t>期限と見直し</a:t>
                       </a:r>
                       <a:endParaRPr lang="en-US" sz="1300" dirty="0">
                         <a:latin typeface="Yu Gothic" charset="0"/>
@@ -8638,7 +9593,7 @@
                           <a:ea typeface="Yu Gothic" pitchFamily="34" charset="-122"/>
                           <a:cs typeface="Yu Gothic" pitchFamily="34" charset="-120"/>
                         </a:rPr>
-                        <a:t>検知から○時間以内に暫定判断。○時間ごとに見直す</a:t>
+                        <a:t>公表から○時間以内に暫定判断。○時間ごとに見直す。覆す条件</a:t>
                       </a:r>
                       <a:endParaRPr lang="en-US" sz="1300" dirty="0">
                         <a:latin typeface="Yu Gothic" charset="0"/>
@@ -8708,7 +9663,7 @@
                           <a:ea typeface="Yu Gothic" pitchFamily="34" charset="-122"/>
                           <a:cs typeface="Yu Gothic" pitchFamily="34" charset="-120"/>
                         </a:rPr>
-                        <a:t>決めたら誰に伝えるか</a:t>
+                        <a:t>伝える先</a:t>
                       </a:r>
                       <a:endParaRPr lang="en-US" sz="1300" dirty="0">
                         <a:latin typeface="Yu Gothic" charset="0"/>
@@ -8776,7 +9731,7 @@
                           <a:ea typeface="Yu Gothic" pitchFamily="34" charset="-122"/>
                           <a:cs typeface="Yu Gothic" pitchFamily="34" charset="-120"/>
                         </a:rPr>
-                        <a:t>経営層、広報、主要取引先の窓口、委託先</a:t>
+                        <a:t>経営層、広報、主要顧客の窓口、委託先</a:t>
                       </a:r>
                       <a:endParaRPr lang="en-US" sz="1300" dirty="0">
                         <a:latin typeface="Yu Gothic" charset="0"/>
@@ -8914,7 +9869,7 @@
                           <a:ea typeface="Yu Gothic" pitchFamily="34" charset="-122"/>
                           <a:cs typeface="Yu Gothic" pitchFamily="34" charset="-120"/>
                         </a:rPr>
-                        <a:t>保守ベンダー、インシデント対応事業者、保険会社、警察の相談窓口</a:t>
+                        <a:t>保守ベンダー、インシデント対応事業者、保険、警察の相談窓口、地域の協議会</a:t>
                       </a:r>
                       <a:endParaRPr lang="en-US" sz="1300" dirty="0">
                         <a:latin typeface="Yu Gothic" charset="0"/>
@@ -9043,942 +9998,7 @@
                 <a:ea typeface="Yu Gothic" pitchFamily="34" charset="-122"/>
                 <a:cs typeface="Yu Gothic" pitchFamily="34" charset="-120"/>
               </a:rPr>
-              <a:t>BCPや手順書には「作業」は書いてあっても「判断」が書かれていないことが多い。判断だけを抜き出します。</a:t>
-            </a:r>
-            <a:endParaRPr lang="en-US" sz="1400" dirty="0"/>
-          </a:p>
-        </p:txBody>
-      </p:sp>
-    </p:spTree>
-  </p:cSld>
-  <p:clrMapOvr>
-    <a:masterClrMapping/>
-  </p:clrMapOvr>
-</p:sld>
-</file>
-
-<file path=ppt/slides/slide17.xml><?xml version="1.0" encoding="utf-8"?>
-<p:sld xmlns:a="http://schemas.openxmlformats.org/drawingml/2006/main" xmlns:r="http://schemas.openxmlformats.org/officeDocument/2006/relationships" xmlns:p="http://schemas.openxmlformats.org/presentationml/2006/main">
-  <p:cSld name="Slide 17">
-    <p:bg>
-      <p:bgPr>
-        <a:solidFill>
-          <a:srgbClr val="FFFFFF"/>
-        </a:solidFill>
-      </p:bgPr>
-    </p:bg>
-    <p:spTree>
-      <p:nvGrpSpPr>
-        <p:cNvPr id="1" name=""/>
-        <p:cNvGrpSpPr/>
-        <p:nvPr/>
-      </p:nvGrpSpPr>
-      <p:grpSpPr>
-        <a:xfrm>
-          <a:off x="0" y="0"/>
-          <a:ext cx="0" cy="0"/>
-          <a:chOff x="0" y="0"/>
-          <a:chExt cx="0" cy="0"/>
-        </a:xfrm>
-      </p:grpSpPr>
-      <p:sp>
-        <p:nvSpPr>
-          <p:cNvPr id="2" name="Shape 0"/>
-          <p:cNvSpPr/>
-          <p:nvPr/>
-        </p:nvSpPr>
-        <p:spPr>
-          <a:xfrm>
-            <a:off x="0" y="0"/>
-            <a:ext cx="128016" cy="6858000"/>
-          </a:xfrm>
-          <a:prstGeom prst="rect">
-            <a:avLst/>
-          </a:prstGeom>
-          <a:solidFill>
-            <a:srgbClr val="2E7D6B"/>
-          </a:solidFill>
-          <a:ln/>
-        </p:spPr>
-      </p:sp>
-      <p:sp>
-        <p:nvSpPr>
-          <p:cNvPr id="3" name="Text 1"/>
-          <p:cNvSpPr/>
-          <p:nvPr/>
-        </p:nvSpPr>
-        <p:spPr>
-          <a:xfrm>
-            <a:off x="640080" y="292608"/>
-            <a:ext cx="7772400" cy="274320"/>
-          </a:xfrm>
-          <a:prstGeom prst="rect">
-            <a:avLst/>
-          </a:prstGeom>
-          <a:noFill/>
-          <a:ln/>
-        </p:spPr>
-        <p:txBody>
-          <a:bodyPr wrap="square" lIns="0" tIns="0" rIns="0" bIns="0" rtlCol="0" anchor="ctr"/>
-          <a:lstStyle/>
-          <a:p>
-            <a:pPr indent="0" marL="0">
-              <a:buNone/>
-            </a:pPr>
-            <a:r>
-              <a:rPr lang="en-US" sz="1200" b="1" dirty="0">
-                <a:solidFill>
-                  <a:srgbClr val="2E7D6B"/>
-                </a:solidFill>
-                <a:latin typeface="Yu Gothic" pitchFamily="34" charset="0"/>
-                <a:ea typeface="Yu Gothic" pitchFamily="34" charset="-122"/>
-                <a:cs typeface="Yu Gothic" pitchFamily="34" charset="-120"/>
-              </a:rPr>
-              <a:t>第3部　限られた人員で回す</a:t>
-            </a:r>
-            <a:endParaRPr lang="en-US" sz="1200" dirty="0"/>
-          </a:p>
-        </p:txBody>
-      </p:sp>
-      <p:sp>
-        <p:nvSpPr>
-          <p:cNvPr id="4" name="Text 2"/>
-          <p:cNvSpPr/>
-          <p:nvPr/>
-        </p:nvSpPr>
-        <p:spPr>
-          <a:xfrm>
-            <a:off x="9722815" y="292608"/>
-            <a:ext cx="1828800" cy="274320"/>
-          </a:xfrm>
-          <a:prstGeom prst="rect">
-            <a:avLst/>
-          </a:prstGeom>
-          <a:noFill/>
-          <a:ln/>
-        </p:spPr>
-        <p:txBody>
-          <a:bodyPr wrap="square" lIns="0" tIns="0" rIns="0" bIns="0" rtlCol="0" anchor="ctr"/>
-          <a:lstStyle/>
-          <a:p>
-            <a:pPr algn="r" indent="0" marL="0">
-              <a:buNone/>
-            </a:pPr>
-            <a:r>
-              <a:rPr lang="en-US" sz="1100" dirty="0">
-                <a:solidFill>
-                  <a:srgbClr val="5E6E6A"/>
-                </a:solidFill>
-                <a:latin typeface="Yu Gothic" pitchFamily="34" charset="0"/>
-                <a:ea typeface="Yu Gothic" pitchFamily="34" charset="-122"/>
-                <a:cs typeface="Yu Gothic" pitchFamily="34" charset="-120"/>
-              </a:rPr>
-              <a:t>6分</a:t>
-            </a:r>
-            <a:endParaRPr lang="en-US" sz="1100" dirty="0"/>
-          </a:p>
-        </p:txBody>
-      </p:sp>
-      <p:sp>
-        <p:nvSpPr>
-          <p:cNvPr id="5" name="Text 3"/>
-          <p:cNvSpPr/>
-          <p:nvPr/>
-        </p:nvSpPr>
-        <p:spPr>
-          <a:xfrm>
-            <a:off x="640080" y="621792"/>
-            <a:ext cx="10911535" cy="685800"/>
-          </a:xfrm>
-          <a:prstGeom prst="rect">
-            <a:avLst/>
-          </a:prstGeom>
-          <a:noFill/>
-          <a:ln/>
-        </p:spPr>
-        <p:txBody>
-          <a:bodyPr wrap="square" lIns="0" tIns="0" rIns="0" bIns="0" rtlCol="0" anchor="t"/>
-          <a:lstStyle/>
-          <a:p>
-            <a:pPr indent="0" marL="0">
-              <a:buNone/>
-            </a:pPr>
-            <a:r>
-              <a:rPr lang="en-US" sz="2600" b="1" dirty="0">
-                <a:solidFill>
-                  <a:srgbClr val="16211F"/>
-                </a:solidFill>
-                <a:latin typeface="Yu Gothic" pitchFamily="34" charset="0"/>
-                <a:ea typeface="Yu Gothic" pitchFamily="34" charset="-122"/>
-                <a:cs typeface="Yu Gothic" pitchFamily="34" charset="-120"/>
-              </a:rPr>
-              <a:t>一つの判断は、部門と組織の境界をまたいで伝わります</a:t>
-            </a:r>
-            <a:endParaRPr lang="en-US" sz="2600" dirty="0"/>
-          </a:p>
-        </p:txBody>
-      </p:sp>
-      <p:sp>
-        <p:nvSpPr>
-          <p:cNvPr id="6" name="Text 4"/>
-          <p:cNvSpPr/>
-          <p:nvPr/>
-        </p:nvSpPr>
-        <p:spPr>
-          <a:xfrm>
-            <a:off x="10180015" y="6446520"/>
-            <a:ext cx="1371600" cy="228600"/>
-          </a:xfrm>
-          <a:prstGeom prst="rect">
-            <a:avLst/>
-          </a:prstGeom>
-          <a:noFill/>
-          <a:ln/>
-        </p:spPr>
-        <p:txBody>
-          <a:bodyPr wrap="square" lIns="0" tIns="0" rIns="0" bIns="0" rtlCol="0" anchor="ctr"/>
-          <a:lstStyle/>
-          <a:p>
-            <a:pPr algn="r" indent="0" marL="0">
-              <a:buNone/>
-            </a:pPr>
-            <a:r>
-              <a:rPr lang="en-US" sz="900" dirty="0">
-                <a:solidFill>
-                  <a:srgbClr val="5E6E6A"/>
-                </a:solidFill>
-                <a:latin typeface="Yu Gothic" pitchFamily="34" charset="0"/>
-                <a:ea typeface="Yu Gothic" pitchFamily="34" charset="-122"/>
-                <a:cs typeface="Yu Gothic" pitchFamily="34" charset="-120"/>
-              </a:rPr>
-              <a:t>17 / 24</a:t>
-            </a:r>
-            <a:endParaRPr lang="en-US" sz="900" dirty="0"/>
-          </a:p>
-        </p:txBody>
-      </p:sp>
-      <p:sp>
-        <p:nvSpPr>
-          <p:cNvPr id="7" name="Text 5"/>
-          <p:cNvSpPr/>
-          <p:nvPr/>
-        </p:nvSpPr>
-        <p:spPr>
-          <a:xfrm>
-            <a:off x="640080" y="6446520"/>
-            <a:ext cx="6400800" cy="228600"/>
-          </a:xfrm>
-          <a:prstGeom prst="rect">
-            <a:avLst/>
-          </a:prstGeom>
-          <a:noFill/>
-          <a:ln/>
-        </p:spPr>
-        <p:txBody>
-          <a:bodyPr wrap="square" lIns="0" tIns="0" rIns="0" bIns="0" rtlCol="0" anchor="ctr"/>
-          <a:lstStyle/>
-          <a:p>
-            <a:pPr indent="0" marL="0">
-              <a:buNone/>
-            </a:pPr>
-            <a:r>
-              <a:rPr lang="en-US" sz="900" dirty="0">
-                <a:solidFill>
-                  <a:srgbClr val="9FB2AD"/>
-                </a:solidFill>
-                <a:latin typeface="Yu Gothic" pitchFamily="34" charset="0"/>
-                <a:ea typeface="Yu Gothic" pitchFamily="34" charset="-122"/>
-                <a:cs typeface="Yu Gothic" pitchFamily="34" charset="-120"/>
-              </a:rPr>
-              <a:t>Security Days Fall 2026 Fukuoka　FB-05　小出 洋（九州大学）</a:t>
-            </a:r>
-            <a:endParaRPr lang="en-US" sz="900" dirty="0"/>
-          </a:p>
-        </p:txBody>
-      </p:sp>
-      <p:sp>
-        <p:nvSpPr>
-          <p:cNvPr id="8" name="Shape 6"/>
-          <p:cNvSpPr/>
-          <p:nvPr/>
-        </p:nvSpPr>
-        <p:spPr>
-          <a:xfrm>
-            <a:off x="640080" y="1508760"/>
-            <a:ext cx="2439848" cy="3017520"/>
-          </a:xfrm>
-          <a:prstGeom prst="roundRect">
-            <a:avLst>
-              <a:gd name="adj" fmla="val 1874"/>
-            </a:avLst>
-          </a:prstGeom>
-          <a:solidFill>
-            <a:srgbClr val="EDF3F1"/>
-          </a:solidFill>
-          <a:ln w="9525">
-            <a:solidFill>
-              <a:srgbClr val="C9D5D1"/>
-            </a:solidFill>
-            <a:prstDash val="solid"/>
-          </a:ln>
-        </p:spPr>
-      </p:sp>
-      <p:sp>
-        <p:nvSpPr>
-          <p:cNvPr id="9" name="Text 7"/>
-          <p:cNvSpPr/>
-          <p:nvPr/>
-        </p:nvSpPr>
-        <p:spPr>
-          <a:xfrm>
-            <a:off x="822960" y="1655064"/>
-            <a:ext cx="2074088" cy="411480"/>
-          </a:xfrm>
-          <a:prstGeom prst="rect">
-            <a:avLst/>
-          </a:prstGeom>
-          <a:noFill/>
-          <a:ln/>
-        </p:spPr>
-        <p:txBody>
-          <a:bodyPr wrap="square" lIns="0" tIns="0" rIns="0" bIns="0" rtlCol="0" anchor="t"/>
-          <a:lstStyle/>
-          <a:p>
-            <a:pPr indent="0" marL="0">
-              <a:buNone/>
-            </a:pPr>
-            <a:r>
-              <a:rPr lang="en-US" sz="1600" b="1" dirty="0">
-                <a:solidFill>
-                  <a:srgbClr val="2E7D6B"/>
-                </a:solidFill>
-                <a:latin typeface="Yu Gothic" pitchFamily="34" charset="0"/>
-                <a:ea typeface="Yu Gothic" pitchFamily="34" charset="-122"/>
-                <a:cs typeface="Yu Gothic" pitchFamily="34" charset="-120"/>
-              </a:rPr>
-              <a:t>技術</a:t>
-            </a:r>
-            <a:endParaRPr lang="en-US" sz="1600" dirty="0"/>
-          </a:p>
-        </p:txBody>
-      </p:sp>
-      <p:sp>
-        <p:nvSpPr>
-          <p:cNvPr id="10" name="Text 8"/>
-          <p:cNvSpPr/>
-          <p:nvPr/>
-        </p:nvSpPr>
-        <p:spPr>
-          <a:xfrm>
-            <a:off x="822960" y="2157984"/>
-            <a:ext cx="2074088" cy="2258568"/>
-          </a:xfrm>
-          <a:prstGeom prst="rect">
-            <a:avLst/>
-          </a:prstGeom>
-          <a:noFill/>
-          <a:ln/>
-        </p:spPr>
-        <p:txBody>
-          <a:bodyPr wrap="square" lIns="0" tIns="0" rIns="0" bIns="0" rtlCol="0" anchor="t"/>
-          <a:lstStyle/>
-          <a:p>
-            <a:pPr indent="0" marL="0">
-              <a:lnSpc>
-                <a:spcPct val="115000"/>
-              </a:lnSpc>
-              <a:buNone/>
-            </a:pPr>
-            <a:r>
-              <a:rPr lang="en-US" sz="1400" dirty="0">
-                <a:solidFill>
-                  <a:srgbClr val="16211F"/>
-                </a:solidFill>
-                <a:latin typeface="Yu Gothic" pitchFamily="34" charset="0"/>
-                <a:ea typeface="Yu Gothic" pitchFamily="34" charset="-122"/>
-                <a:cs typeface="Yu Gothic" pitchFamily="34" charset="-120"/>
-              </a:rPr>
-              <a:t>何が起きているか</a:t>
-            </a:r>
-            <a:endParaRPr lang="en-US" sz="1400" dirty="0"/>
-          </a:p>
-          <a:p>
-            <a:pPr indent="0" marL="0">
-              <a:lnSpc>
-                <a:spcPct val="115000"/>
-              </a:lnSpc>
-              <a:buNone/>
-            </a:pPr>
-            <a:r>
-              <a:rPr lang="en-US" sz="1400" dirty="0">
-                <a:solidFill>
-                  <a:srgbClr val="16211F"/>
-                </a:solidFill>
-                <a:latin typeface="Yu Gothic" pitchFamily="34" charset="0"/>
-                <a:ea typeface="Yu Gothic" pitchFamily="34" charset="-122"/>
-                <a:cs typeface="Yu Gothic" pitchFamily="34" charset="-120"/>
-              </a:rPr>
-              <a:t>（AIが材料をそろえ、</a:t>
-            </a:r>
-            <a:endParaRPr lang="en-US" sz="1400" dirty="0"/>
-          </a:p>
-          <a:p>
-            <a:pPr indent="0" marL="0">
-              <a:lnSpc>
-                <a:spcPct val="115000"/>
-              </a:lnSpc>
-              <a:buNone/>
-            </a:pPr>
-            <a:r>
-              <a:rPr lang="en-US" sz="1400" dirty="0">
-                <a:solidFill>
-                  <a:srgbClr val="16211F"/>
-                </a:solidFill>
-                <a:latin typeface="Yu Gothic" pitchFamily="34" charset="0"/>
-                <a:ea typeface="Yu Gothic" pitchFamily="34" charset="-122"/>
-                <a:cs typeface="Yu Gothic" pitchFamily="34" charset="-120"/>
-              </a:rPr>
-              <a:t>人が確かめる）</a:t>
-            </a:r>
-            <a:endParaRPr lang="en-US" sz="1400" dirty="0"/>
-          </a:p>
-        </p:txBody>
-      </p:sp>
-      <p:sp>
-        <p:nvSpPr>
-          <p:cNvPr id="11" name="Shape 9"/>
-          <p:cNvSpPr/>
-          <p:nvPr/>
-        </p:nvSpPr>
-        <p:spPr>
-          <a:xfrm>
-            <a:off x="3143936" y="2852928"/>
-            <a:ext cx="256032" cy="329184"/>
-          </a:xfrm>
-          <a:prstGeom prst="rightArrow">
-            <a:avLst/>
-          </a:prstGeom>
-          <a:solidFill>
-            <a:srgbClr val="C9D5D1"/>
-          </a:solidFill>
-          <a:ln/>
-        </p:spPr>
-      </p:sp>
-      <p:sp>
-        <p:nvSpPr>
-          <p:cNvPr id="12" name="Shape 10"/>
-          <p:cNvSpPr/>
-          <p:nvPr/>
-        </p:nvSpPr>
-        <p:spPr>
-          <a:xfrm>
-            <a:off x="3463976" y="1508760"/>
-            <a:ext cx="2439848" cy="3017520"/>
-          </a:xfrm>
-          <a:prstGeom prst="roundRect">
-            <a:avLst>
-              <a:gd name="adj" fmla="val 1874"/>
-            </a:avLst>
-          </a:prstGeom>
-          <a:solidFill>
-            <a:srgbClr val="EDF3F1"/>
-          </a:solidFill>
-          <a:ln w="9525">
-            <a:solidFill>
-              <a:srgbClr val="C9D5D1"/>
-            </a:solidFill>
-            <a:prstDash val="solid"/>
-          </a:ln>
-        </p:spPr>
-      </p:sp>
-      <p:sp>
-        <p:nvSpPr>
-          <p:cNvPr id="13" name="Text 11"/>
-          <p:cNvSpPr/>
-          <p:nvPr/>
-        </p:nvSpPr>
-        <p:spPr>
-          <a:xfrm>
-            <a:off x="3646856" y="1655064"/>
-            <a:ext cx="2074088" cy="411480"/>
-          </a:xfrm>
-          <a:prstGeom prst="rect">
-            <a:avLst/>
-          </a:prstGeom>
-          <a:noFill/>
-          <a:ln/>
-        </p:spPr>
-        <p:txBody>
-          <a:bodyPr wrap="square" lIns="0" tIns="0" rIns="0" bIns="0" rtlCol="0" anchor="t"/>
-          <a:lstStyle/>
-          <a:p>
-            <a:pPr indent="0" marL="0">
-              <a:buNone/>
-            </a:pPr>
-            <a:r>
-              <a:rPr lang="en-US" sz="1600" b="1" dirty="0">
-                <a:solidFill>
-                  <a:srgbClr val="2E7D6B"/>
-                </a:solidFill>
-                <a:latin typeface="Yu Gothic" pitchFamily="34" charset="0"/>
-                <a:ea typeface="Yu Gothic" pitchFamily="34" charset="-122"/>
-                <a:cs typeface="Yu Gothic" pitchFamily="34" charset="-120"/>
-              </a:rPr>
-              <a:t>経営</a:t>
-            </a:r>
-            <a:endParaRPr lang="en-US" sz="1600" dirty="0"/>
-          </a:p>
-        </p:txBody>
-      </p:sp>
-      <p:sp>
-        <p:nvSpPr>
-          <p:cNvPr id="14" name="Text 12"/>
-          <p:cNvSpPr/>
-          <p:nvPr/>
-        </p:nvSpPr>
-        <p:spPr>
-          <a:xfrm>
-            <a:off x="3646856" y="2157984"/>
-            <a:ext cx="2074088" cy="2258568"/>
-          </a:xfrm>
-          <a:prstGeom prst="rect">
-            <a:avLst/>
-          </a:prstGeom>
-          <a:noFill/>
-          <a:ln/>
-        </p:spPr>
-        <p:txBody>
-          <a:bodyPr wrap="square" lIns="0" tIns="0" rIns="0" bIns="0" rtlCol="0" anchor="t"/>
-          <a:lstStyle/>
-          <a:p>
-            <a:pPr indent="0" marL="0">
-              <a:lnSpc>
-                <a:spcPct val="115000"/>
-              </a:lnSpc>
-              <a:buNone/>
-            </a:pPr>
-            <a:r>
-              <a:rPr lang="en-US" sz="1400" dirty="0">
-                <a:solidFill>
-                  <a:srgbClr val="16211F"/>
-                </a:solidFill>
-                <a:latin typeface="Yu Gothic" pitchFamily="34" charset="0"/>
-                <a:ea typeface="Yu Gothic" pitchFamily="34" charset="-122"/>
-                <a:cs typeface="Yu Gothic" pitchFamily="34" charset="-120"/>
-              </a:rPr>
-              <a:t>止めるか・続けるか</a:t>
-            </a:r>
-            <a:endParaRPr lang="en-US" sz="1400" dirty="0"/>
-          </a:p>
-          <a:p>
-            <a:pPr indent="0" marL="0">
-              <a:lnSpc>
-                <a:spcPct val="115000"/>
-              </a:lnSpc>
-              <a:buNone/>
-            </a:pPr>
-            <a:r>
-              <a:rPr lang="en-US" sz="1400" dirty="0">
-                <a:solidFill>
-                  <a:srgbClr val="16211F"/>
-                </a:solidFill>
-                <a:latin typeface="Yu Gothic" pitchFamily="34" charset="0"/>
-                <a:ea typeface="Yu Gothic" pitchFamily="34" charset="-122"/>
-                <a:cs typeface="Yu Gothic" pitchFamily="34" charset="-120"/>
-              </a:rPr>
-              <a:t>を暫定で決める</a:t>
-            </a:r>
-            <a:endParaRPr lang="en-US" sz="1400" dirty="0"/>
-          </a:p>
-        </p:txBody>
-      </p:sp>
-      <p:sp>
-        <p:nvSpPr>
-          <p:cNvPr id="15" name="Shape 13"/>
-          <p:cNvSpPr/>
-          <p:nvPr/>
-        </p:nvSpPr>
-        <p:spPr>
-          <a:xfrm>
-            <a:off x="5967832" y="2852928"/>
-            <a:ext cx="256032" cy="329184"/>
-          </a:xfrm>
-          <a:prstGeom prst="rightArrow">
-            <a:avLst/>
-          </a:prstGeom>
-          <a:solidFill>
-            <a:srgbClr val="C9D5D1"/>
-          </a:solidFill>
-          <a:ln/>
-        </p:spPr>
-      </p:sp>
-      <p:sp>
-        <p:nvSpPr>
-          <p:cNvPr id="16" name="Shape 14"/>
-          <p:cNvSpPr/>
-          <p:nvPr/>
-        </p:nvSpPr>
-        <p:spPr>
-          <a:xfrm>
-            <a:off x="6287872" y="1508760"/>
-            <a:ext cx="2439848" cy="3017520"/>
-          </a:xfrm>
-          <a:prstGeom prst="roundRect">
-            <a:avLst>
-              <a:gd name="adj" fmla="val 1874"/>
-            </a:avLst>
-          </a:prstGeom>
-          <a:solidFill>
-            <a:srgbClr val="EDF3F1"/>
-          </a:solidFill>
-          <a:ln w="9525">
-            <a:solidFill>
-              <a:srgbClr val="C9D5D1"/>
-            </a:solidFill>
-            <a:prstDash val="solid"/>
-          </a:ln>
-        </p:spPr>
-      </p:sp>
-      <p:sp>
-        <p:nvSpPr>
-          <p:cNvPr id="17" name="Text 15"/>
-          <p:cNvSpPr/>
-          <p:nvPr/>
-        </p:nvSpPr>
-        <p:spPr>
-          <a:xfrm>
-            <a:off x="6470752" y="1655064"/>
-            <a:ext cx="2074088" cy="411480"/>
-          </a:xfrm>
-          <a:prstGeom prst="rect">
-            <a:avLst/>
-          </a:prstGeom>
-          <a:noFill/>
-          <a:ln/>
-        </p:spPr>
-        <p:txBody>
-          <a:bodyPr wrap="square" lIns="0" tIns="0" rIns="0" bIns="0" rtlCol="0" anchor="t"/>
-          <a:lstStyle/>
-          <a:p>
-            <a:pPr indent="0" marL="0">
-              <a:buNone/>
-            </a:pPr>
-            <a:r>
-              <a:rPr lang="en-US" sz="1600" b="1" dirty="0">
-                <a:solidFill>
-                  <a:srgbClr val="2E7D6B"/>
-                </a:solidFill>
-                <a:latin typeface="Yu Gothic" pitchFamily="34" charset="0"/>
-                <a:ea typeface="Yu Gothic" pitchFamily="34" charset="-122"/>
-                <a:cs typeface="Yu Gothic" pitchFamily="34" charset="-120"/>
-              </a:rPr>
-              <a:t>広報・法務</a:t>
-            </a:r>
-            <a:endParaRPr lang="en-US" sz="1600" dirty="0"/>
-          </a:p>
-        </p:txBody>
-      </p:sp>
-      <p:sp>
-        <p:nvSpPr>
-          <p:cNvPr id="18" name="Text 16"/>
-          <p:cNvSpPr/>
-          <p:nvPr/>
-        </p:nvSpPr>
-        <p:spPr>
-          <a:xfrm>
-            <a:off x="6470752" y="2157984"/>
-            <a:ext cx="2074088" cy="2258568"/>
-          </a:xfrm>
-          <a:prstGeom prst="rect">
-            <a:avLst/>
-          </a:prstGeom>
-          <a:noFill/>
-          <a:ln/>
-        </p:spPr>
-        <p:txBody>
-          <a:bodyPr wrap="square" lIns="0" tIns="0" rIns="0" bIns="0" rtlCol="0" anchor="t"/>
-          <a:lstStyle/>
-          <a:p>
-            <a:pPr indent="0" marL="0">
-              <a:lnSpc>
-                <a:spcPct val="115000"/>
-              </a:lnSpc>
-              <a:buNone/>
-            </a:pPr>
-            <a:r>
-              <a:rPr lang="en-US" sz="1400" dirty="0">
-                <a:solidFill>
-                  <a:srgbClr val="16211F"/>
-                </a:solidFill>
-                <a:latin typeface="Yu Gothic" pitchFamily="34" charset="0"/>
-                <a:ea typeface="Yu Gothic" pitchFamily="34" charset="-122"/>
-                <a:cs typeface="Yu Gothic" pitchFamily="34" charset="-120"/>
-              </a:rPr>
-              <a:t>説明するか・</a:t>
-            </a:r>
-            <a:endParaRPr lang="en-US" sz="1400" dirty="0"/>
-          </a:p>
-          <a:p>
-            <a:pPr indent="0" marL="0">
-              <a:lnSpc>
-                <a:spcPct val="115000"/>
-              </a:lnSpc>
-              <a:buNone/>
-            </a:pPr>
-            <a:r>
-              <a:rPr lang="en-US" sz="1400" dirty="0">
-                <a:solidFill>
-                  <a:srgbClr val="16211F"/>
-                </a:solidFill>
-                <a:latin typeface="Yu Gothic" pitchFamily="34" charset="0"/>
-                <a:ea typeface="Yu Gothic" pitchFamily="34" charset="-122"/>
-                <a:cs typeface="Yu Gothic" pitchFamily="34" charset="-120"/>
-              </a:rPr>
-              <a:t>公表するかを決める</a:t>
-            </a:r>
-            <a:endParaRPr lang="en-US" sz="1400" dirty="0"/>
-          </a:p>
-        </p:txBody>
-      </p:sp>
-      <p:sp>
-        <p:nvSpPr>
-          <p:cNvPr id="19" name="Shape 17"/>
-          <p:cNvSpPr/>
-          <p:nvPr/>
-        </p:nvSpPr>
-        <p:spPr>
-          <a:xfrm>
-            <a:off x="8791727" y="2852928"/>
-            <a:ext cx="256032" cy="329184"/>
-          </a:xfrm>
-          <a:prstGeom prst="rightArrow">
-            <a:avLst/>
-          </a:prstGeom>
-          <a:solidFill>
-            <a:srgbClr val="C9D5D1"/>
-          </a:solidFill>
-          <a:ln/>
-        </p:spPr>
-      </p:sp>
-      <p:sp>
-        <p:nvSpPr>
-          <p:cNvPr id="20" name="Shape 18"/>
-          <p:cNvSpPr/>
-          <p:nvPr/>
-        </p:nvSpPr>
-        <p:spPr>
-          <a:xfrm>
-            <a:off x="9111767" y="1508760"/>
-            <a:ext cx="2439848" cy="3017520"/>
-          </a:xfrm>
-          <a:prstGeom prst="roundRect">
-            <a:avLst>
-              <a:gd name="adj" fmla="val 1874"/>
-            </a:avLst>
-          </a:prstGeom>
-          <a:solidFill>
-            <a:srgbClr val="2E7D6B"/>
-          </a:solidFill>
-          <a:ln w="9525">
-            <a:solidFill>
-              <a:srgbClr val="2E7D6B"/>
-            </a:solidFill>
-            <a:prstDash val="solid"/>
-          </a:ln>
-        </p:spPr>
-      </p:sp>
-      <p:sp>
-        <p:nvSpPr>
-          <p:cNvPr id="21" name="Text 19"/>
-          <p:cNvSpPr/>
-          <p:nvPr/>
-        </p:nvSpPr>
-        <p:spPr>
-          <a:xfrm>
-            <a:off x="9294647" y="1655064"/>
-            <a:ext cx="2074088" cy="731520"/>
-          </a:xfrm>
-          <a:prstGeom prst="rect">
-            <a:avLst/>
-          </a:prstGeom>
-          <a:noFill/>
-          <a:ln/>
-        </p:spPr>
-        <p:txBody>
-          <a:bodyPr wrap="square" lIns="0" tIns="0" rIns="0" bIns="0" rtlCol="0" anchor="t"/>
-          <a:lstStyle/>
-          <a:p>
-            <a:pPr indent="0" marL="0">
-              <a:buNone/>
-            </a:pPr>
-            <a:r>
-              <a:rPr lang="en-US" sz="1600" b="1" dirty="0">
-                <a:solidFill>
-                  <a:srgbClr val="FFFFFF"/>
-                </a:solidFill>
-                <a:latin typeface="Yu Gothic" pitchFamily="34" charset="0"/>
-                <a:ea typeface="Yu Gothic" pitchFamily="34" charset="-122"/>
-                <a:cs typeface="Yu Gothic" pitchFamily="34" charset="-120"/>
-              </a:rPr>
-              <a:t>現場・取引先・</a:t>
-            </a:r>
-            <a:endParaRPr lang="en-US" sz="1600" dirty="0"/>
-          </a:p>
-          <a:p>
-            <a:pPr indent="0" marL="0">
-              <a:buNone/>
-            </a:pPr>
-            <a:r>
-              <a:rPr lang="en-US" sz="1600" b="1" dirty="0">
-                <a:solidFill>
-                  <a:srgbClr val="FFFFFF"/>
-                </a:solidFill>
-                <a:latin typeface="Yu Gothic" pitchFamily="34" charset="0"/>
-                <a:ea typeface="Yu Gothic" pitchFamily="34" charset="-122"/>
-                <a:cs typeface="Yu Gothic" pitchFamily="34" charset="-120"/>
-              </a:rPr>
-              <a:t>委託先</a:t>
-            </a:r>
-            <a:endParaRPr lang="en-US" sz="1600" dirty="0"/>
-          </a:p>
-        </p:txBody>
-      </p:sp>
-      <p:sp>
-        <p:nvSpPr>
-          <p:cNvPr id="22" name="Text 20"/>
-          <p:cNvSpPr/>
-          <p:nvPr/>
-        </p:nvSpPr>
-        <p:spPr>
-          <a:xfrm>
-            <a:off x="9294647" y="2478024"/>
-            <a:ext cx="2074088" cy="1938528"/>
-          </a:xfrm>
-          <a:prstGeom prst="rect">
-            <a:avLst/>
-          </a:prstGeom>
-          <a:noFill/>
-          <a:ln/>
-        </p:spPr>
-        <p:txBody>
-          <a:bodyPr wrap="square" lIns="0" tIns="0" rIns="0" bIns="0" rtlCol="0" anchor="t"/>
-          <a:lstStyle/>
-          <a:p>
-            <a:pPr indent="0" marL="0">
-              <a:lnSpc>
-                <a:spcPct val="115000"/>
-              </a:lnSpc>
-              <a:buNone/>
-            </a:pPr>
-            <a:r>
-              <a:rPr lang="en-US" sz="1400" dirty="0">
-                <a:solidFill>
-                  <a:srgbClr val="E8F0EC"/>
-                </a:solidFill>
-                <a:latin typeface="Yu Gothic" pitchFamily="34" charset="0"/>
-                <a:ea typeface="Yu Gothic" pitchFamily="34" charset="-122"/>
-                <a:cs typeface="Yu Gothic" pitchFamily="34" charset="-120"/>
-              </a:rPr>
-              <a:t>縮退運用で</a:t>
-            </a:r>
-            <a:endParaRPr lang="en-US" sz="1400" dirty="0"/>
-          </a:p>
-          <a:p>
-            <a:pPr indent="0" marL="0">
-              <a:lnSpc>
-                <a:spcPct val="115000"/>
-              </a:lnSpc>
-              <a:buNone/>
-            </a:pPr>
-            <a:r>
-              <a:rPr lang="en-US" sz="1400" dirty="0">
-                <a:solidFill>
-                  <a:srgbClr val="E8F0EC"/>
-                </a:solidFill>
-                <a:latin typeface="Yu Gothic" pitchFamily="34" charset="0"/>
-                <a:ea typeface="Yu Gothic" pitchFamily="34" charset="-122"/>
-                <a:cs typeface="Yu Gothic" pitchFamily="34" charset="-120"/>
-              </a:rPr>
-              <a:t>業務を続ける</a:t>
-            </a:r>
-            <a:endParaRPr lang="en-US" sz="1400" dirty="0"/>
-          </a:p>
-        </p:txBody>
-      </p:sp>
-      <p:sp>
-        <p:nvSpPr>
-          <p:cNvPr id="23" name="Shape 21"/>
-          <p:cNvSpPr/>
-          <p:nvPr/>
-        </p:nvSpPr>
-        <p:spPr>
-          <a:xfrm>
-            <a:off x="640080" y="4846320"/>
-            <a:ext cx="10911535" cy="658368"/>
-          </a:xfrm>
-          <a:prstGeom prst="rect">
-            <a:avLst/>
-          </a:prstGeom>
-          <a:solidFill>
-            <a:srgbClr val="F6EBD8"/>
-          </a:solidFill>
-          <a:ln/>
-        </p:spPr>
-      </p:sp>
-      <p:sp>
-        <p:nvSpPr>
-          <p:cNvPr id="24" name="Shape 22"/>
-          <p:cNvSpPr/>
-          <p:nvPr/>
-        </p:nvSpPr>
-        <p:spPr>
-          <a:xfrm>
-            <a:off x="640080" y="4846320"/>
-            <a:ext cx="73152" cy="658368"/>
-          </a:xfrm>
-          <a:prstGeom prst="rect">
-            <a:avLst/>
-          </a:prstGeom>
-          <a:solidFill>
-            <a:srgbClr val="C9821A"/>
-          </a:solidFill>
-          <a:ln/>
-        </p:spPr>
-      </p:sp>
-      <p:sp>
-        <p:nvSpPr>
-          <p:cNvPr id="25" name="Text 23"/>
-          <p:cNvSpPr/>
-          <p:nvPr/>
-        </p:nvSpPr>
-        <p:spPr>
-          <a:xfrm>
-            <a:off x="914400" y="4919472"/>
-            <a:ext cx="10454335" cy="512064"/>
-          </a:xfrm>
-          <a:prstGeom prst="rect">
-            <a:avLst/>
-          </a:prstGeom>
-          <a:noFill/>
-          <a:ln/>
-        </p:spPr>
-        <p:txBody>
-          <a:bodyPr wrap="square" lIns="0" tIns="0" rIns="0" bIns="0" rtlCol="0" anchor="ctr"/>
-          <a:lstStyle/>
-          <a:p>
-            <a:pPr indent="0" marL="0">
-              <a:buNone/>
-            </a:pPr>
-            <a:r>
-              <a:rPr lang="en-US" sz="1400" b="1" dirty="0">
-                <a:solidFill>
-                  <a:srgbClr val="16211F"/>
-                </a:solidFill>
-                <a:latin typeface="Yu Gothic" pitchFamily="34" charset="0"/>
-                <a:ea typeface="Yu Gothic" pitchFamily="34" charset="-122"/>
-                <a:cs typeface="Yu Gothic" pitchFamily="34" charset="-120"/>
-              </a:rPr>
-              <a:t>間を「翻訳」する人がいないと、判断は届きません。技術の言葉を経営の言葉に、経営の判断を現場の手順に。</a:t>
+              <a:t>判断を「その場で作らない」ための1枚です。5つの判断 × 1枚、A4 で5枚から始められます。</a:t>
             </a:r>
             <a:endParaRPr lang="en-US" sz="1400" dirty="0"/>
           </a:p>
@@ -11279,7 +11299,7 @@
                 <a:ea typeface="Yu Gothic" pitchFamily="34" charset="-122"/>
                 <a:cs typeface="Yu Gothic" pitchFamily="34" charset="-120"/>
               </a:rPr>
-              <a:t>AIは判断の材料を出します。決めるのと責任を負うのは人です</a:t>
+              <a:t>AIを判断の「相手」にします。決める権限と責任は人に残します</a:t>
             </a:r>
             <a:endParaRPr lang="en-US" sz="1900" dirty="0"/>
           </a:p>
@@ -11318,7 +11338,7 @@
                 <a:ea typeface="Yu Gothic" pitchFamily="34" charset="-122"/>
                 <a:cs typeface="Yu Gothic" pitchFamily="34" charset="-120"/>
               </a:rPr>
-              <a:t>AIの出力は「答え」ではなく「検証すべき仮説」として扱います</a:t>
+              <a:t>選択肢を並べさせ、反対の立場から問わせる。出力は「検証すべき仮説」として扱います</a:t>
             </a:r>
             <a:endParaRPr lang="en-US" sz="1400" dirty="0"/>
           </a:p>
@@ -12925,7 +12945,7 @@
                 <a:ea typeface="Yu Gothic" pitchFamily="34" charset="-122"/>
                 <a:cs typeface="Yu Gothic" pitchFamily="34" charset="-120"/>
               </a:rPr>
-              <a:t>5つの判断を書き出し、決める人と代わりの人を決める</a:t>
+              <a:t>5つの判断を判断カードにし、決める人と代わりの人を決める</a:t>
             </a:r>
             <a:endParaRPr lang="en-US" sz="1900" dirty="0"/>
           </a:p>
@@ -13062,7 +13082,7 @@
                 <a:ea typeface="Yu Gothic" pitchFamily="34" charset="-122"/>
                 <a:cs typeface="Yu Gothic" pitchFamily="34" charset="-120"/>
               </a:rPr>
-              <a:t>AIに任せる作業を、3段階に振り分ける</a:t>
+              <a:t>AIへの任せ方を3段階に分け、判断の場ではAIに反論させる</a:t>
             </a:r>
             <a:endParaRPr lang="en-US" sz="1900" dirty="0"/>
           </a:p>
@@ -13101,7 +13121,7 @@
                 <a:ea typeface="Yu Gothic" pitchFamily="34" charset="-122"/>
                 <a:cs typeface="Yu Gothic" pitchFamily="34" charset="-120"/>
               </a:rPr>
-              <a:t>取り消せるか・影響はどこまでか・後で説明できるか</a:t>
+              <a:t>取り消せるか・影響はどこまでか・後で説明できるか。決めるのは人</a:t>
             </a:r>
             <a:endParaRPr lang="en-US" sz="1400" dirty="0"/>
           </a:p>
@@ -13199,7 +13219,7 @@
                 <a:ea typeface="Yu Gothic" pitchFamily="34" charset="-122"/>
                 <a:cs typeface="Yu Gothic" pitchFamily="34" charset="-120"/>
               </a:rPr>
-              <a:t>AIを入れた机上演習を1回やり、判断カードを書き直す</a:t>
+              <a:t>AIを入れた机上演習で「暫定判断と見直し」を練習する</a:t>
             </a:r>
             <a:endParaRPr lang="en-US" sz="1900" dirty="0"/>
           </a:p>
@@ -13238,7 +13258,7 @@
                 <a:ea typeface="Yu Gothic" pitchFamily="34" charset="-122"/>
                 <a:cs typeface="Yu Gothic" pitchFamily="34" charset="-120"/>
               </a:rPr>
-              <a:t>最後に、次の演習日をカレンダーに入れる</a:t>
+              <a:t>終わったら判断カードを書き直し、次の演習日をカレンダーに入れる</a:t>
             </a:r>
             <a:endParaRPr lang="en-US" sz="1400" dirty="0"/>
           </a:p>
@@ -16471,11 +16491,11 @@
         <p:spPr>
           <a:xfrm>
             <a:off x="640080" y="1508760"/>
-            <a:ext cx="3381146" cy="3017520"/>
+            <a:ext cx="2439848" cy="3017520"/>
           </a:xfrm>
           <a:prstGeom prst="roundRect">
             <a:avLst>
-              <a:gd name="adj" fmla="val 1515"/>
+              <a:gd name="adj" fmla="val 1874"/>
             </a:avLst>
           </a:prstGeom>
           <a:solidFill>
@@ -16498,7 +16518,7 @@
         <p:spPr>
           <a:xfrm>
             <a:off x="822960" y="1655064"/>
-            <a:ext cx="3015386" cy="411480"/>
+            <a:ext cx="2074088" cy="411480"/>
           </a:xfrm>
           <a:prstGeom prst="rect">
             <a:avLst/>
@@ -16537,7 +16557,7 @@
         <p:spPr>
           <a:xfrm>
             <a:off x="822960" y="2157984"/>
-            <a:ext cx="3015386" cy="2258568"/>
+            <a:ext cx="2074088" cy="2258568"/>
           </a:xfrm>
           <a:prstGeom prst="rect">
             <a:avLst/>
@@ -16564,7 +16584,7 @@
                 <a:ea typeface="Yu Gothic" pitchFamily="34" charset="-122"/>
                 <a:cs typeface="Yu Gothic" pitchFamily="34" charset="-120"/>
               </a:rPr>
-              <a:t>脆弱性ゼロは目標にならない。</a:t>
+              <a:t>やられても事業が</a:t>
             </a:r>
             <a:endParaRPr lang="en-US" sz="1400" dirty="0"/>
           </a:p>
@@ -16584,7 +16604,7 @@
                 <a:ea typeface="Yu Gothic" pitchFamily="34" charset="-122"/>
                 <a:cs typeface="Yu Gothic" pitchFamily="34" charset="-120"/>
               </a:rPr>
-              <a:t>やられても事業が止まらない</a:t>
+              <a:t>止まらないことを目標に。</a:t>
             </a:r>
             <a:endParaRPr lang="en-US" sz="1400" dirty="0"/>
           </a:p>
@@ -16604,7 +16624,7 @@
                 <a:ea typeface="Yu Gothic" pitchFamily="34" charset="-122"/>
                 <a:cs typeface="Yu Gothic" pitchFamily="34" charset="-120"/>
               </a:rPr>
-              <a:t>ことを目標にする。</a:t>
+              <a:t>止まらない力は</a:t>
             </a:r>
             <a:endParaRPr lang="en-US" sz="1400" dirty="0"/>
           </a:p>
@@ -16624,7 +16644,7 @@
                 <a:ea typeface="Yu Gothic" pitchFamily="34" charset="-122"/>
                 <a:cs typeface="Yu Gothic" pitchFamily="34" charset="-120"/>
               </a:rPr>
-              <a:t>止まらない力は訓練で得る</a:t>
+              <a:t>訓練で得る</a:t>
             </a:r>
             <a:endParaRPr lang="en-US" sz="1400" dirty="0"/>
           </a:p>
@@ -16638,7 +16658,7 @@
         </p:nvSpPr>
         <p:spPr>
           <a:xfrm>
-            <a:off x="4085234" y="2852928"/>
+            <a:off x="3143936" y="2852928"/>
             <a:ext cx="256032" cy="329184"/>
           </a:xfrm>
           <a:prstGeom prst="rightArrow">
@@ -16658,12 +16678,12 @@
         </p:nvSpPr>
         <p:spPr>
           <a:xfrm>
-            <a:off x="4405274" y="1508760"/>
-            <a:ext cx="3381146" cy="3017520"/>
+            <a:off x="3463976" y="1508760"/>
+            <a:ext cx="2439848" cy="3017520"/>
           </a:xfrm>
           <a:prstGeom prst="roundRect">
             <a:avLst>
-              <a:gd name="adj" fmla="val 1515"/>
+              <a:gd name="adj" fmla="val 1874"/>
             </a:avLst>
           </a:prstGeom>
           <a:solidFill>
@@ -16685,8 +16705,8 @@
         </p:nvSpPr>
         <p:spPr>
           <a:xfrm>
-            <a:off x="4588154" y="1655064"/>
-            <a:ext cx="3015386" cy="411480"/>
+            <a:off x="3646856" y="1655064"/>
+            <a:ext cx="2074088" cy="411480"/>
           </a:xfrm>
           <a:prstGeom prst="rect">
             <a:avLst/>
@@ -16710,7 +16730,7 @@
                 <a:ea typeface="Yu Gothic" pitchFamily="34" charset="-122"/>
                 <a:cs typeface="Yu Gothic" pitchFamily="34" charset="-120"/>
               </a:rPr>
-              <a:t>FIT2026（9月）</a:t>
+              <a:t>5月　鹿児島</a:t>
             </a:r>
             <a:endParaRPr lang="en-US" sz="1600" dirty="0"/>
           </a:p>
@@ -16724,8 +16744,8 @@
         </p:nvSpPr>
         <p:spPr>
           <a:xfrm>
-            <a:off x="4588154" y="2157984"/>
-            <a:ext cx="3015386" cy="2258568"/>
+            <a:off x="3646856" y="2157984"/>
+            <a:ext cx="2074088" cy="2258568"/>
           </a:xfrm>
           <a:prstGeom prst="rect">
             <a:avLst/>
@@ -16752,7 +16772,7 @@
                 <a:ea typeface="Yu Gothic" pitchFamily="34" charset="-122"/>
                 <a:cs typeface="Yu Gothic" pitchFamily="34" charset="-120"/>
               </a:rPr>
-              <a:t>AIで発見が速くなるほど、</a:t>
+              <a:t>作業はAI、判断は人。</a:t>
             </a:r>
             <a:endParaRPr lang="en-US" sz="1400" dirty="0"/>
           </a:p>
@@ -16772,7 +16792,7 @@
                 <a:ea typeface="Yu Gothic" pitchFamily="34" charset="-122"/>
                 <a:cs typeface="Yu Gothic" pitchFamily="34" charset="-120"/>
               </a:rPr>
-              <a:t>律速点は人の判断と説明へ。</a:t>
+              <a:t>判断をその場で作る</a:t>
             </a:r>
             <a:endParaRPr lang="en-US" sz="1400" dirty="0"/>
           </a:p>
@@ -16792,7 +16812,7 @@
                 <a:ea typeface="Yu Gothic" pitchFamily="34" charset="-122"/>
                 <a:cs typeface="Yu Gothic" pitchFamily="34" charset="-120"/>
               </a:rPr>
-              <a:t>AI出力を「検証すべき仮説」</a:t>
+              <a:t>組織は追いつけない。</a:t>
             </a:r>
             <a:endParaRPr lang="en-US" sz="1400" dirty="0"/>
           </a:p>
@@ -16812,7 +16832,7 @@
                 <a:ea typeface="Yu Gothic" pitchFamily="34" charset="-122"/>
                 <a:cs typeface="Yu Gothic" pitchFamily="34" charset="-120"/>
               </a:rPr>
-              <a:t>として扱う人材を育てる</a:t>
+              <a:t>→ 判断を設計する</a:t>
             </a:r>
             <a:endParaRPr lang="en-US" sz="1400" dirty="0"/>
           </a:p>
@@ -16826,7 +16846,7 @@
         </p:nvSpPr>
         <p:spPr>
           <a:xfrm>
-            <a:off x="7850429" y="2852928"/>
+            <a:off x="5967832" y="2852928"/>
             <a:ext cx="256032" cy="329184"/>
           </a:xfrm>
           <a:prstGeom prst="rightArrow">
@@ -16846,12 +16866,200 @@
         </p:nvSpPr>
         <p:spPr>
           <a:xfrm>
-            <a:off x="8170469" y="1508760"/>
-            <a:ext cx="3381146" cy="3017520"/>
+            <a:off x="6287872" y="1508760"/>
+            <a:ext cx="2439848" cy="3017520"/>
           </a:xfrm>
           <a:prstGeom prst="roundRect">
             <a:avLst>
-              <a:gd name="adj" fmla="val 1515"/>
+              <a:gd name="adj" fmla="val 1874"/>
+            </a:avLst>
+          </a:prstGeom>
+          <a:solidFill>
+            <a:srgbClr val="EDF3F1"/>
+          </a:solidFill>
+          <a:ln w="9525">
+            <a:solidFill>
+              <a:srgbClr val="C9D5D1"/>
+            </a:solidFill>
+            <a:prstDash val="solid"/>
+          </a:ln>
+        </p:spPr>
+      </p:sp>
+      <p:sp>
+        <p:nvSpPr>
+          <p:cNvPr id="17" name="Text 15"/>
+          <p:cNvSpPr/>
+          <p:nvPr/>
+        </p:nvSpPr>
+        <p:spPr>
+          <a:xfrm>
+            <a:off x="6470752" y="1655064"/>
+            <a:ext cx="2074088" cy="411480"/>
+          </a:xfrm>
+          <a:prstGeom prst="rect">
+            <a:avLst/>
+          </a:prstGeom>
+          <a:noFill/>
+          <a:ln/>
+        </p:spPr>
+        <p:txBody>
+          <a:bodyPr wrap="square" lIns="0" tIns="0" rIns="0" bIns="0" rtlCol="0" anchor="t"/>
+          <a:lstStyle/>
+          <a:p>
+            <a:pPr indent="0" marL="0">
+              <a:buNone/>
+            </a:pPr>
+            <a:r>
+              <a:rPr lang="en-US" sz="1600" b="1" dirty="0">
+                <a:solidFill>
+                  <a:srgbClr val="2E7D6B"/>
+                </a:solidFill>
+                <a:latin typeface="Yu Gothic" pitchFamily="34" charset="0"/>
+                <a:ea typeface="Yu Gothic" pitchFamily="34" charset="-122"/>
+                <a:cs typeface="Yu Gothic" pitchFamily="34" charset="-120"/>
+              </a:rPr>
+              <a:t>9月　FIT2026</a:t>
+            </a:r>
+            <a:endParaRPr lang="en-US" sz="1600" dirty="0"/>
+          </a:p>
+        </p:txBody>
+      </p:sp>
+      <p:sp>
+        <p:nvSpPr>
+          <p:cNvPr id="18" name="Text 16"/>
+          <p:cNvSpPr/>
+          <p:nvPr/>
+        </p:nvSpPr>
+        <p:spPr>
+          <a:xfrm>
+            <a:off x="6470752" y="2157984"/>
+            <a:ext cx="2074088" cy="2258568"/>
+          </a:xfrm>
+          <a:prstGeom prst="rect">
+            <a:avLst/>
+          </a:prstGeom>
+          <a:noFill/>
+          <a:ln/>
+        </p:spPr>
+        <p:txBody>
+          <a:bodyPr wrap="square" lIns="0" tIns="0" rIns="0" bIns="0" rtlCol="0" anchor="t"/>
+          <a:lstStyle/>
+          <a:p>
+            <a:pPr indent="0" marL="0">
+              <a:lnSpc>
+                <a:spcPct val="115000"/>
+              </a:lnSpc>
+              <a:buNone/>
+            </a:pPr>
+            <a:r>
+              <a:rPr lang="en-US" sz="1400" dirty="0">
+                <a:solidFill>
+                  <a:srgbClr val="16211F"/>
+                </a:solidFill>
+                <a:latin typeface="Yu Gothic" pitchFamily="34" charset="0"/>
+                <a:ea typeface="Yu Gothic" pitchFamily="34" charset="-122"/>
+                <a:cs typeface="Yu Gothic" pitchFamily="34" charset="-120"/>
+              </a:rPr>
+              <a:t>AI出力は「答え」ではなく</a:t>
+            </a:r>
+            <a:endParaRPr lang="en-US" sz="1400" dirty="0"/>
+          </a:p>
+          <a:p>
+            <a:pPr indent="0" marL="0">
+              <a:lnSpc>
+                <a:spcPct val="115000"/>
+              </a:lnSpc>
+              <a:buNone/>
+            </a:pPr>
+            <a:r>
+              <a:rPr lang="en-US" sz="1400" dirty="0">
+                <a:solidFill>
+                  <a:srgbClr val="16211F"/>
+                </a:solidFill>
+                <a:latin typeface="Yu Gothic" pitchFamily="34" charset="0"/>
+                <a:ea typeface="Yu Gothic" pitchFamily="34" charset="-122"/>
+                <a:cs typeface="Yu Gothic" pitchFamily="34" charset="-120"/>
+              </a:rPr>
+              <a:t>「検証すべき仮説」。</a:t>
+            </a:r>
+            <a:endParaRPr lang="en-US" sz="1400" dirty="0"/>
+          </a:p>
+          <a:p>
+            <a:pPr indent="0" marL="0">
+              <a:lnSpc>
+                <a:spcPct val="115000"/>
+              </a:lnSpc>
+              <a:buNone/>
+            </a:pPr>
+            <a:r>
+              <a:rPr lang="en-US" sz="1400" dirty="0">
+                <a:solidFill>
+                  <a:srgbClr val="16211F"/>
+                </a:solidFill>
+                <a:latin typeface="Yu Gothic" pitchFamily="34" charset="0"/>
+                <a:ea typeface="Yu Gothic" pitchFamily="34" charset="-122"/>
+                <a:cs typeface="Yu Gothic" pitchFamily="34" charset="-120"/>
+              </a:rPr>
+              <a:t>それを事業継続判断へ</a:t>
+            </a:r>
+            <a:endParaRPr lang="en-US" sz="1400" dirty="0"/>
+          </a:p>
+          <a:p>
+            <a:pPr indent="0" marL="0">
+              <a:lnSpc>
+                <a:spcPct val="115000"/>
+              </a:lnSpc>
+              <a:buNone/>
+            </a:pPr>
+            <a:r>
+              <a:rPr lang="en-US" sz="1400" dirty="0">
+                <a:solidFill>
+                  <a:srgbClr val="16211F"/>
+                </a:solidFill>
+                <a:latin typeface="Yu Gothic" pitchFamily="34" charset="0"/>
+                <a:ea typeface="Yu Gothic" pitchFamily="34" charset="-122"/>
+                <a:cs typeface="Yu Gothic" pitchFamily="34" charset="-120"/>
+              </a:rPr>
+              <a:t>変換する人材を育てる</a:t>
+            </a:r>
+            <a:endParaRPr lang="en-US" sz="1400" dirty="0"/>
+          </a:p>
+        </p:txBody>
+      </p:sp>
+      <p:sp>
+        <p:nvSpPr>
+          <p:cNvPr id="19" name="Shape 17"/>
+          <p:cNvSpPr/>
+          <p:nvPr/>
+        </p:nvSpPr>
+        <p:spPr>
+          <a:xfrm>
+            <a:off x="8791727" y="2852928"/>
+            <a:ext cx="256032" cy="329184"/>
+          </a:xfrm>
+          <a:prstGeom prst="rightArrow">
+            <a:avLst/>
+          </a:prstGeom>
+          <a:solidFill>
+            <a:srgbClr val="C9D5D1"/>
+          </a:solidFill>
+          <a:ln/>
+        </p:spPr>
+      </p:sp>
+      <p:sp>
+        <p:nvSpPr>
+          <p:cNvPr id="20" name="Shape 18"/>
+          <p:cNvSpPr/>
+          <p:nvPr/>
+        </p:nvSpPr>
+        <p:spPr>
+          <a:xfrm>
+            <a:off x="9111767" y="1508760"/>
+            <a:ext cx="2439848" cy="3017520"/>
+          </a:xfrm>
+          <a:prstGeom prst="roundRect">
+            <a:avLst>
+              <a:gd name="adj" fmla="val 1874"/>
             </a:avLst>
           </a:prstGeom>
           <a:solidFill>
@@ -16867,14 +17075,14 @@
       </p:sp>
       <p:sp>
         <p:nvSpPr>
-          <p:cNvPr id="17" name="Text 15"/>
-          <p:cNvSpPr/>
-          <p:nvPr/>
-        </p:nvSpPr>
-        <p:spPr>
-          <a:xfrm>
-            <a:off x="8353349" y="1655064"/>
-            <a:ext cx="3015386" cy="411480"/>
+          <p:cNvPr id="21" name="Text 19"/>
+          <p:cNvSpPr/>
+          <p:nvPr/>
+        </p:nvSpPr>
+        <p:spPr>
+          <a:xfrm>
+            <a:off x="9294647" y="1655064"/>
+            <a:ext cx="2074088" cy="411480"/>
           </a:xfrm>
           <a:prstGeom prst="rect">
             <a:avLst/>
@@ -16906,14 +17114,14 @@
       </p:sp>
       <p:sp>
         <p:nvSpPr>
-          <p:cNvPr id="18" name="Text 16"/>
-          <p:cNvSpPr/>
-          <p:nvPr/>
-        </p:nvSpPr>
-        <p:spPr>
-          <a:xfrm>
-            <a:off x="8353349" y="2157984"/>
-            <a:ext cx="3015386" cy="2258568"/>
+          <p:cNvPr id="22" name="Text 20"/>
+          <p:cNvSpPr/>
+          <p:nvPr/>
+        </p:nvSpPr>
+        <p:spPr>
+          <a:xfrm>
+            <a:off x="9294647" y="2157984"/>
+            <a:ext cx="2074088" cy="2258568"/>
           </a:xfrm>
           <a:prstGeom prst="rect">
             <a:avLst/>
@@ -16940,7 +17148,7 @@
                 <a:ea typeface="Yu Gothic" pitchFamily="34" charset="-122"/>
                 <a:cs typeface="Yu Gothic" pitchFamily="34" charset="-120"/>
               </a:rPr>
-              <a:t>その判断を、個人の力量に</a:t>
+              <a:t>AIを判断の「相手」にし、</a:t>
             </a:r>
             <a:endParaRPr lang="en-US" sz="1400" dirty="0"/>
           </a:p>
@@ -16960,7 +17168,7 @@
                 <a:ea typeface="Yu Gothic" pitchFamily="34" charset="-122"/>
                 <a:cs typeface="Yu Gothic" pitchFamily="34" charset="-120"/>
               </a:rPr>
-              <a:t>任せず、組織の仕組みとして</a:t>
+              <a:t>不確実なまま</a:t>
             </a:r>
             <a:endParaRPr lang="en-US" sz="1400" dirty="0"/>
           </a:p>
@@ -16980,15 +17188,35 @@
                 <a:ea typeface="Yu Gothic" pitchFamily="34" charset="-122"/>
                 <a:cs typeface="Yu Gothic" pitchFamily="34" charset="-120"/>
               </a:rPr>
-              <a:t>平時に設計しておく</a:t>
+              <a:t>早く決め直せる組織を、</a:t>
             </a:r>
             <a:endParaRPr lang="en-US" sz="1400" dirty="0"/>
           </a:p>
-        </p:txBody>
-      </p:sp>
-      <p:sp>
-        <p:nvSpPr>
-          <p:cNvPr id="19" name="Shape 17"/>
+          <a:p>
+            <a:pPr indent="0" marL="0">
+              <a:lnSpc>
+                <a:spcPct val="115000"/>
+              </a:lnSpc>
+              <a:buNone/>
+            </a:pPr>
+            <a:r>
+              <a:rPr lang="en-US" sz="1400" dirty="0">
+                <a:solidFill>
+                  <a:srgbClr val="E8F0EC"/>
+                </a:solidFill>
+                <a:latin typeface="Yu Gothic" pitchFamily="34" charset="0"/>
+                <a:ea typeface="Yu Gothic" pitchFamily="34" charset="-122"/>
+                <a:cs typeface="Yu Gothic" pitchFamily="34" charset="-120"/>
+              </a:rPr>
+              <a:t>限られた人員で作る</a:t>
+            </a:r>
+            <a:endParaRPr lang="en-US" sz="1400" dirty="0"/>
+          </a:p>
+        </p:txBody>
+      </p:sp>
+      <p:sp>
+        <p:nvSpPr>
+          <p:cNvPr id="23" name="Shape 21"/>
           <p:cNvSpPr/>
           <p:nvPr/>
         </p:nvSpPr>
@@ -17008,7 +17236,7 @@
       </p:sp>
       <p:sp>
         <p:nvSpPr>
-          <p:cNvPr id="20" name="Shape 18"/>
+          <p:cNvPr id="24" name="Shape 22"/>
           <p:cNvSpPr/>
           <p:nvPr/>
         </p:nvSpPr>
@@ -17028,7 +17256,7 @@
       </p:sp>
       <p:sp>
         <p:nvSpPr>
-          <p:cNvPr id="21" name="Text 19"/>
+          <p:cNvPr id="25" name="Text 23"/>
           <p:cNvSpPr/>
           <p:nvPr/>
         </p:nvSpPr>
@@ -17059,7 +17287,7 @@
                 <a:ea typeface="Yu Gothic" pitchFamily="34" charset="-122"/>
                 <a:cs typeface="Yu Gothic" pitchFamily="34" charset="-120"/>
               </a:rPr>
-              <a:t>「がんばれる人がいる組織」から、「誰が当番でも判断が回る組織」へ。</a:t>
+              <a:t>「作業はAI、判断は人」から一歩進めて、「AIとともに判断する」へ。</a:t>
             </a:r>
             <a:endParaRPr lang="en-US" sz="1400" dirty="0"/>
           </a:p>
@@ -17365,7 +17593,7 @@
                 <a:ea typeface="Yu Gothic" pitchFamily="34" charset="-122"/>
                 <a:cs typeface="Yu Gothic" pitchFamily="34" charset="-120"/>
               </a:rPr>
-              <a:t>6分</a:t>
+              <a:t>5分</a:t>
             </a:r>
             <a:endParaRPr lang="en-US" sz="1500" dirty="0"/>
           </a:p>
@@ -17463,7 +17691,7 @@
                 <a:ea typeface="Yu Gothic" pitchFamily="34" charset="-122"/>
                 <a:cs typeface="Yu Gothic" pitchFamily="34" charset="-120"/>
               </a:rPr>
-              <a:t>何が速くなり、何が残ったか。5つの判断</a:t>
+              <a:t>判断に使える時間が短くなった。5つの判断</a:t>
             </a:r>
             <a:endParaRPr lang="en-US" sz="1400" dirty="0"/>
           </a:p>
@@ -17522,7 +17750,7 @@
                 <a:ea typeface="Yu Gothic" pitchFamily="34" charset="-122"/>
                 <a:cs typeface="Yu Gothic" pitchFamily="34" charset="-120"/>
               </a:rPr>
-              <a:t>8分</a:t>
+              <a:t>9分</a:t>
             </a:r>
             <a:endParaRPr lang="en-US" sz="1500" dirty="0"/>
           </a:p>
@@ -17620,7 +17848,7 @@
                 <a:ea typeface="Yu Gothic" pitchFamily="34" charset="-122"/>
                 <a:cs typeface="Yu Gothic" pitchFamily="34" charset="-120"/>
               </a:rPr>
-              <a:t>任せ方の3段階と、暫定判断という考え方</a:t>
+              <a:t>AIを判断の相手にする。ミニ演習と暫定判断</a:t>
             </a:r>
             <a:endParaRPr lang="en-US" sz="1400" dirty="0"/>
           </a:p>
@@ -17679,7 +17907,7 @@
                 <a:ea typeface="Yu Gothic" pitchFamily="34" charset="-122"/>
                 <a:cs typeface="Yu Gothic" pitchFamily="34" charset="-120"/>
               </a:rPr>
-              <a:t>6分</a:t>
+              <a:t>5分</a:t>
             </a:r>
             <a:endParaRPr lang="en-US" sz="1500" dirty="0"/>
           </a:p>
@@ -17777,7 +18005,7 @@
                 <a:ea typeface="Yu Gothic" pitchFamily="34" charset="-122"/>
                 <a:cs typeface="Yu Gothic" pitchFamily="34" charset="-120"/>
               </a:rPr>
-              <a:t>判断カードと、部門・組織をまたぐつながり</a:t>
+              <a:t>任せ方の3段階と判断カード</a:t>
             </a:r>
             <a:endParaRPr lang="en-US" sz="1400" dirty="0"/>
           </a:p>
@@ -18469,7 +18697,7 @@
                 <a:ea typeface="Yu Gothic" pitchFamily="34" charset="-122"/>
                 <a:cs typeface="Yu Gothic" pitchFamily="34" charset="-120"/>
               </a:rPr>
-              <a:t>6分</a:t>
+              <a:t>5分</a:t>
             </a:r>
             <a:endParaRPr lang="en-US" sz="1100" dirty="0"/>
           </a:p>
@@ -18686,7 +18914,7 @@
                 <a:ea typeface="Yu Gothic" pitchFamily="34" charset="-122"/>
                 <a:cs typeface="Yu Gothic" pitchFamily="34" charset="-120"/>
               </a:rPr>
-              <a:t>脆弱性候補、アラート、</a:t>
+              <a:t>脆弱性候補、PoC、</a:t>
             </a:r>
             <a:endParaRPr lang="en-US" sz="1400" dirty="0"/>
           </a:p>
@@ -18703,7 +18931,7 @@
                 <a:ea typeface="Yu Gothic" pitchFamily="34" charset="-122"/>
                 <a:cs typeface="Yu Gothic" pitchFamily="34" charset="-120"/>
               </a:rPr>
-              <a:t>侵害の疑いが大量に届く</a:t>
+              <a:t>アラートが大量に、速く届く</a:t>
             </a:r>
             <a:endParaRPr lang="en-US" sz="1400" dirty="0"/>
           </a:p>
@@ -18960,7 +19188,24 @@
                 <a:ea typeface="Yu Gothic" pitchFamily="34" charset="-122"/>
                 <a:cs typeface="Yu Gothic" pitchFamily="34" charset="-120"/>
               </a:rPr>
-              <a:t>ここが律速点</a:t>
+              <a:t>ここが律速点。</a:t>
+            </a:r>
+            <a:endParaRPr lang="en-US" sz="1400" dirty="0"/>
+          </a:p>
+          <a:p>
+            <a:pPr algn="ctr" indent="0" marL="0">
+              <a:buNone/>
+            </a:pPr>
+            <a:r>
+              <a:rPr lang="en-US" sz="1400" dirty="0">
+                <a:solidFill>
+                  <a:srgbClr val="FFFFFF"/>
+                </a:solidFill>
+                <a:latin typeface="Yu Gothic" pitchFamily="34" charset="0"/>
+                <a:ea typeface="Yu Gothic" pitchFamily="34" charset="-122"/>
+                <a:cs typeface="Yu Gothic" pitchFamily="34" charset="-120"/>
+              </a:rPr>
+              <a:t>判断に使える時間は短くなった</a:t>
             </a:r>
             <a:endParaRPr lang="en-US" sz="1400" dirty="0"/>
           </a:p>
@@ -19197,7 +19442,7 @@
                 <a:ea typeface="Yu Gothic" pitchFamily="34" charset="-122"/>
                 <a:cs typeface="Yu Gothic" pitchFamily="34" charset="-120"/>
               </a:rPr>
-              <a:t>届くかを見る</a:t>
+              <a:t>自社に届くかを見る</a:t>
             </a:r>
             <a:endParaRPr lang="en-US" sz="1400" dirty="0"/>
           </a:p>
@@ -19604,7 +19849,7 @@
                 <a:ea typeface="Yu Gothic" pitchFamily="34" charset="-122"/>
                 <a:cs typeface="Yu Gothic" pitchFamily="34" charset="-120"/>
               </a:rPr>
-              <a:t>6分</a:t>
+              <a:t>5分</a:t>
             </a:r>
             <a:endParaRPr lang="en-US" sz="1100" dirty="0"/>
           </a:p>
@@ -19829,7 +20074,7 @@
                 <a:ea typeface="Yu Gothic" pitchFamily="34" charset="-122"/>
                 <a:cs typeface="Yu Gothic" pitchFamily="34" charset="-120"/>
               </a:rPr>
-              <a:t>サービスやシステムを止めるか。どこまで止めるか</a:t>
+              <a:t>サービス・リリースを止めるか。どこまで止めるか</a:t>
             </a:r>
             <a:endParaRPr lang="en-US" sz="1300" dirty="0"/>
           </a:p>
@@ -20470,7 +20715,7 @@
                 <a:ea typeface="Yu Gothic" pitchFamily="34" charset="-122"/>
                 <a:cs typeface="Yu Gothic" pitchFamily="34" charset="-120"/>
               </a:rPr>
-              <a:t>6分</a:t>
+              <a:t>5分</a:t>
             </a:r>
             <a:endParaRPr lang="en-US" sz="1100" dirty="0"/>
           </a:p>
@@ -22102,7 +22347,7 @@
                 <a:ea typeface="Yu Gothic" pitchFamily="34" charset="-122"/>
                 <a:cs typeface="Yu Gothic" pitchFamily="34" charset="-120"/>
               </a:rPr>
-              <a:t>AIの出力は「答え」ではなく「検証すべき仮説」</a:t>
+              <a:t>「作業はAI、判断は人」の、その先へ</a:t>
             </a:r>
             <a:endParaRPr lang="en-US" sz="1800" dirty="0"/>
           </a:p>
